--- a/figures/Fig7_window_baseline_sensitivity_v2.pptx
+++ b/figures/Fig7_window_baseline_sensitivity_v2.pptx
@@ -2307,7 +2307,7 @@
           <p:spPr>
             <a:xfrm>
               <a:off x="252469" y="252469"/>
-              <a:ext cx="5051050" cy="3201219"/>
+              <a:ext cx="5051050" cy="3187503"/>
             </a:xfrm>
             <a:prstGeom prst="rect">
               <a:avLst/>
@@ -2317,7 +2317,7 @@
                 <a:alpha val="100000"/>
               </a:srgbClr>
             </a:solidFill>
-            <a:ln w="11086" cap="rnd">
+            <a:ln w="12318" cap="rnd">
               <a:solidFill>
                 <a:srgbClr val="FFFFFF">
                   <a:alpha val="100000"/>
@@ -2342,7 +2342,7 @@
           <p:spPr>
             <a:xfrm>
               <a:off x="5303520" y="252469"/>
-              <a:ext cx="5051050" cy="3201219"/>
+              <a:ext cx="5051050" cy="3187503"/>
             </a:xfrm>
             <a:prstGeom prst="rect">
               <a:avLst/>
@@ -2352,7 +2352,7 @@
                 <a:alpha val="100000"/>
               </a:srgbClr>
             </a:solidFill>
-            <a:ln w="11086" cap="rnd">
+            <a:ln w="12318" cap="rnd">
               <a:solidFill>
                 <a:srgbClr val="FFFFFF">
                   <a:alpha val="100000"/>
@@ -2376,8 +2376,8 @@
           </p:nvSpPr>
           <p:spPr>
             <a:xfrm>
-              <a:off x="666023" y="656226"/>
-              <a:ext cx="4536275" cy="2451548"/>
+              <a:off x="701215" y="818749"/>
+              <a:ext cx="4501084" cy="2244873"/>
             </a:xfrm>
             <a:prstGeom prst="rect">
               <a:avLst/>
@@ -2402,21 +2402,21 @@
           </p:nvSpPr>
           <p:spPr>
             <a:xfrm>
-              <a:off x="666023" y="2996341"/>
-              <a:ext cx="4536275" cy="0"/>
+              <a:off x="701215" y="2961583"/>
+              <a:ext cx="4501084" cy="0"/>
             </a:xfrm>
             <a:custGeom>
               <a:avLst/>
               <a:pathLst>
-                <a:path w="4536275" h="0">
+                <a:path w="4501084" h="0">
                   <a:moveTo>
                     <a:pt x="0" y="0"/>
                   </a:moveTo>
                   <a:lnTo>
-                    <a:pt x="4536275" y="0"/>
-                  </a:lnTo>
-                  <a:lnTo>
-                    <a:pt x="4536275" y="0"/>
+                    <a:pt x="4501084" y="0"/>
+                  </a:lnTo>
+                  <a:lnTo>
+                    <a:pt x="4501084" y="0"/>
                   </a:lnTo>
                 </a:path>
               </a:pathLst>
@@ -2445,21 +2445,21 @@
           </p:nvSpPr>
           <p:spPr>
             <a:xfrm>
-              <a:off x="666023" y="2210924"/>
-              <a:ext cx="4536275" cy="0"/>
+              <a:off x="701215" y="2242379"/>
+              <a:ext cx="4501084" cy="0"/>
             </a:xfrm>
             <a:custGeom>
               <a:avLst/>
               <a:pathLst>
-                <a:path w="4536275" h="0">
+                <a:path w="4501084" h="0">
                   <a:moveTo>
                     <a:pt x="0" y="0"/>
                   </a:moveTo>
                   <a:lnTo>
-                    <a:pt x="4536275" y="0"/>
-                  </a:lnTo>
-                  <a:lnTo>
-                    <a:pt x="4536275" y="0"/>
+                    <a:pt x="4501084" y="0"/>
+                  </a:lnTo>
+                  <a:lnTo>
+                    <a:pt x="4501084" y="0"/>
                   </a:lnTo>
                 </a:path>
               </a:pathLst>
@@ -2488,21 +2488,21 @@
           </p:nvSpPr>
           <p:spPr>
             <a:xfrm>
-              <a:off x="666023" y="1425506"/>
-              <a:ext cx="4536275" cy="0"/>
+              <a:off x="701215" y="1523176"/>
+              <a:ext cx="4501084" cy="0"/>
             </a:xfrm>
             <a:custGeom>
               <a:avLst/>
               <a:pathLst>
-                <a:path w="4536275" h="0">
+                <a:path w="4501084" h="0">
                   <a:moveTo>
                     <a:pt x="0" y="0"/>
                   </a:moveTo>
                   <a:lnTo>
-                    <a:pt x="4536275" y="0"/>
-                  </a:lnTo>
-                  <a:lnTo>
-                    <a:pt x="4536275" y="0"/>
+                    <a:pt x="4501084" y="0"/>
+                  </a:lnTo>
+                  <a:lnTo>
+                    <a:pt x="4501084" y="0"/>
                   </a:lnTo>
                 </a:path>
               </a:pathLst>
@@ -2531,21 +2531,21 @@
           </p:nvSpPr>
           <p:spPr>
             <a:xfrm>
-              <a:off x="666023" y="2996341"/>
-              <a:ext cx="4536275" cy="0"/>
+              <a:off x="701215" y="2961583"/>
+              <a:ext cx="4501084" cy="0"/>
             </a:xfrm>
             <a:custGeom>
               <a:avLst/>
               <a:pathLst>
-                <a:path w="4536275" h="0">
+                <a:path w="4501084" h="0">
                   <a:moveTo>
                     <a:pt x="0" y="0"/>
                   </a:moveTo>
                   <a:lnTo>
-                    <a:pt x="4536275" y="0"/>
-                  </a:lnTo>
-                  <a:lnTo>
-                    <a:pt x="4536275" y="0"/>
+                    <a:pt x="4501084" y="0"/>
+                  </a:lnTo>
+                  <a:lnTo>
+                    <a:pt x="4501084" y="0"/>
                   </a:lnTo>
                 </a:path>
               </a:pathLst>
@@ -2574,36 +2574,36 @@
           </p:nvSpPr>
           <p:spPr>
             <a:xfrm>
-              <a:off x="872218" y="767660"/>
-              <a:ext cx="4123886" cy="2018542"/>
+              <a:off x="905810" y="920789"/>
+              <a:ext cx="4091894" cy="1848371"/>
             </a:xfrm>
             <a:custGeom>
               <a:avLst/>
               <a:pathLst>
-                <a:path w="4123886" h="2018542">
+                <a:path w="4091894" h="1848371">
                   <a:moveTo>
-                    <a:pt x="0" y="1080182"/>
+                    <a:pt x="0" y="989118"/>
                   </a:moveTo>
                   <a:lnTo>
-                    <a:pt x="1374628" y="837303"/>
-                  </a:lnTo>
-                  <a:lnTo>
-                    <a:pt x="2749257" y="169444"/>
-                  </a:lnTo>
-                  <a:lnTo>
-                    <a:pt x="4123886" y="0"/>
-                  </a:lnTo>
-                  <a:lnTo>
-                    <a:pt x="4123886" y="1270419"/>
-                  </a:lnTo>
-                  <a:lnTo>
-                    <a:pt x="2749257" y="1379306"/>
-                  </a:lnTo>
-                  <a:lnTo>
-                    <a:pt x="1374628" y="1890806"/>
-                  </a:lnTo>
-                  <a:lnTo>
-                    <a:pt x="0" y="2018542"/>
+                    <a:pt x="1363964" y="766715"/>
+                  </a:lnTo>
+                  <a:lnTo>
+                    <a:pt x="2727929" y="155159"/>
+                  </a:lnTo>
+                  <a:lnTo>
+                    <a:pt x="4091894" y="0"/>
+                  </a:lnTo>
+                  <a:lnTo>
+                    <a:pt x="4091894" y="1163317"/>
+                  </a:lnTo>
+                  <a:lnTo>
+                    <a:pt x="2727929" y="1263025"/>
+                  </a:lnTo>
+                  <a:lnTo>
+                    <a:pt x="1363964" y="1731403"/>
+                  </a:lnTo>
+                  <a:lnTo>
+                    <a:pt x="0" y="1848371"/>
                   </a:lnTo>
                   <a:close/>
                 </a:path>
@@ -2629,24 +2629,24 @@
           </p:nvSpPr>
           <p:spPr>
             <a:xfrm>
-              <a:off x="872218" y="767660"/>
-              <a:ext cx="4123886" cy="1080182"/>
+              <a:off x="905810" y="920789"/>
+              <a:ext cx="4091894" cy="989118"/>
             </a:xfrm>
             <a:custGeom>
               <a:avLst/>
               <a:pathLst>
-                <a:path w="4123886" h="1080182">
+                <a:path w="4091894" h="989118">
                   <a:moveTo>
-                    <a:pt x="0" y="1080182"/>
+                    <a:pt x="0" y="989118"/>
                   </a:moveTo>
                   <a:lnTo>
-                    <a:pt x="1374628" y="837303"/>
-                  </a:lnTo>
-                  <a:lnTo>
-                    <a:pt x="2749257" y="169444"/>
-                  </a:lnTo>
-                  <a:lnTo>
-                    <a:pt x="4123886" y="0"/>
+                    <a:pt x="1363964" y="766715"/>
+                  </a:lnTo>
+                  <a:lnTo>
+                    <a:pt x="2727929" y="155159"/>
+                  </a:lnTo>
+                  <a:lnTo>
+                    <a:pt x="4091894" y="0"/>
                   </a:lnTo>
                 </a:path>
               </a:pathLst>
@@ -2666,24 +2666,24 @@
           </p:nvSpPr>
           <p:spPr>
             <a:xfrm>
-              <a:off x="872218" y="2038080"/>
-              <a:ext cx="4123886" cy="748122"/>
+              <a:off x="905810" y="2084107"/>
+              <a:ext cx="4091894" cy="685053"/>
             </a:xfrm>
             <a:custGeom>
               <a:avLst/>
               <a:pathLst>
-                <a:path w="4123886" h="748122">
+                <a:path w="4091894" h="685053">
                   <a:moveTo>
-                    <a:pt x="4123886" y="0"/>
+                    <a:pt x="4091894" y="0"/>
                   </a:moveTo>
                   <a:lnTo>
-                    <a:pt x="2749257" y="108886"/>
-                  </a:lnTo>
-                  <a:lnTo>
-                    <a:pt x="1374628" y="620387"/>
-                  </a:lnTo>
-                  <a:lnTo>
-                    <a:pt x="0" y="748122"/>
+                    <a:pt x="2727929" y="99707"/>
+                  </a:lnTo>
+                  <a:lnTo>
+                    <a:pt x="1363964" y="568086"/>
+                  </a:lnTo>
+                  <a:lnTo>
+                    <a:pt x="0" y="685053"/>
                   </a:lnTo>
                 </a:path>
               </a:pathLst>
@@ -2703,36 +2703,36 @@
           </p:nvSpPr>
           <p:spPr>
             <a:xfrm>
-              <a:off x="872218" y="947850"/>
-              <a:ext cx="4123886" cy="1886699"/>
+              <a:off x="905810" y="1085787"/>
+              <a:ext cx="4091894" cy="1727642"/>
             </a:xfrm>
             <a:custGeom>
               <a:avLst/>
               <a:pathLst>
-                <a:path w="4123886" h="1886699">
+                <a:path w="4091894" h="1727642">
                   <a:moveTo>
-                    <a:pt x="0" y="945522"/>
+                    <a:pt x="0" y="865811"/>
                   </a:moveTo>
                   <a:lnTo>
-                    <a:pt x="1374628" y="750701"/>
-                  </a:lnTo>
-                  <a:lnTo>
-                    <a:pt x="2749257" y="248039"/>
-                  </a:lnTo>
-                  <a:lnTo>
-                    <a:pt x="4123886" y="0"/>
-                  </a:lnTo>
-                  <a:lnTo>
-                    <a:pt x="4123886" y="1203637"/>
-                  </a:lnTo>
-                  <a:lnTo>
-                    <a:pt x="2749257" y="1378807"/>
-                  </a:lnTo>
-                  <a:lnTo>
-                    <a:pt x="1374628" y="1776156"/>
-                  </a:lnTo>
-                  <a:lnTo>
-                    <a:pt x="0" y="1886699"/>
+                    <a:pt x="1363964" y="687414"/>
+                  </a:lnTo>
+                  <a:lnTo>
+                    <a:pt x="2727929" y="227129"/>
+                  </a:lnTo>
+                  <a:lnTo>
+                    <a:pt x="4091894" y="0"/>
+                  </a:lnTo>
+                  <a:lnTo>
+                    <a:pt x="4091894" y="1102166"/>
+                  </a:lnTo>
+                  <a:lnTo>
+                    <a:pt x="2727929" y="1262568"/>
+                  </a:lnTo>
+                  <a:lnTo>
+                    <a:pt x="1363964" y="1626419"/>
+                  </a:lnTo>
+                  <a:lnTo>
+                    <a:pt x="0" y="1727642"/>
                   </a:lnTo>
                   <a:close/>
                 </a:path>
@@ -2758,24 +2758,24 @@
           </p:nvSpPr>
           <p:spPr>
             <a:xfrm>
-              <a:off x="872218" y="947850"/>
-              <a:ext cx="4123886" cy="945522"/>
+              <a:off x="905810" y="1085787"/>
+              <a:ext cx="4091894" cy="865811"/>
             </a:xfrm>
             <a:custGeom>
               <a:avLst/>
               <a:pathLst>
-                <a:path w="4123886" h="945522">
+                <a:path w="4091894" h="865811">
                   <a:moveTo>
-                    <a:pt x="0" y="945522"/>
+                    <a:pt x="0" y="865811"/>
                   </a:moveTo>
                   <a:lnTo>
-                    <a:pt x="1374628" y="750701"/>
-                  </a:lnTo>
-                  <a:lnTo>
-                    <a:pt x="2749257" y="248039"/>
-                  </a:lnTo>
-                  <a:lnTo>
-                    <a:pt x="4123886" y="0"/>
+                    <a:pt x="1363964" y="687414"/>
+                  </a:lnTo>
+                  <a:lnTo>
+                    <a:pt x="2727929" y="227129"/>
+                  </a:lnTo>
+                  <a:lnTo>
+                    <a:pt x="4091894" y="0"/>
                   </a:lnTo>
                 </a:path>
               </a:pathLst>
@@ -2795,24 +2795,24 @@
           </p:nvSpPr>
           <p:spPr>
             <a:xfrm>
-              <a:off x="872218" y="2151487"/>
-              <a:ext cx="4123886" cy="683061"/>
+              <a:off x="905810" y="2187953"/>
+              <a:ext cx="4091894" cy="625476"/>
             </a:xfrm>
             <a:custGeom>
               <a:avLst/>
               <a:pathLst>
-                <a:path w="4123886" h="683061">
+                <a:path w="4091894" h="625476">
                   <a:moveTo>
-                    <a:pt x="4123886" y="0"/>
+                    <a:pt x="4091894" y="0"/>
                   </a:moveTo>
                   <a:lnTo>
-                    <a:pt x="2749257" y="175170"/>
-                  </a:lnTo>
-                  <a:lnTo>
-                    <a:pt x="1374628" y="572519"/>
-                  </a:lnTo>
-                  <a:lnTo>
-                    <a:pt x="0" y="683061"/>
+                    <a:pt x="2727929" y="160402"/>
+                  </a:lnTo>
+                  <a:lnTo>
+                    <a:pt x="1363964" y="524253"/>
+                  </a:lnTo>
+                  <a:lnTo>
+                    <a:pt x="0" y="625476"/>
                   </a:lnTo>
                 </a:path>
               </a:pathLst>
@@ -2832,36 +2832,36 @@
           </p:nvSpPr>
           <p:spPr>
             <a:xfrm>
-              <a:off x="872218" y="791841"/>
-              <a:ext cx="4123886" cy="1843201"/>
+              <a:off x="905810" y="942931"/>
+              <a:ext cx="4091894" cy="1687811"/>
             </a:xfrm>
             <a:custGeom>
               <a:avLst/>
               <a:pathLst>
-                <a:path w="4123886" h="1843201">
+                <a:path w="4091894" h="1687811">
                   <a:moveTo>
-                    <a:pt x="0" y="853324"/>
+                    <a:pt x="0" y="781385"/>
                   </a:moveTo>
                   <a:lnTo>
-                    <a:pt x="1374628" y="620910"/>
-                  </a:lnTo>
-                  <a:lnTo>
-                    <a:pt x="2749257" y="153713"/>
-                  </a:lnTo>
-                  <a:lnTo>
-                    <a:pt x="4123886" y="0"/>
-                  </a:lnTo>
-                  <a:lnTo>
-                    <a:pt x="4123886" y="1230260"/>
-                  </a:lnTo>
-                  <a:lnTo>
-                    <a:pt x="2749257" y="1355778"/>
-                  </a:lnTo>
-                  <a:lnTo>
-                    <a:pt x="1374628" y="1711786"/>
-                  </a:lnTo>
-                  <a:lnTo>
-                    <a:pt x="0" y="1843201"/>
+                    <a:pt x="1363964" y="568564"/>
+                  </a:lnTo>
+                  <a:lnTo>
+                    <a:pt x="2727929" y="140755"/>
+                  </a:lnTo>
+                  <a:lnTo>
+                    <a:pt x="4091894" y="0"/>
+                  </a:lnTo>
+                  <a:lnTo>
+                    <a:pt x="4091894" y="1126544"/>
+                  </a:lnTo>
+                  <a:lnTo>
+                    <a:pt x="2727929" y="1241480"/>
+                  </a:lnTo>
+                  <a:lnTo>
+                    <a:pt x="1363964" y="1567476"/>
+                  </a:lnTo>
+                  <a:lnTo>
+                    <a:pt x="0" y="1687811"/>
                   </a:lnTo>
                   <a:close/>
                 </a:path>
@@ -2887,24 +2887,24 @@
           </p:nvSpPr>
           <p:spPr>
             <a:xfrm>
-              <a:off x="872218" y="791841"/>
-              <a:ext cx="4123886" cy="853324"/>
+              <a:off x="905810" y="942931"/>
+              <a:ext cx="4091894" cy="781385"/>
             </a:xfrm>
             <a:custGeom>
               <a:avLst/>
               <a:pathLst>
-                <a:path w="4123886" h="853324">
+                <a:path w="4091894" h="781385">
                   <a:moveTo>
-                    <a:pt x="0" y="853324"/>
+                    <a:pt x="0" y="781385"/>
                   </a:moveTo>
                   <a:lnTo>
-                    <a:pt x="1374628" y="620910"/>
-                  </a:lnTo>
-                  <a:lnTo>
-                    <a:pt x="2749257" y="153713"/>
-                  </a:lnTo>
-                  <a:lnTo>
-                    <a:pt x="4123886" y="0"/>
+                    <a:pt x="1363964" y="568564"/>
+                  </a:lnTo>
+                  <a:lnTo>
+                    <a:pt x="2727929" y="140755"/>
+                  </a:lnTo>
+                  <a:lnTo>
+                    <a:pt x="4091894" y="0"/>
                   </a:lnTo>
                 </a:path>
               </a:pathLst>
@@ -2924,24 +2924,24 @@
           </p:nvSpPr>
           <p:spPr>
             <a:xfrm>
-              <a:off x="872218" y="2022101"/>
-              <a:ext cx="4123886" cy="612940"/>
+              <a:off x="905810" y="2069475"/>
+              <a:ext cx="4091894" cy="561267"/>
             </a:xfrm>
             <a:custGeom>
               <a:avLst/>
               <a:pathLst>
-                <a:path w="4123886" h="612940">
+                <a:path w="4091894" h="561267">
                   <a:moveTo>
-                    <a:pt x="4123886" y="0"/>
+                    <a:pt x="4091894" y="0"/>
                   </a:moveTo>
                   <a:lnTo>
-                    <a:pt x="2749257" y="125517"/>
-                  </a:lnTo>
-                  <a:lnTo>
-                    <a:pt x="1374628" y="481526"/>
-                  </a:lnTo>
-                  <a:lnTo>
-                    <a:pt x="0" y="612940"/>
+                    <a:pt x="2727929" y="114935"/>
+                  </a:lnTo>
+                  <a:lnTo>
+                    <a:pt x="1363964" y="440931"/>
+                  </a:lnTo>
+                  <a:lnTo>
+                    <a:pt x="0" y="561267"/>
                   </a:lnTo>
                 </a:path>
               </a:pathLst>
@@ -2961,24 +2961,24 @@
           </p:nvSpPr>
           <p:spPr>
             <a:xfrm>
-              <a:off x="872218" y="1439536"/>
-              <a:ext cx="4123886" cy="901442"/>
+              <a:off x="905810" y="1536023"/>
+              <a:ext cx="4091894" cy="825447"/>
             </a:xfrm>
             <a:custGeom>
               <a:avLst/>
               <a:pathLst>
-                <a:path w="4123886" h="901442">
+                <a:path w="4091894" h="825447">
                   <a:moveTo>
-                    <a:pt x="0" y="901442"/>
+                    <a:pt x="0" y="825447"/>
                   </a:moveTo>
                   <a:lnTo>
-                    <a:pt x="1374628" y="721219"/>
-                  </a:lnTo>
-                  <a:lnTo>
-                    <a:pt x="2749257" y="136607"/>
-                  </a:lnTo>
-                  <a:lnTo>
-                    <a:pt x="4123886" y="0"/>
+                    <a:pt x="1363964" y="660418"/>
+                  </a:lnTo>
+                  <a:lnTo>
+                    <a:pt x="2727929" y="125091"/>
+                  </a:lnTo>
+                  <a:lnTo>
+                    <a:pt x="4091894" y="0"/>
                   </a:lnTo>
                 </a:path>
               </a:pathLst>
@@ -3007,24 +3007,24 @@
           </p:nvSpPr>
           <p:spPr>
             <a:xfrm>
-              <a:off x="872218" y="1583474"/>
-              <a:ext cx="4123886" cy="804836"/>
+              <a:off x="905810" y="1667826"/>
+              <a:ext cx="4091894" cy="736985"/>
             </a:xfrm>
             <a:custGeom>
               <a:avLst/>
               <a:pathLst>
-                <a:path w="4123886" h="804836">
+                <a:path w="4091894" h="736985">
                   <a:moveTo>
-                    <a:pt x="0" y="804836"/>
+                    <a:pt x="0" y="736985"/>
                   </a:moveTo>
                   <a:lnTo>
-                    <a:pt x="1374628" y="655782"/>
-                  </a:lnTo>
-                  <a:lnTo>
-                    <a:pt x="2749257" y="208854"/>
-                  </a:lnTo>
-                  <a:lnTo>
-                    <a:pt x="4123886" y="0"/>
+                    <a:pt x="1363964" y="600497"/>
+                  </a:lnTo>
+                  <a:lnTo>
+                    <a:pt x="2727929" y="191247"/>
+                  </a:lnTo>
+                  <a:lnTo>
+                    <a:pt x="4091894" y="0"/>
                   </a:lnTo>
                 </a:path>
               </a:pathLst>
@@ -3053,24 +3053,24 @@
           </p:nvSpPr>
           <p:spPr>
             <a:xfrm>
-              <a:off x="872218" y="1441374"/>
-              <a:ext cx="4123886" cy="724404"/>
+              <a:off x="905810" y="1537706"/>
+              <a:ext cx="4091894" cy="663333"/>
             </a:xfrm>
             <a:custGeom>
               <a:avLst/>
               <a:pathLst>
-                <a:path w="4123886" h="724404">
+                <a:path w="4091894" h="663333">
                   <a:moveTo>
-                    <a:pt x="0" y="724404"/>
+                    <a:pt x="0" y="663333"/>
                   </a:moveTo>
                   <a:lnTo>
-                    <a:pt x="1374628" y="546864"/>
-                  </a:lnTo>
-                  <a:lnTo>
-                    <a:pt x="2749257" y="138910"/>
-                  </a:lnTo>
-                  <a:lnTo>
-                    <a:pt x="4123886" y="0"/>
+                    <a:pt x="1363964" y="500761"/>
+                  </a:lnTo>
+                  <a:lnTo>
+                    <a:pt x="2727929" y="127199"/>
+                  </a:lnTo>
+                  <a:lnTo>
+                    <a:pt x="4091894" y="0"/>
                   </a:lnTo>
                 </a:path>
               </a:pathLst>
@@ -3099,8 +3099,8 @@
           </p:nvSpPr>
           <p:spPr>
             <a:xfrm>
-              <a:off x="849565" y="2143126"/>
-              <a:ext cx="45305" cy="45305"/>
+              <a:off x="882748" y="2177978"/>
+              <a:ext cx="46123" cy="46123"/>
             </a:xfrm>
             <a:prstGeom prst="ellipse">
               <a:avLst/>
@@ -3110,7 +3110,7 @@
                 <a:alpha val="100000"/>
               </a:srgbClr>
             </a:solidFill>
-            <a:ln w="7363" cap="rnd">
+            <a:ln w="8181" cap="rnd">
               <a:solidFill>
                 <a:srgbClr val="009E73">
                   <a:alpha val="100000"/>
@@ -3134,8 +3134,8 @@
           </p:nvSpPr>
           <p:spPr>
             <a:xfrm>
-              <a:off x="2224194" y="1965586"/>
-              <a:ext cx="45305" cy="45305"/>
+              <a:off x="2246713" y="2015406"/>
+              <a:ext cx="46123" cy="46123"/>
             </a:xfrm>
             <a:prstGeom prst="ellipse">
               <a:avLst/>
@@ -3145,7 +3145,7 @@
                 <a:alpha val="100000"/>
               </a:srgbClr>
             </a:solidFill>
-            <a:ln w="7363" cap="rnd">
+            <a:ln w="8181" cap="rnd">
               <a:solidFill>
                 <a:srgbClr val="009E73">
                   <a:alpha val="100000"/>
@@ -3169,8 +3169,8 @@
           </p:nvSpPr>
           <p:spPr>
             <a:xfrm>
-              <a:off x="3598823" y="1557632"/>
-              <a:ext cx="45305" cy="45305"/>
+              <a:off x="3610678" y="1641844"/>
+              <a:ext cx="46123" cy="46123"/>
             </a:xfrm>
             <a:prstGeom prst="ellipse">
               <a:avLst/>
@@ -3180,7 +3180,7 @@
                 <a:alpha val="100000"/>
               </a:srgbClr>
             </a:solidFill>
-            <a:ln w="7363" cap="rnd">
+            <a:ln w="8181" cap="rnd">
               <a:solidFill>
                 <a:srgbClr val="009E73">
                   <a:alpha val="100000"/>
@@ -3204,8 +3204,8 @@
           </p:nvSpPr>
           <p:spPr>
             <a:xfrm>
-              <a:off x="4973452" y="1418722"/>
-              <a:ext cx="45305" cy="45305"/>
+              <a:off x="4974643" y="1514644"/>
+              <a:ext cx="46123" cy="46123"/>
             </a:xfrm>
             <a:prstGeom prst="ellipse">
               <a:avLst/>
@@ -3215,7 +3215,7 @@
                 <a:alpha val="100000"/>
               </a:srgbClr>
             </a:solidFill>
-            <a:ln w="7363" cap="rnd">
+            <a:ln w="8181" cap="rnd">
               <a:solidFill>
                 <a:srgbClr val="009E73">
                   <a:alpha val="100000"/>
@@ -3239,8 +3239,8 @@
           </p:nvSpPr>
           <p:spPr>
             <a:xfrm>
-              <a:off x="849565" y="2365658"/>
-              <a:ext cx="45305" cy="45305"/>
+              <a:off x="882748" y="2381750"/>
+              <a:ext cx="46123" cy="46123"/>
             </a:xfrm>
             <a:prstGeom prst="ellipse">
               <a:avLst/>
@@ -3250,7 +3250,7 @@
                 <a:alpha val="100000"/>
               </a:srgbClr>
             </a:solidFill>
-            <a:ln w="7363" cap="rnd">
+            <a:ln w="8181" cap="rnd">
               <a:solidFill>
                 <a:srgbClr val="999999">
                   <a:alpha val="100000"/>
@@ -3274,8 +3274,8 @@
           </p:nvSpPr>
           <p:spPr>
             <a:xfrm>
-              <a:off x="2224194" y="2216604"/>
-              <a:ext cx="45305" cy="45305"/>
+              <a:off x="2246713" y="2245262"/>
+              <a:ext cx="46123" cy="46123"/>
             </a:xfrm>
             <a:prstGeom prst="ellipse">
               <a:avLst/>
@@ -3285,7 +3285,7 @@
                 <a:alpha val="100000"/>
               </a:srgbClr>
             </a:solidFill>
-            <a:ln w="7363" cap="rnd">
+            <a:ln w="8181" cap="rnd">
               <a:solidFill>
                 <a:srgbClr val="999999">
                   <a:alpha val="100000"/>
@@ -3309,8 +3309,8 @@
           </p:nvSpPr>
           <p:spPr>
             <a:xfrm>
-              <a:off x="3598823" y="1769676"/>
-              <a:ext cx="45305" cy="45305"/>
+              <a:off x="3610678" y="1836012"/>
+              <a:ext cx="46123" cy="46123"/>
             </a:xfrm>
             <a:prstGeom prst="ellipse">
               <a:avLst/>
@@ -3320,7 +3320,7 @@
                 <a:alpha val="100000"/>
               </a:srgbClr>
             </a:solidFill>
-            <a:ln w="7363" cap="rnd">
+            <a:ln w="8181" cap="rnd">
               <a:solidFill>
                 <a:srgbClr val="999999">
                   <a:alpha val="100000"/>
@@ -3344,8 +3344,8 @@
           </p:nvSpPr>
           <p:spPr>
             <a:xfrm>
-              <a:off x="4973452" y="1560821"/>
-              <a:ext cx="45305" cy="45305"/>
+              <a:off x="4974643" y="1644764"/>
+              <a:ext cx="46123" cy="46123"/>
             </a:xfrm>
             <a:prstGeom prst="ellipse">
               <a:avLst/>
@@ -3355,7 +3355,7 @@
                 <a:alpha val="100000"/>
               </a:srgbClr>
             </a:solidFill>
-            <a:ln w="7363" cap="rnd">
+            <a:ln w="8181" cap="rnd">
               <a:solidFill>
                 <a:srgbClr val="999999">
                   <a:alpha val="100000"/>
@@ -3379,8 +3379,8 @@
           </p:nvSpPr>
           <p:spPr>
             <a:xfrm>
-              <a:off x="849565" y="2318326"/>
-              <a:ext cx="45305" cy="45305"/>
+              <a:off x="882748" y="2338408"/>
+              <a:ext cx="46123" cy="46123"/>
             </a:xfrm>
             <a:prstGeom prst="ellipse">
               <a:avLst/>
@@ -3390,7 +3390,7 @@
                 <a:alpha val="100000"/>
               </a:srgbClr>
             </a:solidFill>
-            <a:ln w="7363" cap="rnd">
+            <a:ln w="8181" cap="rnd">
               <a:solidFill>
                 <a:srgbClr val="0072B2">
                   <a:alpha val="100000"/>
@@ -3414,8 +3414,8 @@
           </p:nvSpPr>
           <p:spPr>
             <a:xfrm>
-              <a:off x="2224194" y="2138103"/>
-              <a:ext cx="45305" cy="45305"/>
+              <a:off x="2246713" y="2173379"/>
+              <a:ext cx="46123" cy="46123"/>
             </a:xfrm>
             <a:prstGeom prst="ellipse">
               <a:avLst/>
@@ -3425,7 +3425,7 @@
                 <a:alpha val="100000"/>
               </a:srgbClr>
             </a:solidFill>
-            <a:ln w="7363" cap="rnd">
+            <a:ln w="8181" cap="rnd">
               <a:solidFill>
                 <a:srgbClr val="0072B2">
                   <a:alpha val="100000"/>
@@ -3449,8 +3449,8 @@
           </p:nvSpPr>
           <p:spPr>
             <a:xfrm>
-              <a:off x="3598823" y="1553492"/>
-              <a:ext cx="45305" cy="45305"/>
+              <a:off x="3610678" y="1638052"/>
+              <a:ext cx="46123" cy="46123"/>
             </a:xfrm>
             <a:prstGeom prst="ellipse">
               <a:avLst/>
@@ -3460,7 +3460,7 @@
                 <a:alpha val="100000"/>
               </a:srgbClr>
             </a:solidFill>
-            <a:ln w="7363" cap="rnd">
+            <a:ln w="8181" cap="rnd">
               <a:solidFill>
                 <a:srgbClr val="0072B2">
                   <a:alpha val="100000"/>
@@ -3484,8 +3484,8 @@
           </p:nvSpPr>
           <p:spPr>
             <a:xfrm>
-              <a:off x="4973452" y="1416884"/>
-              <a:ext cx="45305" cy="45305"/>
+              <a:off x="4974643" y="1512961"/>
+              <a:ext cx="46123" cy="46123"/>
             </a:xfrm>
             <a:prstGeom prst="ellipse">
               <a:avLst/>
@@ -3495,7 +3495,7 @@
                 <a:alpha val="100000"/>
               </a:srgbClr>
             </a:solidFill>
-            <a:ln w="7363" cap="rnd">
+            <a:ln w="8181" cap="rnd">
               <a:solidFill>
                 <a:srgbClr val="0072B2">
                   <a:alpha val="100000"/>
@@ -3519,15 +3519,15 @@
           </p:nvSpPr>
           <p:spPr>
             <a:xfrm>
-              <a:off x="666023" y="656226"/>
-              <a:ext cx="0" cy="2451548"/>
+              <a:off x="701215" y="818749"/>
+              <a:ext cx="0" cy="2244873"/>
             </a:xfrm>
             <a:custGeom>
               <a:avLst/>
               <a:pathLst>
-                <a:path w="0" h="2451548">
+                <a:path w="0" h="2244873">
                   <a:moveTo>
-                    <a:pt x="0" y="2451548"/>
+                    <a:pt x="0" y="2244873"/>
                   </a:moveTo>
                   <a:lnTo>
                     <a:pt x="0" y="0"/>
@@ -3559,8 +3559,8 @@
           </p:nvSpPr>
           <p:spPr>
             <a:xfrm>
-              <a:off x="487953" y="2963651"/>
-              <a:ext cx="126827" cy="65379"/>
+              <a:off x="503004" y="2925190"/>
+              <a:ext cx="141274" cy="72786"/>
             </a:xfrm>
             <a:prstGeom prst="rect">
               <a:avLst/>
@@ -3580,7 +3580,7 @@
                 </a:spcAft>
               </a:pPr>
               <a:r>
-                <a:rPr sz="720" i="0" b="0">
+                <a:rPr sz="800" i="0" b="0">
                   <a:solidFill>
                     <a:srgbClr val="262626">
                       <a:alpha val="100000"/>
@@ -3602,8 +3602,8 @@
           </p:nvSpPr>
           <p:spPr>
             <a:xfrm>
-              <a:off x="487953" y="2178234"/>
-              <a:ext cx="126827" cy="65379"/>
+              <a:off x="503004" y="2205986"/>
+              <a:ext cx="141274" cy="72786"/>
             </a:xfrm>
             <a:prstGeom prst="rect">
               <a:avLst/>
@@ -3623,7 +3623,7 @@
                 </a:spcAft>
               </a:pPr>
               <a:r>
-                <a:rPr sz="720" i="0" b="0">
+                <a:rPr sz="800" i="0" b="0">
                   <a:solidFill>
                     <a:srgbClr val="262626">
                       <a:alpha val="100000"/>
@@ -3645,8 +3645,8 @@
           </p:nvSpPr>
           <p:spPr>
             <a:xfrm>
-              <a:off x="487953" y="1392817"/>
-              <a:ext cx="126827" cy="65379"/>
+              <a:off x="503004" y="1486783"/>
+              <a:ext cx="141274" cy="72786"/>
             </a:xfrm>
             <a:prstGeom prst="rect">
               <a:avLst/>
@@ -3666,7 +3666,7 @@
                 </a:spcAft>
               </a:pPr>
               <a:r>
-                <a:rPr sz="720" i="0" b="0">
+                <a:rPr sz="800" i="0" b="0">
                   <a:solidFill>
                     <a:srgbClr val="262626">
                       <a:alpha val="100000"/>
@@ -3688,18 +3688,18 @@
           </p:nvSpPr>
           <p:spPr>
             <a:xfrm>
-              <a:off x="637555" y="2996341"/>
-              <a:ext cx="28468" cy="0"/>
+              <a:off x="669584" y="2961583"/>
+              <a:ext cx="31631" cy="0"/>
             </a:xfrm>
             <a:custGeom>
               <a:avLst/>
               <a:pathLst>
-                <a:path w="28468" h="0">
+                <a:path w="31631" h="0">
                   <a:moveTo>
                     <a:pt x="0" y="0"/>
                   </a:moveTo>
                   <a:lnTo>
-                    <a:pt x="28468" y="0"/>
+                    <a:pt x="31631" y="0"/>
                   </a:lnTo>
                 </a:path>
               </a:pathLst>
@@ -3728,18 +3728,18 @@
           </p:nvSpPr>
           <p:spPr>
             <a:xfrm>
-              <a:off x="637555" y="2210924"/>
-              <a:ext cx="28468" cy="0"/>
+              <a:off x="669584" y="2242379"/>
+              <a:ext cx="31631" cy="0"/>
             </a:xfrm>
             <a:custGeom>
               <a:avLst/>
               <a:pathLst>
-                <a:path w="28468" h="0">
+                <a:path w="31631" h="0">
                   <a:moveTo>
                     <a:pt x="0" y="0"/>
                   </a:moveTo>
                   <a:lnTo>
-                    <a:pt x="28468" y="0"/>
+                    <a:pt x="31631" y="0"/>
                   </a:lnTo>
                 </a:path>
               </a:pathLst>
@@ -3768,18 +3768,18 @@
           </p:nvSpPr>
           <p:spPr>
             <a:xfrm>
-              <a:off x="637555" y="1425506"/>
-              <a:ext cx="28468" cy="0"/>
+              <a:off x="669584" y="1523176"/>
+              <a:ext cx="31631" cy="0"/>
             </a:xfrm>
             <a:custGeom>
               <a:avLst/>
               <a:pathLst>
-                <a:path w="28468" h="0">
+                <a:path w="31631" h="0">
                   <a:moveTo>
                     <a:pt x="0" y="0"/>
                   </a:moveTo>
                   <a:lnTo>
-                    <a:pt x="28468" y="0"/>
+                    <a:pt x="31631" y="0"/>
                   </a:lnTo>
                 </a:path>
               </a:pathLst>
@@ -3808,18 +3808,18 @@
           </p:nvSpPr>
           <p:spPr>
             <a:xfrm>
-              <a:off x="666023" y="3107775"/>
-              <a:ext cx="4536275" cy="0"/>
+              <a:off x="701215" y="3063623"/>
+              <a:ext cx="4501084" cy="0"/>
             </a:xfrm>
             <a:custGeom>
               <a:avLst/>
               <a:pathLst>
-                <a:path w="4536275" h="0">
+                <a:path w="4501084" h="0">
                   <a:moveTo>
                     <a:pt x="0" y="0"/>
                   </a:moveTo>
                   <a:lnTo>
-                    <a:pt x="4536275" y="0"/>
+                    <a:pt x="4501084" y="0"/>
                   </a:lnTo>
                 </a:path>
               </a:pathLst>
@@ -3848,15 +3848,15 @@
           </p:nvSpPr>
           <p:spPr>
             <a:xfrm>
-              <a:off x="872218" y="3107775"/>
-              <a:ext cx="0" cy="28468"/>
+              <a:off x="905810" y="3063623"/>
+              <a:ext cx="0" cy="31631"/>
             </a:xfrm>
             <a:custGeom>
               <a:avLst/>
               <a:pathLst>
-                <a:path w="0" h="28468">
+                <a:path w="0" h="31631">
                   <a:moveTo>
-                    <a:pt x="0" y="28468"/>
+                    <a:pt x="0" y="31631"/>
                   </a:moveTo>
                   <a:lnTo>
                     <a:pt x="0" y="0"/>
@@ -3888,15 +3888,15 @@
           </p:nvSpPr>
           <p:spPr>
             <a:xfrm>
-              <a:off x="2246847" y="3107775"/>
-              <a:ext cx="0" cy="28468"/>
+              <a:off x="2269775" y="3063623"/>
+              <a:ext cx="0" cy="31631"/>
             </a:xfrm>
             <a:custGeom>
               <a:avLst/>
               <a:pathLst>
-                <a:path w="0" h="28468">
+                <a:path w="0" h="31631">
                   <a:moveTo>
-                    <a:pt x="0" y="28468"/>
+                    <a:pt x="0" y="31631"/>
                   </a:moveTo>
                   <a:lnTo>
                     <a:pt x="0" y="0"/>
@@ -3928,15 +3928,15 @@
           </p:nvSpPr>
           <p:spPr>
             <a:xfrm>
-              <a:off x="3621476" y="3107775"/>
-              <a:ext cx="0" cy="28468"/>
+              <a:off x="3633739" y="3063623"/>
+              <a:ext cx="0" cy="31631"/>
             </a:xfrm>
             <a:custGeom>
               <a:avLst/>
               <a:pathLst>
-                <a:path w="0" h="28468">
+                <a:path w="0" h="31631">
                   <a:moveTo>
-                    <a:pt x="0" y="28468"/>
+                    <a:pt x="0" y="31631"/>
                   </a:moveTo>
                   <a:lnTo>
                     <a:pt x="0" y="0"/>
@@ -3968,15 +3968,15 @@
           </p:nvSpPr>
           <p:spPr>
             <a:xfrm>
-              <a:off x="4996105" y="3107775"/>
-              <a:ext cx="0" cy="28468"/>
+              <a:off x="4997704" y="3063623"/>
+              <a:ext cx="0" cy="31631"/>
             </a:xfrm>
             <a:custGeom>
               <a:avLst/>
               <a:pathLst>
-                <a:path w="0" h="28468">
+                <a:path w="0" h="31631">
                   <a:moveTo>
-                    <a:pt x="0" y="28468"/>
+                    <a:pt x="0" y="31631"/>
                   </a:moveTo>
                   <a:lnTo>
                     <a:pt x="0" y="0"/>
@@ -4008,8 +4008,8 @@
           </p:nvSpPr>
           <p:spPr>
             <a:xfrm>
-              <a:off x="846843" y="3159018"/>
-              <a:ext cx="50749" cy="65379"/>
+              <a:off x="877555" y="3120559"/>
+              <a:ext cx="56509" cy="72786"/>
             </a:xfrm>
             <a:prstGeom prst="rect">
               <a:avLst/>
@@ -4029,7 +4029,7 @@
                 </a:spcAft>
               </a:pPr>
               <a:r>
-                <a:rPr sz="720" i="0" b="0">
+                <a:rPr sz="800" i="0" b="0">
                   <a:solidFill>
                     <a:srgbClr val="262626">
                       <a:alpha val="100000"/>
@@ -4051,8 +4051,8 @@
           </p:nvSpPr>
           <p:spPr>
             <a:xfrm>
-              <a:off x="2196098" y="3159018"/>
-              <a:ext cx="101498" cy="65379"/>
+              <a:off x="2213265" y="3120559"/>
+              <a:ext cx="113019" cy="72786"/>
             </a:xfrm>
             <a:prstGeom prst="rect">
               <a:avLst/>
@@ -4072,7 +4072,7 @@
                 </a:spcAft>
               </a:pPr>
               <a:r>
-                <a:rPr sz="720" i="0" b="0">
+                <a:rPr sz="800" i="0" b="0">
                   <a:solidFill>
                     <a:srgbClr val="262626">
                       <a:alpha val="100000"/>
@@ -4094,8 +4094,8 @@
           </p:nvSpPr>
           <p:spPr>
             <a:xfrm>
-              <a:off x="3570727" y="3159018"/>
-              <a:ext cx="101498" cy="65379"/>
+              <a:off x="3577230" y="3120559"/>
+              <a:ext cx="113019" cy="72786"/>
             </a:xfrm>
             <a:prstGeom prst="rect">
               <a:avLst/>
@@ -4115,7 +4115,7 @@
                 </a:spcAft>
               </a:pPr>
               <a:r>
-                <a:rPr sz="720" i="0" b="0">
+                <a:rPr sz="800" i="0" b="0">
                   <a:solidFill>
                     <a:srgbClr val="262626">
                       <a:alpha val="100000"/>
@@ -4137,8 +4137,8 @@
           </p:nvSpPr>
           <p:spPr>
             <a:xfrm>
-              <a:off x="4945356" y="3159018"/>
-              <a:ext cx="101498" cy="65379"/>
+              <a:off x="4941194" y="3120559"/>
+              <a:ext cx="113019" cy="72786"/>
             </a:xfrm>
             <a:prstGeom prst="rect">
               <a:avLst/>
@@ -4158,7 +4158,7 @@
                 </a:spcAft>
               </a:pPr>
               <a:r>
-                <a:rPr sz="720" i="0" b="0">
+                <a:rPr sz="800" i="0" b="0">
                   <a:solidFill>
                     <a:srgbClr val="262626">
                       <a:alpha val="100000"/>
@@ -4180,8 +4180,8 @@
           </p:nvSpPr>
           <p:spPr>
             <a:xfrm>
-              <a:off x="2121214" y="3271977"/>
-              <a:ext cx="1625894" cy="81838"/>
+              <a:off x="2047873" y="3246374"/>
+              <a:ext cx="1807768" cy="90982"/>
             </a:xfrm>
             <a:prstGeom prst="rect">
               <a:avLst/>
@@ -4201,7 +4201,7 @@
                 </a:spcAft>
               </a:pPr>
               <a:r>
-                <a:rPr sz="900" i="0" b="0">
+                <a:rPr sz="1000" i="0" b="0">
                   <a:solidFill>
                     <a:srgbClr val="0D0D0D">
                       <a:alpha val="100000"/>
@@ -4223,8 +4223,8 @@
           </p:nvSpPr>
           <p:spPr>
             <a:xfrm rot="-5400000">
-              <a:off x="-157963" y="1841081"/>
-              <a:ext cx="1105143" cy="81838"/>
+              <a:off x="-215250" y="1895694"/>
+              <a:ext cx="1228862" cy="90982"/>
             </a:xfrm>
             <a:prstGeom prst="rect">
               <a:avLst/>
@@ -4244,7 +4244,7 @@
                 </a:spcAft>
               </a:pPr>
               <a:r>
-                <a:rPr sz="900" i="0" b="0">
+                <a:rPr sz="1000" i="0" b="0">
                   <a:solidFill>
                     <a:srgbClr val="0D0D0D">
                       <a:alpha val="100000"/>
@@ -4266,8 +4266,8 @@
           </p:nvSpPr>
           <p:spPr>
             <a:xfrm>
-              <a:off x="2494405" y="2389256"/>
-              <a:ext cx="1786767" cy="554480"/>
+              <a:off x="2498992" y="2372816"/>
+              <a:ext cx="1805746" cy="573459"/>
             </a:xfrm>
             <a:prstGeom prst="rect">
               <a:avLst/>
@@ -4292,7 +4292,7 @@
           </p:nvSpPr>
           <p:spPr>
             <a:xfrm>
-              <a:off x="2551342" y="2455291"/>
+              <a:off x="2562255" y="2445177"/>
               <a:ext cx="681136" cy="61813"/>
             </a:xfrm>
             <a:prstGeom prst="rect">
@@ -4335,7 +4335,7 @@
           </p:nvSpPr>
           <p:spPr>
             <a:xfrm>
-              <a:off x="2551342" y="2583139"/>
+              <a:off x="2562255" y="2579351"/>
               <a:ext cx="113872" cy="101220"/>
             </a:xfrm>
             <a:prstGeom prst="rect">
@@ -4361,7 +4361,7 @@
           </p:nvSpPr>
           <p:spPr>
             <a:xfrm>
-              <a:off x="2562729" y="2633749"/>
+              <a:off x="2573642" y="2629961"/>
               <a:ext cx="91098" cy="0"/>
             </a:xfrm>
             <a:custGeom>
@@ -4401,8 +4401,8 @@
           </p:nvSpPr>
           <p:spPr>
             <a:xfrm>
-              <a:off x="2585625" y="2611097"/>
-              <a:ext cx="45305" cy="45305"/>
+              <a:off x="2596130" y="2606900"/>
+              <a:ext cx="46123" cy="46123"/>
             </a:xfrm>
             <a:prstGeom prst="ellipse">
               <a:avLst/>
@@ -4412,7 +4412,7 @@
                 <a:alpha val="100000"/>
               </a:srgbClr>
             </a:solidFill>
-            <a:ln w="7363" cap="rnd">
+            <a:ln w="8181" cap="rnd">
               <a:solidFill>
                 <a:srgbClr val="0072B2">
                   <a:alpha val="100000"/>
@@ -4436,7 +4436,7 @@
           </p:nvSpPr>
           <p:spPr>
             <a:xfrm>
-              <a:off x="2551342" y="2684360"/>
+              <a:off x="2562255" y="2680572"/>
               <a:ext cx="113872" cy="101220"/>
             </a:xfrm>
             <a:prstGeom prst="rect">
@@ -4462,7 +4462,7 @@
           </p:nvSpPr>
           <p:spPr>
             <a:xfrm>
-              <a:off x="2562729" y="2734970"/>
+              <a:off x="2573642" y="2731182"/>
               <a:ext cx="91098" cy="0"/>
             </a:xfrm>
             <a:custGeom>
@@ -4502,8 +4502,8 @@
           </p:nvSpPr>
           <p:spPr>
             <a:xfrm>
-              <a:off x="2585625" y="2712317"/>
-              <a:ext cx="45305" cy="45305"/>
+              <a:off x="2596130" y="2708120"/>
+              <a:ext cx="46123" cy="46123"/>
             </a:xfrm>
             <a:prstGeom prst="ellipse">
               <a:avLst/>
@@ -4513,7 +4513,7 @@
                 <a:alpha val="100000"/>
               </a:srgbClr>
             </a:solidFill>
-            <a:ln w="7363" cap="rnd">
+            <a:ln w="8181" cap="rnd">
               <a:solidFill>
                 <a:srgbClr val="999999">
                   <a:alpha val="100000"/>
@@ -4537,7 +4537,7 @@
           </p:nvSpPr>
           <p:spPr>
             <a:xfrm>
-              <a:off x="2551342" y="2785580"/>
+              <a:off x="2562255" y="2781792"/>
               <a:ext cx="113872" cy="101220"/>
             </a:xfrm>
             <a:prstGeom prst="rect">
@@ -4563,7 +4563,7 @@
           </p:nvSpPr>
           <p:spPr>
             <a:xfrm>
-              <a:off x="2562729" y="2836190"/>
+              <a:off x="2573642" y="2832402"/>
               <a:ext cx="91098" cy="0"/>
             </a:xfrm>
             <a:custGeom>
@@ -4603,8 +4603,8 @@
           </p:nvSpPr>
           <p:spPr>
             <a:xfrm>
-              <a:off x="2585625" y="2813537"/>
-              <a:ext cx="45305" cy="45305"/>
+              <a:off x="2596130" y="2809340"/>
+              <a:ext cx="46123" cy="46123"/>
             </a:xfrm>
             <a:prstGeom prst="ellipse">
               <a:avLst/>
@@ -4614,7 +4614,7 @@
                 <a:alpha val="100000"/>
               </a:srgbClr>
             </a:solidFill>
-            <a:ln w="7363" cap="rnd">
+            <a:ln w="8181" cap="rnd">
               <a:solidFill>
                 <a:srgbClr val="009E73">
                   <a:alpha val="100000"/>
@@ -4638,7 +4638,7 @@
           </p:nvSpPr>
           <p:spPr>
             <a:xfrm>
-              <a:off x="2722151" y="2605631"/>
+              <a:off x="2739391" y="2601844"/>
               <a:ext cx="1170980" cy="56235"/>
             </a:xfrm>
             <a:prstGeom prst="rect">
@@ -4681,7 +4681,7 @@
           </p:nvSpPr>
           <p:spPr>
             <a:xfrm>
-              <a:off x="2722151" y="2706852"/>
+              <a:off x="2739391" y="2703064"/>
               <a:ext cx="1462674" cy="56235"/>
             </a:xfrm>
             <a:prstGeom prst="rect">
@@ -4724,7 +4724,7 @@
           </p:nvSpPr>
           <p:spPr>
             <a:xfrm>
-              <a:off x="2722151" y="2808072"/>
+              <a:off x="2739391" y="2804284"/>
               <a:ext cx="1502084" cy="56235"/>
             </a:xfrm>
             <a:prstGeom prst="rect">
@@ -4767,8 +4767,8 @@
           </p:nvSpPr>
           <p:spPr>
             <a:xfrm>
-              <a:off x="666023" y="503004"/>
-              <a:ext cx="3166658" cy="74432"/>
+              <a:off x="701215" y="521126"/>
+              <a:ext cx="3555095" cy="83576"/>
             </a:xfrm>
             <a:prstGeom prst="rect">
               <a:avLst/>
@@ -4788,7 +4788,7 @@
                 </a:spcAft>
               </a:pPr>
               <a:r>
-                <a:rPr sz="819" i="0" b="0">
+                <a:rPr sz="919" i="0" b="0">
                   <a:solidFill>
                     <a:srgbClr val="4D4D4D">
                       <a:alpha val="100000"/>
@@ -4810,8 +4810,8 @@
           </p:nvSpPr>
           <p:spPr>
             <a:xfrm>
-              <a:off x="666023" y="328384"/>
-              <a:ext cx="2547884" cy="90982"/>
+              <a:off x="701215" y="328384"/>
+              <a:ext cx="2803184" cy="100035"/>
             </a:xfrm>
             <a:prstGeom prst="rect">
               <a:avLst/>
@@ -4831,7 +4831,7 @@
                 </a:spcAft>
               </a:pPr>
               <a:r>
-                <a:rPr sz="1000" i="0" b="1">
+                <a:rPr sz="1100" i="0" b="1">
                   <a:solidFill>
                     <a:srgbClr val="000000">
                       <a:alpha val="100000"/>
@@ -4853,8 +4853,8 @@
           </p:nvSpPr>
           <p:spPr>
             <a:xfrm>
-              <a:off x="335550" y="319535"/>
-              <a:ext cx="84764" cy="109179"/>
+              <a:off x="332029" y="314803"/>
+              <a:ext cx="91805" cy="118231"/>
             </a:xfrm>
             <a:prstGeom prst="rect">
               <a:avLst/>
@@ -4874,7 +4874,7 @@
                 </a:spcAft>
               </a:pPr>
               <a:r>
-                <a:rPr sz="1200" i="0" b="1">
+                <a:rPr sz="1300" i="0" b="1">
                   <a:solidFill>
                     <a:srgbClr val="000000">
                       <a:alpha val="100000"/>
@@ -4896,8 +4896,8 @@
           </p:nvSpPr>
           <p:spPr>
             <a:xfrm>
-              <a:off x="5717074" y="656226"/>
-              <a:ext cx="4536275" cy="2451548"/>
+              <a:off x="5752266" y="818749"/>
+              <a:ext cx="4501084" cy="2244873"/>
             </a:xfrm>
             <a:prstGeom prst="rect">
               <a:avLst/>
@@ -4922,21 +4922,21 @@
           </p:nvSpPr>
           <p:spPr>
             <a:xfrm>
-              <a:off x="5717074" y="2996341"/>
-              <a:ext cx="4536275" cy="0"/>
+              <a:off x="5752266" y="2961583"/>
+              <a:ext cx="4501084" cy="0"/>
             </a:xfrm>
             <a:custGeom>
               <a:avLst/>
               <a:pathLst>
-                <a:path w="4536275" h="0">
+                <a:path w="4501084" h="0">
                   <a:moveTo>
                     <a:pt x="0" y="0"/>
                   </a:moveTo>
                   <a:lnTo>
-                    <a:pt x="4536275" y="0"/>
-                  </a:lnTo>
-                  <a:lnTo>
-                    <a:pt x="4536275" y="0"/>
+                    <a:pt x="4501084" y="0"/>
+                  </a:lnTo>
+                  <a:lnTo>
+                    <a:pt x="4501084" y="0"/>
                   </a:lnTo>
                 </a:path>
               </a:pathLst>
@@ -4965,21 +4965,21 @@
           </p:nvSpPr>
           <p:spPr>
             <a:xfrm>
-              <a:off x="5717074" y="2238232"/>
-              <a:ext cx="4536275" cy="0"/>
+              <a:off x="5752266" y="2267385"/>
+              <a:ext cx="4501084" cy="0"/>
             </a:xfrm>
             <a:custGeom>
               <a:avLst/>
               <a:pathLst>
-                <a:path w="4536275" h="0">
+                <a:path w="4501084" h="0">
                   <a:moveTo>
                     <a:pt x="0" y="0"/>
                   </a:moveTo>
                   <a:lnTo>
-                    <a:pt x="4536275" y="0"/>
-                  </a:lnTo>
-                  <a:lnTo>
-                    <a:pt x="4536275" y="0"/>
+                    <a:pt x="4501084" y="0"/>
+                  </a:lnTo>
+                  <a:lnTo>
+                    <a:pt x="4501084" y="0"/>
                   </a:lnTo>
                 </a:path>
               </a:pathLst>
@@ -5008,21 +5008,21 @@
           </p:nvSpPr>
           <p:spPr>
             <a:xfrm>
-              <a:off x="5717074" y="1480122"/>
-              <a:ext cx="4536275" cy="0"/>
+              <a:off x="5752266" y="1573187"/>
+              <a:ext cx="4501084" cy="0"/>
             </a:xfrm>
             <a:custGeom>
               <a:avLst/>
               <a:pathLst>
-                <a:path w="4536275" h="0">
+                <a:path w="4501084" h="0">
                   <a:moveTo>
                     <a:pt x="0" y="0"/>
                   </a:moveTo>
                   <a:lnTo>
-                    <a:pt x="4536275" y="0"/>
-                  </a:lnTo>
-                  <a:lnTo>
-                    <a:pt x="4536275" y="0"/>
+                    <a:pt x="4501084" y="0"/>
+                  </a:lnTo>
+                  <a:lnTo>
+                    <a:pt x="4501084" y="0"/>
                   </a:lnTo>
                 </a:path>
               </a:pathLst>
@@ -5051,21 +5051,21 @@
           </p:nvSpPr>
           <p:spPr>
             <a:xfrm>
-              <a:off x="5717074" y="722013"/>
-              <a:ext cx="4536275" cy="0"/>
+              <a:off x="5752266" y="878990"/>
+              <a:ext cx="4501084" cy="0"/>
             </a:xfrm>
             <a:custGeom>
               <a:avLst/>
               <a:pathLst>
-                <a:path w="4536275" h="0">
+                <a:path w="4501084" h="0">
                   <a:moveTo>
                     <a:pt x="0" y="0"/>
                   </a:moveTo>
                   <a:lnTo>
-                    <a:pt x="4536275" y="0"/>
-                  </a:lnTo>
-                  <a:lnTo>
-                    <a:pt x="4536275" y="0"/>
+                    <a:pt x="4501084" y="0"/>
+                  </a:lnTo>
+                  <a:lnTo>
+                    <a:pt x="4501084" y="0"/>
                   </a:lnTo>
                 </a:path>
               </a:pathLst>
@@ -5094,21 +5094,21 @@
           </p:nvSpPr>
           <p:spPr>
             <a:xfrm>
-              <a:off x="5717074" y="2996341"/>
-              <a:ext cx="4536275" cy="0"/>
+              <a:off x="5752266" y="2961583"/>
+              <a:ext cx="4501084" cy="0"/>
             </a:xfrm>
             <a:custGeom>
               <a:avLst/>
               <a:pathLst>
-                <a:path w="4536275" h="0">
+                <a:path w="4501084" h="0">
                   <a:moveTo>
                     <a:pt x="0" y="0"/>
                   </a:moveTo>
                   <a:lnTo>
-                    <a:pt x="4536275" y="0"/>
-                  </a:lnTo>
-                  <a:lnTo>
-                    <a:pt x="4536275" y="0"/>
+                    <a:pt x="4501084" y="0"/>
+                  </a:lnTo>
+                  <a:lnTo>
+                    <a:pt x="4501084" y="0"/>
                   </a:lnTo>
                 </a:path>
               </a:pathLst>
@@ -5137,36 +5137,36 @@
           </p:nvSpPr>
           <p:spPr>
             <a:xfrm>
-              <a:off x="5923269" y="767660"/>
-              <a:ext cx="4123886" cy="1343543"/>
+              <a:off x="5956861" y="920789"/>
+              <a:ext cx="4091894" cy="1230277"/>
             </a:xfrm>
             <a:custGeom>
               <a:avLst/>
               <a:pathLst>
-                <a:path w="4123886" h="1343543">
+                <a:path w="4091894" h="1230277">
                   <a:moveTo>
-                    <a:pt x="0" y="64496"/>
+                    <a:pt x="0" y="59059"/>
                   </a:moveTo>
                   <a:lnTo>
-                    <a:pt x="1374628" y="0"/>
-                  </a:lnTo>
-                  <a:lnTo>
-                    <a:pt x="2749257" y="20533"/>
-                  </a:lnTo>
-                  <a:lnTo>
-                    <a:pt x="4123886" y="41952"/>
-                  </a:lnTo>
-                  <a:lnTo>
-                    <a:pt x="4123886" y="1308508"/>
-                  </a:lnTo>
-                  <a:lnTo>
-                    <a:pt x="2749257" y="1298975"/>
-                  </a:lnTo>
-                  <a:lnTo>
-                    <a:pt x="1374628" y="1295495"/>
-                  </a:lnTo>
-                  <a:lnTo>
-                    <a:pt x="0" y="1343543"/>
+                    <a:pt x="1363964" y="0"/>
+                  </a:lnTo>
+                  <a:lnTo>
+                    <a:pt x="2727929" y="18802"/>
+                  </a:lnTo>
+                  <a:lnTo>
+                    <a:pt x="4091894" y="38415"/>
+                  </a:lnTo>
+                  <a:lnTo>
+                    <a:pt x="4091894" y="1198196"/>
+                  </a:lnTo>
+                  <a:lnTo>
+                    <a:pt x="2727929" y="1189466"/>
+                  </a:lnTo>
+                  <a:lnTo>
+                    <a:pt x="1363964" y="1186280"/>
+                  </a:lnTo>
+                  <a:lnTo>
+                    <a:pt x="0" y="1230277"/>
                   </a:lnTo>
                   <a:close/>
                 </a:path>
@@ -5192,24 +5192,24 @@
           </p:nvSpPr>
           <p:spPr>
             <a:xfrm>
-              <a:off x="5923269" y="767660"/>
-              <a:ext cx="4123886" cy="64496"/>
+              <a:off x="5956861" y="920789"/>
+              <a:ext cx="4091894" cy="59059"/>
             </a:xfrm>
             <a:custGeom>
               <a:avLst/>
               <a:pathLst>
-                <a:path w="4123886" h="64496">
+                <a:path w="4091894" h="59059">
                   <a:moveTo>
-                    <a:pt x="0" y="64496"/>
+                    <a:pt x="0" y="59059"/>
                   </a:moveTo>
                   <a:lnTo>
-                    <a:pt x="1374628" y="0"/>
-                  </a:lnTo>
-                  <a:lnTo>
-                    <a:pt x="2749257" y="20533"/>
-                  </a:lnTo>
-                  <a:lnTo>
-                    <a:pt x="4123886" y="41952"/>
+                    <a:pt x="1363964" y="0"/>
+                  </a:lnTo>
+                  <a:lnTo>
+                    <a:pt x="2727929" y="18802"/>
+                  </a:lnTo>
+                  <a:lnTo>
+                    <a:pt x="4091894" y="38415"/>
                   </a:lnTo>
                 </a:path>
               </a:pathLst>
@@ -5229,24 +5229,24 @@
           </p:nvSpPr>
           <p:spPr>
             <a:xfrm>
-              <a:off x="5923269" y="2063156"/>
-              <a:ext cx="4123886" cy="48047"/>
+              <a:off x="5956861" y="2107069"/>
+              <a:ext cx="4091894" cy="43997"/>
             </a:xfrm>
             <a:custGeom>
               <a:avLst/>
               <a:pathLst>
-                <a:path w="4123886" h="48047">
+                <a:path w="4091894" h="43997">
                   <a:moveTo>
-                    <a:pt x="4123886" y="13013"/>
+                    <a:pt x="4091894" y="11916"/>
                   </a:moveTo>
                   <a:lnTo>
-                    <a:pt x="2749257" y="3479"/>
-                  </a:lnTo>
-                  <a:lnTo>
-                    <a:pt x="1374628" y="0"/>
-                  </a:lnTo>
-                  <a:lnTo>
-                    <a:pt x="0" y="48047"/>
+                    <a:pt x="2727929" y="3186"/>
+                  </a:lnTo>
+                  <a:lnTo>
+                    <a:pt x="1363964" y="0"/>
+                  </a:lnTo>
+                  <a:lnTo>
+                    <a:pt x="0" y="43997"/>
                   </a:lnTo>
                 </a:path>
               </a:pathLst>
@@ -5266,36 +5266,36 @@
           </p:nvSpPr>
           <p:spPr>
             <a:xfrm>
-              <a:off x="5923269" y="973099"/>
-              <a:ext cx="4123886" cy="1299716"/>
+              <a:off x="5956861" y="1108908"/>
+              <a:ext cx="4091894" cy="1190145"/>
             </a:xfrm>
             <a:custGeom>
               <a:avLst/>
               <a:pathLst>
-                <a:path w="4123886" h="1299716">
+                <a:path w="4091894" h="1190145">
                   <a:moveTo>
-                    <a:pt x="0" y="53161"/>
+                    <a:pt x="0" y="48679"/>
                   </a:moveTo>
                   <a:lnTo>
-                    <a:pt x="1374628" y="0"/>
-                  </a:lnTo>
-                  <a:lnTo>
-                    <a:pt x="2749257" y="58940"/>
-                  </a:lnTo>
-                  <a:lnTo>
-                    <a:pt x="4123886" y="79385"/>
-                  </a:lnTo>
-                  <a:lnTo>
-                    <a:pt x="4123886" y="1299716"/>
-                  </a:lnTo>
-                  <a:lnTo>
-                    <a:pt x="2749257" y="1290682"/>
-                  </a:lnTo>
-                  <a:lnTo>
-                    <a:pt x="1374628" y="1264203"/>
-                  </a:lnTo>
-                  <a:lnTo>
-                    <a:pt x="0" y="1296607"/>
+                    <a:pt x="1363964" y="0"/>
+                  </a:lnTo>
+                  <a:lnTo>
+                    <a:pt x="2727929" y="53971"/>
+                  </a:lnTo>
+                  <a:lnTo>
+                    <a:pt x="4091894" y="72693"/>
+                  </a:lnTo>
+                  <a:lnTo>
+                    <a:pt x="4091894" y="1190145"/>
+                  </a:lnTo>
+                  <a:lnTo>
+                    <a:pt x="2727929" y="1181872"/>
+                  </a:lnTo>
+                  <a:lnTo>
+                    <a:pt x="1363964" y="1157626"/>
+                  </a:lnTo>
+                  <a:lnTo>
+                    <a:pt x="0" y="1187298"/>
                   </a:lnTo>
                   <a:close/>
                 </a:path>
@@ -5321,24 +5321,24 @@
           </p:nvSpPr>
           <p:spPr>
             <a:xfrm>
-              <a:off x="5923269" y="973099"/>
-              <a:ext cx="4123886" cy="79385"/>
+              <a:off x="5956861" y="1108908"/>
+              <a:ext cx="4091894" cy="72693"/>
             </a:xfrm>
             <a:custGeom>
               <a:avLst/>
               <a:pathLst>
-                <a:path w="4123886" h="79385">
+                <a:path w="4091894" h="72693">
                   <a:moveTo>
-                    <a:pt x="0" y="53161"/>
+                    <a:pt x="0" y="48679"/>
                   </a:moveTo>
                   <a:lnTo>
-                    <a:pt x="1374628" y="0"/>
-                  </a:lnTo>
-                  <a:lnTo>
-                    <a:pt x="2749257" y="58940"/>
-                  </a:lnTo>
-                  <a:lnTo>
-                    <a:pt x="4123886" y="79385"/>
+                    <a:pt x="1363964" y="0"/>
+                  </a:lnTo>
+                  <a:lnTo>
+                    <a:pt x="2727929" y="53971"/>
+                  </a:lnTo>
+                  <a:lnTo>
+                    <a:pt x="4091894" y="72693"/>
                   </a:lnTo>
                 </a:path>
               </a:pathLst>
@@ -5358,24 +5358,24 @@
           </p:nvSpPr>
           <p:spPr>
             <a:xfrm>
-              <a:off x="5923269" y="2237302"/>
-              <a:ext cx="4123886" cy="35513"/>
+              <a:off x="5956861" y="2266534"/>
+              <a:ext cx="4091894" cy="32519"/>
             </a:xfrm>
             <a:custGeom>
               <a:avLst/>
               <a:pathLst>
-                <a:path w="4123886" h="35513">
+                <a:path w="4091894" h="32519">
                   <a:moveTo>
-                    <a:pt x="4123886" y="35513"/>
+                    <a:pt x="4091894" y="32519"/>
                   </a:moveTo>
                   <a:lnTo>
-                    <a:pt x="2749257" y="26478"/>
-                  </a:lnTo>
-                  <a:lnTo>
-                    <a:pt x="1374628" y="0"/>
-                  </a:lnTo>
-                  <a:lnTo>
-                    <a:pt x="0" y="32404"/>
+                    <a:pt x="2727929" y="24246"/>
+                  </a:lnTo>
+                  <a:lnTo>
+                    <a:pt x="1363964" y="0"/>
+                  </a:lnTo>
+                  <a:lnTo>
+                    <a:pt x="0" y="29672"/>
                   </a:lnTo>
                 </a:path>
               </a:pathLst>
@@ -5395,36 +5395,36 @@
           </p:nvSpPr>
           <p:spPr>
             <a:xfrm>
-              <a:off x="5923269" y="907773"/>
-              <a:ext cx="4123886" cy="1334450"/>
+              <a:off x="5956861" y="1049089"/>
+              <a:ext cx="4091894" cy="1221950"/>
             </a:xfrm>
             <a:custGeom>
               <a:avLst/>
               <a:pathLst>
-                <a:path w="4123886" h="1334450">
+                <a:path w="4091894" h="1221950">
                   <a:moveTo>
-                    <a:pt x="0" y="82879"/>
+                    <a:pt x="0" y="75892"/>
                   </a:moveTo>
                   <a:lnTo>
-                    <a:pt x="1374628" y="0"/>
-                  </a:lnTo>
-                  <a:lnTo>
-                    <a:pt x="2749257" y="34662"/>
-                  </a:lnTo>
-                  <a:lnTo>
-                    <a:pt x="4123886" y="21955"/>
-                  </a:lnTo>
-                  <a:lnTo>
-                    <a:pt x="4123886" y="1271789"/>
-                  </a:lnTo>
-                  <a:lnTo>
-                    <a:pt x="2749257" y="1290232"/>
-                  </a:lnTo>
-                  <a:lnTo>
-                    <a:pt x="1374628" y="1279096"/>
-                  </a:lnTo>
-                  <a:lnTo>
-                    <a:pt x="0" y="1334450"/>
+                    <a:pt x="1363964" y="0"/>
+                  </a:lnTo>
+                  <a:lnTo>
+                    <a:pt x="2727929" y="31740"/>
+                  </a:lnTo>
+                  <a:lnTo>
+                    <a:pt x="4091894" y="20104"/>
+                  </a:lnTo>
+                  <a:lnTo>
+                    <a:pt x="4091894" y="1164572"/>
+                  </a:lnTo>
+                  <a:lnTo>
+                    <a:pt x="2727929" y="1181460"/>
+                  </a:lnTo>
+                  <a:lnTo>
+                    <a:pt x="1363964" y="1171263"/>
+                  </a:lnTo>
+                  <a:lnTo>
+                    <a:pt x="0" y="1221950"/>
                   </a:lnTo>
                   <a:close/>
                 </a:path>
@@ -5450,24 +5450,24 @@
           </p:nvSpPr>
           <p:spPr>
             <a:xfrm>
-              <a:off x="5923269" y="907773"/>
-              <a:ext cx="4123886" cy="82879"/>
+              <a:off x="5956861" y="1049089"/>
+              <a:ext cx="4091894" cy="75892"/>
             </a:xfrm>
             <a:custGeom>
               <a:avLst/>
               <a:pathLst>
-                <a:path w="4123886" h="82879">
+                <a:path w="4091894" h="75892">
                   <a:moveTo>
-                    <a:pt x="0" y="82879"/>
+                    <a:pt x="0" y="75892"/>
                   </a:moveTo>
                   <a:lnTo>
-                    <a:pt x="1374628" y="0"/>
-                  </a:lnTo>
-                  <a:lnTo>
-                    <a:pt x="2749257" y="34662"/>
-                  </a:lnTo>
-                  <a:lnTo>
-                    <a:pt x="4123886" y="21955"/>
+                    <a:pt x="1363964" y="0"/>
+                  </a:lnTo>
+                  <a:lnTo>
+                    <a:pt x="2727929" y="31740"/>
+                  </a:lnTo>
+                  <a:lnTo>
+                    <a:pt x="4091894" y="20104"/>
                   </a:lnTo>
                 </a:path>
               </a:pathLst>
@@ -5487,24 +5487,24 @@
           </p:nvSpPr>
           <p:spPr>
             <a:xfrm>
-              <a:off x="5923269" y="2179563"/>
-              <a:ext cx="4123886" cy="62660"/>
+              <a:off x="5956861" y="2213662"/>
+              <a:ext cx="4091894" cy="57377"/>
             </a:xfrm>
             <a:custGeom>
               <a:avLst/>
               <a:pathLst>
-                <a:path w="4123886" h="62660">
+                <a:path w="4091894" h="57377">
                   <a:moveTo>
-                    <a:pt x="4123886" y="0"/>
+                    <a:pt x="4091894" y="0"/>
                   </a:moveTo>
                   <a:lnTo>
-                    <a:pt x="2749257" y="18442"/>
-                  </a:lnTo>
-                  <a:lnTo>
-                    <a:pt x="1374628" y="7306"/>
-                  </a:lnTo>
-                  <a:lnTo>
-                    <a:pt x="0" y="62660"/>
+                    <a:pt x="2727929" y="16887"/>
+                  </a:lnTo>
+                  <a:lnTo>
+                    <a:pt x="1363964" y="6690"/>
+                  </a:lnTo>
+                  <a:lnTo>
+                    <a:pt x="0" y="57377"/>
                   </a:lnTo>
                 </a:path>
               </a:pathLst>
@@ -5524,24 +5524,24 @@
           </p:nvSpPr>
           <p:spPr>
             <a:xfrm>
-              <a:off x="5923269" y="1454607"/>
-              <a:ext cx="4123886" cy="55687"/>
+              <a:off x="5956861" y="1549823"/>
+              <a:ext cx="4091894" cy="50992"/>
             </a:xfrm>
             <a:custGeom>
               <a:avLst/>
               <a:pathLst>
-                <a:path w="4123886" h="55687">
+                <a:path w="4091894" h="50992">
                   <a:moveTo>
-                    <a:pt x="0" y="55687"/>
+                    <a:pt x="0" y="50992"/>
                   </a:moveTo>
                   <a:lnTo>
-                    <a:pt x="1374628" y="0"/>
-                  </a:lnTo>
-                  <a:lnTo>
-                    <a:pt x="2749257" y="11063"/>
-                  </a:lnTo>
-                  <a:lnTo>
-                    <a:pt x="4123886" y="25938"/>
+                    <a:pt x="1363964" y="0"/>
+                  </a:lnTo>
+                  <a:lnTo>
+                    <a:pt x="2727929" y="10130"/>
+                  </a:lnTo>
+                  <a:lnTo>
+                    <a:pt x="4091894" y="23752"/>
                   </a:lnTo>
                 </a:path>
               </a:pathLst>
@@ -5570,24 +5570,24 @@
           </p:nvSpPr>
           <p:spPr>
             <a:xfrm>
-              <a:off x="5923269" y="1643899"/>
-              <a:ext cx="4123886" cy="55208"/>
+              <a:off x="5956861" y="1723157"/>
+              <a:ext cx="4091894" cy="50553"/>
             </a:xfrm>
             <a:custGeom>
               <a:avLst/>
               <a:pathLst>
-                <a:path w="4123886" h="55208">
+                <a:path w="4091894" h="50553">
                   <a:moveTo>
-                    <a:pt x="0" y="41831"/>
+                    <a:pt x="0" y="38305"/>
                   </a:moveTo>
                   <a:lnTo>
-                    <a:pt x="1374628" y="0"/>
-                  </a:lnTo>
-                  <a:lnTo>
-                    <a:pt x="2749257" y="41047"/>
-                  </a:lnTo>
-                  <a:lnTo>
-                    <a:pt x="4123886" y="55208"/>
+                    <a:pt x="1363964" y="0"/>
+                  </a:lnTo>
+                  <a:lnTo>
+                    <a:pt x="2727929" y="37587"/>
+                  </a:lnTo>
+                  <a:lnTo>
+                    <a:pt x="4091894" y="50553"/>
                   </a:lnTo>
                 </a:path>
               </a:pathLst>
@@ -5616,24 +5616,24 @@
           </p:nvSpPr>
           <p:spPr>
             <a:xfrm>
-              <a:off x="5923269" y="1586500"/>
-              <a:ext cx="4123886" cy="67947"/>
+              <a:off x="5956861" y="1670597"/>
+              <a:ext cx="4091894" cy="62219"/>
             </a:xfrm>
             <a:custGeom>
               <a:avLst/>
               <a:pathLst>
-                <a:path w="4123886" h="67947">
+                <a:path w="4091894" h="62219">
                   <a:moveTo>
-                    <a:pt x="0" y="67947"/>
+                    <a:pt x="0" y="62219"/>
                   </a:moveTo>
                   <a:lnTo>
-                    <a:pt x="1374628" y="0"/>
-                  </a:lnTo>
-                  <a:lnTo>
-                    <a:pt x="2749257" y="21632"/>
-                  </a:lnTo>
-                  <a:lnTo>
-                    <a:pt x="4123886" y="5598"/>
+                    <a:pt x="1363964" y="0"/>
+                  </a:lnTo>
+                  <a:lnTo>
+                    <a:pt x="2727929" y="19809"/>
+                  </a:lnTo>
+                  <a:lnTo>
+                    <a:pt x="4091894" y="5126"/>
                   </a:lnTo>
                 </a:path>
               </a:pathLst>
@@ -5662,8 +5662,8 @@
           </p:nvSpPr>
           <p:spPr>
             <a:xfrm>
-              <a:off x="5900616" y="1631794"/>
-              <a:ext cx="45305" cy="45305"/>
+              <a:off x="5933799" y="1709754"/>
+              <a:ext cx="46123" cy="46123"/>
             </a:xfrm>
             <a:prstGeom prst="ellipse">
               <a:avLst/>
@@ -5673,7 +5673,7 @@
                 <a:alpha val="100000"/>
               </a:srgbClr>
             </a:solidFill>
-            <a:ln w="7363" cap="rnd">
+            <a:ln w="8181" cap="rnd">
               <a:solidFill>
                 <a:srgbClr val="009E73">
                   <a:alpha val="100000"/>
@@ -5697,8 +5697,8 @@
           </p:nvSpPr>
           <p:spPr>
             <a:xfrm>
-              <a:off x="7275245" y="1563847"/>
-              <a:ext cx="45305" cy="45305"/>
+              <a:off x="7297764" y="1647535"/>
+              <a:ext cx="46123" cy="46123"/>
             </a:xfrm>
             <a:prstGeom prst="ellipse">
               <a:avLst/>
@@ -5708,7 +5708,7 @@
                 <a:alpha val="100000"/>
               </a:srgbClr>
             </a:solidFill>
-            <a:ln w="7363" cap="rnd">
+            <a:ln w="8181" cap="rnd">
               <a:solidFill>
                 <a:srgbClr val="009E73">
                   <a:alpha val="100000"/>
@@ -5732,8 +5732,8 @@
           </p:nvSpPr>
           <p:spPr>
             <a:xfrm>
-              <a:off x="8649874" y="1585480"/>
-              <a:ext cx="45305" cy="45305"/>
+              <a:off x="8661729" y="1667344"/>
+              <a:ext cx="46123" cy="46123"/>
             </a:xfrm>
             <a:prstGeom prst="ellipse">
               <a:avLst/>
@@ -5743,7 +5743,7 @@
                 <a:alpha val="100000"/>
               </a:srgbClr>
             </a:solidFill>
-            <a:ln w="7363" cap="rnd">
+            <a:ln w="8181" cap="rnd">
               <a:solidFill>
                 <a:srgbClr val="009E73">
                   <a:alpha val="100000"/>
@@ -5767,8 +5767,8 @@
           </p:nvSpPr>
           <p:spPr>
             <a:xfrm>
-              <a:off x="10024503" y="1569446"/>
-              <a:ext cx="45305" cy="45305"/>
+              <a:off x="10025694" y="1652661"/>
+              <a:ext cx="46123" cy="46123"/>
             </a:xfrm>
             <a:prstGeom prst="ellipse">
               <a:avLst/>
@@ -5778,7 +5778,7 @@
                 <a:alpha val="100000"/>
               </a:srgbClr>
             </a:solidFill>
-            <a:ln w="7363" cap="rnd">
+            <a:ln w="8181" cap="rnd">
               <a:solidFill>
                 <a:srgbClr val="009E73">
                   <a:alpha val="100000"/>
@@ -5802,8 +5802,8 @@
           </p:nvSpPr>
           <p:spPr>
             <a:xfrm>
-              <a:off x="5900616" y="1663078"/>
-              <a:ext cx="45305" cy="45305"/>
+              <a:off x="5933799" y="1738400"/>
+              <a:ext cx="46123" cy="46123"/>
             </a:xfrm>
             <a:prstGeom prst="ellipse">
               <a:avLst/>
@@ -5813,7 +5813,7 @@
                 <a:alpha val="100000"/>
               </a:srgbClr>
             </a:solidFill>
-            <a:ln w="7363" cap="rnd">
+            <a:ln w="8181" cap="rnd">
               <a:solidFill>
                 <a:srgbClr val="999999">
                   <a:alpha val="100000"/>
@@ -5837,8 +5837,8 @@
           </p:nvSpPr>
           <p:spPr>
             <a:xfrm>
-              <a:off x="7275245" y="1621246"/>
-              <a:ext cx="45305" cy="45305"/>
+              <a:off x="7297764" y="1700095"/>
+              <a:ext cx="46123" cy="46123"/>
             </a:xfrm>
             <a:prstGeom prst="ellipse">
               <a:avLst/>
@@ -5848,7 +5848,7 @@
                 <a:alpha val="100000"/>
               </a:srgbClr>
             </a:solidFill>
-            <a:ln w="7363" cap="rnd">
+            <a:ln w="8181" cap="rnd">
               <a:solidFill>
                 <a:srgbClr val="999999">
                   <a:alpha val="100000"/>
@@ -5872,8 +5872,8 @@
           </p:nvSpPr>
           <p:spPr>
             <a:xfrm>
-              <a:off x="8649874" y="1662294"/>
-              <a:ext cx="45305" cy="45305"/>
+              <a:off x="8661729" y="1737683"/>
+              <a:ext cx="46123" cy="46123"/>
             </a:xfrm>
             <a:prstGeom prst="ellipse">
               <a:avLst/>
@@ -5883,7 +5883,7 @@
                 <a:alpha val="100000"/>
               </a:srgbClr>
             </a:solidFill>
-            <a:ln w="7363" cap="rnd">
+            <a:ln w="8181" cap="rnd">
               <a:solidFill>
                 <a:srgbClr val="999999">
                   <a:alpha val="100000"/>
@@ -5907,8 +5907,8 @@
           </p:nvSpPr>
           <p:spPr>
             <a:xfrm>
-              <a:off x="10024503" y="1676455"/>
-              <a:ext cx="45305" cy="45305"/>
+              <a:off x="10025694" y="1750649"/>
+              <a:ext cx="46123" cy="46123"/>
             </a:xfrm>
             <a:prstGeom prst="ellipse">
               <a:avLst/>
@@ -5918,7 +5918,7 @@
                 <a:alpha val="100000"/>
               </a:srgbClr>
             </a:solidFill>
-            <a:ln w="7363" cap="rnd">
+            <a:ln w="8181" cap="rnd">
               <a:solidFill>
                 <a:srgbClr val="999999">
                   <a:alpha val="100000"/>
@@ -5942,8 +5942,8 @@
           </p:nvSpPr>
           <p:spPr>
             <a:xfrm>
-              <a:off x="5900616" y="1487642"/>
-              <a:ext cx="45305" cy="45305"/>
+              <a:off x="5933799" y="1577754"/>
+              <a:ext cx="46123" cy="46123"/>
             </a:xfrm>
             <a:prstGeom prst="ellipse">
               <a:avLst/>
@@ -5953,7 +5953,7 @@
                 <a:alpha val="100000"/>
               </a:srgbClr>
             </a:solidFill>
-            <a:ln w="7363" cap="rnd">
+            <a:ln w="8181" cap="rnd">
               <a:solidFill>
                 <a:srgbClr val="0072B2">
                   <a:alpha val="100000"/>
@@ -5977,8 +5977,8 @@
           </p:nvSpPr>
           <p:spPr>
             <a:xfrm>
-              <a:off x="7275245" y="1431955"/>
-              <a:ext cx="45305" cy="45305"/>
+              <a:off x="7297764" y="1526762"/>
+              <a:ext cx="46123" cy="46123"/>
             </a:xfrm>
             <a:prstGeom prst="ellipse">
               <a:avLst/>
@@ -5988,7 +5988,7 @@
                 <a:alpha val="100000"/>
               </a:srgbClr>
             </a:solidFill>
-            <a:ln w="7363" cap="rnd">
+            <a:ln w="8181" cap="rnd">
               <a:solidFill>
                 <a:srgbClr val="0072B2">
                   <a:alpha val="100000"/>
@@ -6012,8 +6012,8 @@
           </p:nvSpPr>
           <p:spPr>
             <a:xfrm>
-              <a:off x="8649874" y="1443018"/>
-              <a:ext cx="45305" cy="45305"/>
+              <a:off x="8661729" y="1536892"/>
+              <a:ext cx="46123" cy="46123"/>
             </a:xfrm>
             <a:prstGeom prst="ellipse">
               <a:avLst/>
@@ -6023,7 +6023,7 @@
                 <a:alpha val="100000"/>
               </a:srgbClr>
             </a:solidFill>
-            <a:ln w="7363" cap="rnd">
+            <a:ln w="8181" cap="rnd">
               <a:solidFill>
                 <a:srgbClr val="0072B2">
                   <a:alpha val="100000"/>
@@ -6047,8 +6047,8 @@
           </p:nvSpPr>
           <p:spPr>
             <a:xfrm>
-              <a:off x="10024503" y="1457894"/>
-              <a:ext cx="45305" cy="45305"/>
+              <a:off x="10025694" y="1550514"/>
+              <a:ext cx="46123" cy="46123"/>
             </a:xfrm>
             <a:prstGeom prst="ellipse">
               <a:avLst/>
@@ -6058,7 +6058,7 @@
                 <a:alpha val="100000"/>
               </a:srgbClr>
             </a:solidFill>
-            <a:ln w="7363" cap="rnd">
+            <a:ln w="8181" cap="rnd">
               <a:solidFill>
                 <a:srgbClr val="0072B2">
                   <a:alpha val="100000"/>
@@ -6082,15 +6082,15 @@
           </p:nvSpPr>
           <p:spPr>
             <a:xfrm>
-              <a:off x="5717074" y="656226"/>
-              <a:ext cx="0" cy="2451548"/>
+              <a:off x="5752266" y="818749"/>
+              <a:ext cx="0" cy="2244873"/>
             </a:xfrm>
             <a:custGeom>
               <a:avLst/>
               <a:pathLst>
-                <a:path w="0" h="2451548">
+                <a:path w="0" h="2244873">
                   <a:moveTo>
-                    <a:pt x="0" y="2451548"/>
+                    <a:pt x="0" y="2244873"/>
                   </a:moveTo>
                   <a:lnTo>
                     <a:pt x="0" y="0"/>
@@ -6122,8 +6122,8 @@
           </p:nvSpPr>
           <p:spPr>
             <a:xfrm>
-              <a:off x="5539004" y="2963651"/>
-              <a:ext cx="126827" cy="65379"/>
+              <a:off x="5554055" y="2925190"/>
+              <a:ext cx="141274" cy="72786"/>
             </a:xfrm>
             <a:prstGeom prst="rect">
               <a:avLst/>
@@ -6143,7 +6143,7 @@
                 </a:spcAft>
               </a:pPr>
               <a:r>
-                <a:rPr sz="720" i="0" b="0">
+                <a:rPr sz="800" i="0" b="0">
                   <a:solidFill>
                     <a:srgbClr val="262626">
                       <a:alpha val="100000"/>
@@ -6165,8 +6165,8 @@
           </p:nvSpPr>
           <p:spPr>
             <a:xfrm>
-              <a:off x="5539004" y="2205542"/>
-              <a:ext cx="126827" cy="65379"/>
+              <a:off x="5554055" y="2230992"/>
+              <a:ext cx="141274" cy="72786"/>
             </a:xfrm>
             <a:prstGeom prst="rect">
               <a:avLst/>
@@ -6186,7 +6186,7 @@
                 </a:spcAft>
               </a:pPr>
               <a:r>
-                <a:rPr sz="720" i="0" b="0">
+                <a:rPr sz="800" i="0" b="0">
                   <a:solidFill>
                     <a:srgbClr val="262626">
                       <a:alpha val="100000"/>
@@ -6208,8 +6208,8 @@
           </p:nvSpPr>
           <p:spPr>
             <a:xfrm>
-              <a:off x="5539004" y="1447433"/>
-              <a:ext cx="126827" cy="65379"/>
+              <a:off x="5554055" y="1536794"/>
+              <a:ext cx="141274" cy="72786"/>
             </a:xfrm>
             <a:prstGeom prst="rect">
               <a:avLst/>
@@ -6229,7 +6229,7 @@
                 </a:spcAft>
               </a:pPr>
               <a:r>
-                <a:rPr sz="720" i="0" b="0">
+                <a:rPr sz="800" i="0" b="0">
                   <a:solidFill>
                     <a:srgbClr val="262626">
                       <a:alpha val="100000"/>
@@ -6251,8 +6251,8 @@
           </p:nvSpPr>
           <p:spPr>
             <a:xfrm>
-              <a:off x="5539004" y="689323"/>
-              <a:ext cx="126827" cy="65379"/>
+              <a:off x="5554055" y="842597"/>
+              <a:ext cx="141274" cy="72786"/>
             </a:xfrm>
             <a:prstGeom prst="rect">
               <a:avLst/>
@@ -6272,7 +6272,7 @@
                 </a:spcAft>
               </a:pPr>
               <a:r>
-                <a:rPr sz="720" i="0" b="0">
+                <a:rPr sz="800" i="0" b="0">
                   <a:solidFill>
                     <a:srgbClr val="262626">
                       <a:alpha val="100000"/>
@@ -6294,18 +6294,18 @@
           </p:nvSpPr>
           <p:spPr>
             <a:xfrm>
-              <a:off x="5688606" y="2996341"/>
-              <a:ext cx="28468" cy="0"/>
+              <a:off x="5720634" y="2961583"/>
+              <a:ext cx="31631" cy="0"/>
             </a:xfrm>
             <a:custGeom>
               <a:avLst/>
               <a:pathLst>
-                <a:path w="28468" h="0">
+                <a:path w="31631" h="0">
                   <a:moveTo>
                     <a:pt x="0" y="0"/>
                   </a:moveTo>
                   <a:lnTo>
-                    <a:pt x="28468" y="0"/>
+                    <a:pt x="31631" y="0"/>
                   </a:lnTo>
                 </a:path>
               </a:pathLst>
@@ -6334,18 +6334,18 @@
           </p:nvSpPr>
           <p:spPr>
             <a:xfrm>
-              <a:off x="5688606" y="2238232"/>
-              <a:ext cx="28468" cy="0"/>
+              <a:off x="5720634" y="2267385"/>
+              <a:ext cx="31631" cy="0"/>
             </a:xfrm>
             <a:custGeom>
               <a:avLst/>
               <a:pathLst>
-                <a:path w="28468" h="0">
+                <a:path w="31631" h="0">
                   <a:moveTo>
                     <a:pt x="0" y="0"/>
                   </a:moveTo>
                   <a:lnTo>
-                    <a:pt x="28468" y="0"/>
+                    <a:pt x="31631" y="0"/>
                   </a:lnTo>
                 </a:path>
               </a:pathLst>
@@ -6374,18 +6374,18 @@
           </p:nvSpPr>
           <p:spPr>
             <a:xfrm>
-              <a:off x="5688606" y="1480122"/>
-              <a:ext cx="28468" cy="0"/>
+              <a:off x="5720634" y="1573187"/>
+              <a:ext cx="31631" cy="0"/>
             </a:xfrm>
             <a:custGeom>
               <a:avLst/>
               <a:pathLst>
-                <a:path w="28468" h="0">
+                <a:path w="31631" h="0">
                   <a:moveTo>
                     <a:pt x="0" y="0"/>
                   </a:moveTo>
                   <a:lnTo>
-                    <a:pt x="28468" y="0"/>
+                    <a:pt x="31631" y="0"/>
                   </a:lnTo>
                 </a:path>
               </a:pathLst>
@@ -6414,18 +6414,18 @@
           </p:nvSpPr>
           <p:spPr>
             <a:xfrm>
-              <a:off x="5688606" y="722013"/>
-              <a:ext cx="28468" cy="0"/>
+              <a:off x="5720634" y="878990"/>
+              <a:ext cx="31631" cy="0"/>
             </a:xfrm>
             <a:custGeom>
               <a:avLst/>
               <a:pathLst>
-                <a:path w="28468" h="0">
+                <a:path w="31631" h="0">
                   <a:moveTo>
                     <a:pt x="0" y="0"/>
                   </a:moveTo>
                   <a:lnTo>
-                    <a:pt x="28468" y="0"/>
+                    <a:pt x="31631" y="0"/>
                   </a:lnTo>
                 </a:path>
               </a:pathLst>
@@ -6454,18 +6454,18 @@
           </p:nvSpPr>
           <p:spPr>
             <a:xfrm>
-              <a:off x="5717074" y="3107775"/>
-              <a:ext cx="4536275" cy="0"/>
+              <a:off x="5752266" y="3063623"/>
+              <a:ext cx="4501084" cy="0"/>
             </a:xfrm>
             <a:custGeom>
               <a:avLst/>
               <a:pathLst>
-                <a:path w="4536275" h="0">
+                <a:path w="4501084" h="0">
                   <a:moveTo>
                     <a:pt x="0" y="0"/>
                   </a:moveTo>
                   <a:lnTo>
-                    <a:pt x="4536275" y="0"/>
+                    <a:pt x="4501084" y="0"/>
                   </a:lnTo>
                 </a:path>
               </a:pathLst>
@@ -6494,15 +6494,15 @@
           </p:nvSpPr>
           <p:spPr>
             <a:xfrm>
-              <a:off x="5923269" y="3107775"/>
-              <a:ext cx="0" cy="28468"/>
+              <a:off x="5956861" y="3063623"/>
+              <a:ext cx="0" cy="31631"/>
             </a:xfrm>
             <a:custGeom>
               <a:avLst/>
               <a:pathLst>
-                <a:path w="0" h="28468">
+                <a:path w="0" h="31631">
                   <a:moveTo>
-                    <a:pt x="0" y="28468"/>
+                    <a:pt x="0" y="31631"/>
                   </a:moveTo>
                   <a:lnTo>
                     <a:pt x="0" y="0"/>
@@ -6534,15 +6534,15 @@
           </p:nvSpPr>
           <p:spPr>
             <a:xfrm>
-              <a:off x="7297898" y="3107775"/>
-              <a:ext cx="0" cy="28468"/>
+              <a:off x="7320826" y="3063623"/>
+              <a:ext cx="0" cy="31631"/>
             </a:xfrm>
             <a:custGeom>
               <a:avLst/>
               <a:pathLst>
-                <a:path w="0" h="28468">
+                <a:path w="0" h="31631">
                   <a:moveTo>
-                    <a:pt x="0" y="28468"/>
+                    <a:pt x="0" y="31631"/>
                   </a:moveTo>
                   <a:lnTo>
                     <a:pt x="0" y="0"/>
@@ -6574,15 +6574,15 @@
           </p:nvSpPr>
           <p:spPr>
             <a:xfrm>
-              <a:off x="8672527" y="3107775"/>
-              <a:ext cx="0" cy="28468"/>
+              <a:off x="8684790" y="3063623"/>
+              <a:ext cx="0" cy="31631"/>
             </a:xfrm>
             <a:custGeom>
               <a:avLst/>
               <a:pathLst>
-                <a:path w="0" h="28468">
+                <a:path w="0" h="31631">
                   <a:moveTo>
-                    <a:pt x="0" y="28468"/>
+                    <a:pt x="0" y="31631"/>
                   </a:moveTo>
                   <a:lnTo>
                     <a:pt x="0" y="0"/>
@@ -6614,15 +6614,15 @@
           </p:nvSpPr>
           <p:spPr>
             <a:xfrm>
-              <a:off x="10047156" y="3107775"/>
-              <a:ext cx="0" cy="28468"/>
+              <a:off x="10048755" y="3063623"/>
+              <a:ext cx="0" cy="31631"/>
             </a:xfrm>
             <a:custGeom>
               <a:avLst/>
               <a:pathLst>
-                <a:path w="0" h="28468">
+                <a:path w="0" h="31631">
                   <a:moveTo>
-                    <a:pt x="0" y="28468"/>
+                    <a:pt x="0" y="31631"/>
                   </a:moveTo>
                   <a:lnTo>
                     <a:pt x="0" y="0"/>
@@ -6654,8 +6654,8 @@
           </p:nvSpPr>
           <p:spPr>
             <a:xfrm>
-              <a:off x="5897894" y="3159018"/>
-              <a:ext cx="50749" cy="65379"/>
+              <a:off x="5928606" y="3120559"/>
+              <a:ext cx="56509" cy="72786"/>
             </a:xfrm>
             <a:prstGeom prst="rect">
               <a:avLst/>
@@ -6675,7 +6675,7 @@
                 </a:spcAft>
               </a:pPr>
               <a:r>
-                <a:rPr sz="720" i="0" b="0">
+                <a:rPr sz="800" i="0" b="0">
                   <a:solidFill>
                     <a:srgbClr val="262626">
                       <a:alpha val="100000"/>
@@ -6697,8 +6697,8 @@
           </p:nvSpPr>
           <p:spPr>
             <a:xfrm>
-              <a:off x="7247149" y="3159018"/>
-              <a:ext cx="101498" cy="65379"/>
+              <a:off x="7264316" y="3120559"/>
+              <a:ext cx="113019" cy="72786"/>
             </a:xfrm>
             <a:prstGeom prst="rect">
               <a:avLst/>
@@ -6718,7 +6718,7 @@
                 </a:spcAft>
               </a:pPr>
               <a:r>
-                <a:rPr sz="720" i="0" b="0">
+                <a:rPr sz="800" i="0" b="0">
                   <a:solidFill>
                     <a:srgbClr val="262626">
                       <a:alpha val="100000"/>
@@ -6740,8 +6740,8 @@
           </p:nvSpPr>
           <p:spPr>
             <a:xfrm>
-              <a:off x="8621777" y="3159018"/>
-              <a:ext cx="101498" cy="65379"/>
+              <a:off x="8628280" y="3120559"/>
+              <a:ext cx="113019" cy="72786"/>
             </a:xfrm>
             <a:prstGeom prst="rect">
               <a:avLst/>
@@ -6761,7 +6761,7 @@
                 </a:spcAft>
               </a:pPr>
               <a:r>
-                <a:rPr sz="720" i="0" b="0">
+                <a:rPr sz="800" i="0" b="0">
                   <a:solidFill>
                     <a:srgbClr val="262626">
                       <a:alpha val="100000"/>
@@ -6783,8 +6783,8 @@
           </p:nvSpPr>
           <p:spPr>
             <a:xfrm>
-              <a:off x="9996406" y="3159018"/>
-              <a:ext cx="101498" cy="65379"/>
+              <a:off x="9992245" y="3120559"/>
+              <a:ext cx="113019" cy="72786"/>
             </a:xfrm>
             <a:prstGeom prst="rect">
               <a:avLst/>
@@ -6804,7 +6804,7 @@
                 </a:spcAft>
               </a:pPr>
               <a:r>
-                <a:rPr sz="720" i="0" b="0">
+                <a:rPr sz="800" i="0" b="0">
                   <a:solidFill>
                     <a:srgbClr val="262626">
                       <a:alpha val="100000"/>
@@ -6826,8 +6826,8 @@
           </p:nvSpPr>
           <p:spPr>
             <a:xfrm>
-              <a:off x="7172265" y="3271977"/>
-              <a:ext cx="1625894" cy="81838"/>
+              <a:off x="7098924" y="3246374"/>
+              <a:ext cx="1807768" cy="90982"/>
             </a:xfrm>
             <a:prstGeom prst="rect">
               <a:avLst/>
@@ -6847,7 +6847,7 @@
                 </a:spcAft>
               </a:pPr>
               <a:r>
-                <a:rPr sz="900" i="0" b="0">
+                <a:rPr sz="1000" i="0" b="0">
                   <a:solidFill>
                     <a:srgbClr val="0D0D0D">
                       <a:alpha val="100000"/>
@@ -6869,8 +6869,8 @@
           </p:nvSpPr>
           <p:spPr>
             <a:xfrm rot="-5400000">
-              <a:off x="4893087" y="1841081"/>
-              <a:ext cx="1105143" cy="81838"/>
+              <a:off x="4835800" y="1895694"/>
+              <a:ext cx="1228862" cy="90982"/>
             </a:xfrm>
             <a:prstGeom prst="rect">
               <a:avLst/>
@@ -6890,7 +6890,7 @@
                 </a:spcAft>
               </a:pPr>
               <a:r>
-                <a:rPr sz="900" i="0" b="0">
+                <a:rPr sz="1000" i="0" b="0">
                   <a:solidFill>
                     <a:srgbClr val="0D0D0D">
                       <a:alpha val="100000"/>
@@ -6912,8 +6912,8 @@
           </p:nvSpPr>
           <p:spPr>
             <a:xfrm>
-              <a:off x="5717074" y="503004"/>
-              <a:ext cx="4357390" cy="74432"/>
+              <a:off x="5752266" y="521126"/>
+              <a:ext cx="2134392" cy="83576"/>
             </a:xfrm>
             <a:prstGeom prst="rect">
               <a:avLst/>
@@ -6933,7 +6933,7 @@
                 </a:spcAft>
               </a:pPr>
               <a:r>
-                <a:rPr sz="819" i="0" b="0">
+                <a:rPr sz="919" i="0" b="0">
                   <a:solidFill>
                     <a:srgbClr val="4D4D4D">
                       <a:alpha val="100000"/>
@@ -6942,7 +6942,7 @@
                   <a:latin typeface="Arial"/>
                   <a:cs typeface="Arial"/>
                 </a:rPr>
-                <a:t>1.34-1.41 across all twelve combinations, as expected if the two terms are separately identified</a:t>
+                <a:t>1.34-1.41 across all twelve combinations,</a:t>
               </a:r>
             </a:p>
           </p:txBody>
@@ -6955,8 +6955,8 @@
           </p:nvSpPr>
           <p:spPr>
             <a:xfrm>
-              <a:off x="5717074" y="328384"/>
-              <a:ext cx="2117750" cy="90982"/>
+              <a:off x="5752266" y="647313"/>
+              <a:ext cx="2725094" cy="83576"/>
             </a:xfrm>
             <a:prstGeom prst="rect">
               <a:avLst/>
@@ -6976,7 +6976,50 @@
                 </a:spcAft>
               </a:pPr>
               <a:r>
-                <a:rPr sz="1000" i="0" b="1">
+                <a:rPr sz="919" i="0" b="0">
+                  <a:solidFill>
+                    <a:srgbClr val="4D4D4D">
+                      <a:alpha val="100000"/>
+                    </a:srgbClr>
+                  </a:solidFill>
+                  <a:latin typeface="Arial"/>
+                  <a:cs typeface="Arial"/>
+                </a:rPr>
+                <a:t>as expected if the two terms are separately identified</a:t>
+              </a:r>
+            </a:p>
+          </p:txBody>
+        </p:sp>
+        <p:sp>
+          <p:nvSpPr>
+            <p:cNvPr id="123" name="tx123"/>
+            <p:cNvSpPr/>
+            <p:nvPr/>
+          </p:nvSpPr>
+          <p:spPr>
+            <a:xfrm>
+              <a:off x="5752266" y="328384"/>
+              <a:ext cx="2329434" cy="100035"/>
+            </a:xfrm>
+            <a:prstGeom prst="rect">
+              <a:avLst/>
+            </a:prstGeom>
+            <a:noFill/>
+          </p:spPr>
+          <p:txBody>
+            <a:bodyPr lIns="0" rIns="0" tIns="0" bIns="0" anchorCtr="1" anchor="ctr" wrap="none"/>
+            <a:lstStyle/>
+            <a:p>
+              <a:pPr algn="l" marL="0" marR="0" indent="0">
+                <a:spcBef>
+                  <a:spcPts val="0"/>
+                </a:spcBef>
+                <a:spcAft>
+                  <a:spcPts val="0"/>
+                </a:spcAft>
+              </a:pPr>
+              <a:r>
+                <a:rPr sz="1100" i="0" b="1">
                   <a:solidFill>
                     <a:srgbClr val="000000">
                       <a:alpha val="100000"/>
@@ -6992,14 +7035,14 @@
         </p:sp>
         <p:sp>
           <p:nvSpPr>
-            <p:cNvPr id="123" name="tx123"/>
-            <p:cNvSpPr/>
-            <p:nvPr/>
-          </p:nvSpPr>
-          <p:spPr>
-            <a:xfrm>
-              <a:off x="5382440" y="319535"/>
-              <a:ext cx="93085" cy="109179"/>
+            <p:cNvPr id="124" name="tx124"/>
+            <p:cNvSpPr/>
+            <p:nvPr/>
+          </p:nvSpPr>
+          <p:spPr>
+            <a:xfrm>
+              <a:off x="5378554" y="314803"/>
+              <a:ext cx="100858" cy="118231"/>
             </a:xfrm>
             <a:prstGeom prst="rect">
               <a:avLst/>
@@ -7019,7 +7062,7 @@
                 </a:spcAft>
               </a:pPr>
               <a:r>
-                <a:rPr sz="1200" i="0" b="1">
+                <a:rPr sz="1300" i="0" b="1">
                   <a:solidFill>
                     <a:srgbClr val="000000">
                       <a:alpha val="100000"/>
@@ -7035,14 +7078,14 @@
         </p:sp>
         <p:sp>
           <p:nvSpPr>
-            <p:cNvPr id="124" name="rc124"/>
-            <p:cNvSpPr/>
-            <p:nvPr/>
-          </p:nvSpPr>
-          <p:spPr>
-            <a:xfrm>
-              <a:off x="252469" y="3453688"/>
-              <a:ext cx="5063715" cy="3426162"/>
+            <p:cNvPr id="125" name="rc125"/>
+            <p:cNvSpPr/>
+            <p:nvPr/>
+          </p:nvSpPr>
+          <p:spPr>
+            <a:xfrm>
+              <a:off x="252469" y="3439972"/>
+              <a:ext cx="5065178" cy="3439878"/>
             </a:xfrm>
             <a:prstGeom prst="rect">
               <a:avLst/>
@@ -7052,7 +7095,7 @@
                 <a:alpha val="100000"/>
               </a:srgbClr>
             </a:solidFill>
-            <a:ln w="11086" cap="rnd">
+            <a:ln w="12318" cap="rnd">
               <a:solidFill>
                 <a:srgbClr val="FFFFFF">
                   <a:alpha val="100000"/>
@@ -7070,14 +7113,14 @@
         </p:sp>
         <p:sp>
           <p:nvSpPr>
-            <p:cNvPr id="125" name="rc125"/>
-            <p:cNvSpPr/>
-            <p:nvPr/>
-          </p:nvSpPr>
-          <p:spPr>
-            <a:xfrm>
-              <a:off x="5316184" y="3453688"/>
-              <a:ext cx="5038386" cy="3426162"/>
+            <p:cNvPr id="126" name="rc126"/>
+            <p:cNvSpPr/>
+            <p:nvPr/>
+          </p:nvSpPr>
+          <p:spPr>
+            <a:xfrm>
+              <a:off x="5317647" y="3439972"/>
+              <a:ext cx="5036923" cy="3439878"/>
             </a:xfrm>
             <a:prstGeom prst="rect">
               <a:avLst/>
@@ -7087,7 +7130,7 @@
                 <a:alpha val="100000"/>
               </a:srgbClr>
             </a:solidFill>
-            <a:ln w="11086" cap="rnd">
+            <a:ln w="12318" cap="rnd">
               <a:solidFill>
                 <a:srgbClr val="FFFFFF">
                   <a:alpha val="100000"/>
@@ -7105,14 +7148,14 @@
         </p:sp>
         <p:sp>
           <p:nvSpPr>
-            <p:cNvPr id="126" name="rc126"/>
-            <p:cNvSpPr/>
-            <p:nvPr/>
-          </p:nvSpPr>
-          <p:spPr>
-            <a:xfrm>
-              <a:off x="666023" y="4082389"/>
-              <a:ext cx="4548940" cy="2451548"/>
+            <p:cNvPr id="127" name="rc127"/>
+            <p:cNvSpPr/>
+            <p:nvPr/>
+          </p:nvSpPr>
+          <p:spPr>
+            <a:xfrm>
+              <a:off x="701215" y="4258627"/>
+              <a:ext cx="4515211" cy="2244873"/>
             </a:xfrm>
             <a:prstGeom prst="rect">
               <a:avLst/>
@@ -7131,27 +7174,27 @@
         </p:sp>
         <p:sp>
           <p:nvSpPr>
-            <p:cNvPr id="127" name="pl127"/>
-            <p:cNvSpPr/>
-            <p:nvPr/>
-          </p:nvSpPr>
-          <p:spPr>
-            <a:xfrm>
-              <a:off x="666023" y="6066856"/>
-              <a:ext cx="4548940" cy="0"/>
+            <p:cNvPr id="128" name="pl128"/>
+            <p:cNvSpPr/>
+            <p:nvPr/>
+          </p:nvSpPr>
+          <p:spPr>
+            <a:xfrm>
+              <a:off x="701215" y="6075797"/>
+              <a:ext cx="4515211" cy="0"/>
             </a:xfrm>
             <a:custGeom>
               <a:avLst/>
               <a:pathLst>
-                <a:path w="4548940" h="0">
+                <a:path w="4515211" h="0">
                   <a:moveTo>
                     <a:pt x="0" y="0"/>
                   </a:moveTo>
                   <a:lnTo>
-                    <a:pt x="4548940" y="0"/>
-                  </a:lnTo>
-                  <a:lnTo>
-                    <a:pt x="4548940" y="0"/>
+                    <a:pt x="4515211" y="0"/>
+                  </a:lnTo>
+                  <a:lnTo>
+                    <a:pt x="4515211" y="0"/>
                   </a:lnTo>
                 </a:path>
               </a:pathLst>
@@ -7174,27 +7217,27 @@
         </p:sp>
         <p:sp>
           <p:nvSpPr>
-            <p:cNvPr id="128" name="pl128"/>
-            <p:cNvSpPr/>
-            <p:nvPr/>
-          </p:nvSpPr>
-          <p:spPr>
-            <a:xfrm>
-              <a:off x="666023" y="5469949"/>
-              <a:ext cx="4548940" cy="0"/>
+            <p:cNvPr id="129" name="pl129"/>
+            <p:cNvSpPr/>
+            <p:nvPr/>
+          </p:nvSpPr>
+          <p:spPr>
+            <a:xfrm>
+              <a:off x="701215" y="5529211"/>
+              <a:ext cx="4515211" cy="0"/>
             </a:xfrm>
             <a:custGeom>
               <a:avLst/>
               <a:pathLst>
-                <a:path w="4548940" h="0">
+                <a:path w="4515211" h="0">
                   <a:moveTo>
                     <a:pt x="0" y="0"/>
                   </a:moveTo>
                   <a:lnTo>
-                    <a:pt x="4548940" y="0"/>
-                  </a:lnTo>
-                  <a:lnTo>
-                    <a:pt x="4548940" y="0"/>
+                    <a:pt x="4515211" y="0"/>
+                  </a:lnTo>
+                  <a:lnTo>
+                    <a:pt x="4515211" y="0"/>
                   </a:lnTo>
                 </a:path>
               </a:pathLst>
@@ -7217,27 +7260,27 @@
         </p:sp>
         <p:sp>
           <p:nvSpPr>
-            <p:cNvPr id="129" name="pl129"/>
-            <p:cNvSpPr/>
-            <p:nvPr/>
-          </p:nvSpPr>
-          <p:spPr>
-            <a:xfrm>
-              <a:off x="666023" y="4873042"/>
-              <a:ext cx="4548940" cy="0"/>
+            <p:cNvPr id="130" name="pl130"/>
+            <p:cNvSpPr/>
+            <p:nvPr/>
+          </p:nvSpPr>
+          <p:spPr>
+            <a:xfrm>
+              <a:off x="701215" y="4982625"/>
+              <a:ext cx="4515211" cy="0"/>
             </a:xfrm>
             <a:custGeom>
               <a:avLst/>
               <a:pathLst>
-                <a:path w="4548940" h="0">
+                <a:path w="4515211" h="0">
                   <a:moveTo>
                     <a:pt x="0" y="0"/>
                   </a:moveTo>
                   <a:lnTo>
-                    <a:pt x="4548940" y="0"/>
-                  </a:lnTo>
-                  <a:lnTo>
-                    <a:pt x="4548940" y="0"/>
+                    <a:pt x="4515211" y="0"/>
+                  </a:lnTo>
+                  <a:lnTo>
+                    <a:pt x="4515211" y="0"/>
                   </a:lnTo>
                 </a:path>
               </a:pathLst>
@@ -7260,27 +7303,27 @@
         </p:sp>
         <p:sp>
           <p:nvSpPr>
-            <p:cNvPr id="130" name="pl130"/>
-            <p:cNvSpPr/>
-            <p:nvPr/>
-          </p:nvSpPr>
-          <p:spPr>
-            <a:xfrm>
-              <a:off x="666023" y="4276134"/>
-              <a:ext cx="4548940" cy="0"/>
+            <p:cNvPr id="131" name="pl131"/>
+            <p:cNvSpPr/>
+            <p:nvPr/>
+          </p:nvSpPr>
+          <p:spPr>
+            <a:xfrm>
+              <a:off x="701215" y="4436039"/>
+              <a:ext cx="4515211" cy="0"/>
             </a:xfrm>
             <a:custGeom>
               <a:avLst/>
               <a:pathLst>
-                <a:path w="4548940" h="0">
+                <a:path w="4515211" h="0">
                   <a:moveTo>
                     <a:pt x="0" y="0"/>
                   </a:moveTo>
                   <a:lnTo>
-                    <a:pt x="4548940" y="0"/>
-                  </a:lnTo>
-                  <a:lnTo>
-                    <a:pt x="4548940" y="0"/>
+                    <a:pt x="4515211" y="0"/>
+                  </a:lnTo>
+                  <a:lnTo>
+                    <a:pt x="4515211" y="0"/>
                   </a:lnTo>
                 </a:path>
               </a:pathLst>
@@ -7303,27 +7346,27 @@
         </p:sp>
         <p:sp>
           <p:nvSpPr>
-            <p:cNvPr id="131" name="pl131"/>
-            <p:cNvSpPr/>
-            <p:nvPr/>
-          </p:nvSpPr>
-          <p:spPr>
-            <a:xfrm>
-              <a:off x="666023" y="4873042"/>
-              <a:ext cx="4548940" cy="0"/>
+            <p:cNvPr id="132" name="pl132"/>
+            <p:cNvSpPr/>
+            <p:nvPr/>
+          </p:nvSpPr>
+          <p:spPr>
+            <a:xfrm>
+              <a:off x="701215" y="4982625"/>
+              <a:ext cx="4515211" cy="0"/>
             </a:xfrm>
             <a:custGeom>
               <a:avLst/>
               <a:pathLst>
-                <a:path w="4548940" h="0">
+                <a:path w="4515211" h="0">
                   <a:moveTo>
                     <a:pt x="0" y="0"/>
                   </a:moveTo>
                   <a:lnTo>
-                    <a:pt x="4548940" y="0"/>
-                  </a:lnTo>
-                  <a:lnTo>
-                    <a:pt x="4548940" y="0"/>
+                    <a:pt x="4515211" y="0"/>
+                  </a:lnTo>
+                  <a:lnTo>
+                    <a:pt x="4515211" y="0"/>
                   </a:lnTo>
                 </a:path>
               </a:pathLst>
@@ -7346,42 +7389,42 @@
         </p:sp>
         <p:sp>
           <p:nvSpPr>
-            <p:cNvPr id="132" name="pg132"/>
-            <p:cNvSpPr/>
-            <p:nvPr/>
-          </p:nvSpPr>
-          <p:spPr>
-            <a:xfrm>
-              <a:off x="872793" y="4888311"/>
-              <a:ext cx="4135400" cy="1534192"/>
+            <p:cNvPr id="133" name="pg133"/>
+            <p:cNvSpPr/>
+            <p:nvPr/>
+          </p:nvSpPr>
+          <p:spPr>
+            <a:xfrm>
+              <a:off x="906452" y="4996608"/>
+              <a:ext cx="4104737" cy="1404853"/>
             </a:xfrm>
             <a:custGeom>
               <a:avLst/>
               <a:pathLst>
-                <a:path w="4135400" h="1534192">
+                <a:path w="4104737" h="1404853">
                   <a:moveTo>
                     <a:pt x="0" y="0"/>
                   </a:moveTo>
                   <a:lnTo>
-                    <a:pt x="1378466" y="338370"/>
-                  </a:lnTo>
-                  <a:lnTo>
-                    <a:pt x="2756933" y="294138"/>
-                  </a:lnTo>
-                  <a:lnTo>
-                    <a:pt x="4135400" y="488938"/>
-                  </a:lnTo>
-                  <a:lnTo>
-                    <a:pt x="4135400" y="1534192"/>
-                  </a:lnTo>
-                  <a:lnTo>
-                    <a:pt x="2756933" y="1413410"/>
-                  </a:lnTo>
-                  <a:lnTo>
-                    <a:pt x="1378466" y="1404203"/>
-                  </a:lnTo>
-                  <a:lnTo>
-                    <a:pt x="0" y="1135760"/>
+                    <a:pt x="1368245" y="309844"/>
+                  </a:lnTo>
+                  <a:lnTo>
+                    <a:pt x="2736491" y="269341"/>
+                  </a:lnTo>
+                  <a:lnTo>
+                    <a:pt x="4104737" y="447718"/>
+                  </a:lnTo>
+                  <a:lnTo>
+                    <a:pt x="4104737" y="1404853"/>
+                  </a:lnTo>
+                  <a:lnTo>
+                    <a:pt x="2736491" y="1294254"/>
+                  </a:lnTo>
+                  <a:lnTo>
+                    <a:pt x="1368245" y="1285823"/>
+                  </a:lnTo>
+                  <a:lnTo>
+                    <a:pt x="0" y="1040011"/>
                   </a:lnTo>
                   <a:close/>
                 </a:path>
@@ -7401,30 +7444,30 @@
         </p:sp>
         <p:sp>
           <p:nvSpPr>
-            <p:cNvPr id="133" name="pl133"/>
-            <p:cNvSpPr/>
-            <p:nvPr/>
-          </p:nvSpPr>
-          <p:spPr>
-            <a:xfrm>
-              <a:off x="872793" y="4888311"/>
-              <a:ext cx="4135400" cy="488938"/>
+            <p:cNvPr id="134" name="pl134"/>
+            <p:cNvSpPr/>
+            <p:nvPr/>
+          </p:nvSpPr>
+          <p:spPr>
+            <a:xfrm>
+              <a:off x="906452" y="4996608"/>
+              <a:ext cx="4104737" cy="447718"/>
             </a:xfrm>
             <a:custGeom>
               <a:avLst/>
               <a:pathLst>
-                <a:path w="4135400" h="488938">
+                <a:path w="4104737" h="447718">
                   <a:moveTo>
                     <a:pt x="0" y="0"/>
                   </a:moveTo>
                   <a:lnTo>
-                    <a:pt x="1378466" y="338370"/>
-                  </a:lnTo>
-                  <a:lnTo>
-                    <a:pt x="2756933" y="294138"/>
-                  </a:lnTo>
-                  <a:lnTo>
-                    <a:pt x="4135400" y="488938"/>
+                    <a:pt x="1368245" y="309844"/>
+                  </a:lnTo>
+                  <a:lnTo>
+                    <a:pt x="2736491" y="269341"/>
+                  </a:lnTo>
+                  <a:lnTo>
+                    <a:pt x="4104737" y="447718"/>
                   </a:lnTo>
                 </a:path>
               </a:pathLst>
@@ -7438,27 +7481,27 @@
         </p:sp>
         <p:sp>
           <p:nvSpPr>
-            <p:cNvPr id="134" name="pl134"/>
-            <p:cNvSpPr/>
-            <p:nvPr/>
-          </p:nvSpPr>
-          <p:spPr>
-            <a:xfrm>
-              <a:off x="872793" y="6024072"/>
-              <a:ext cx="4135400" cy="398431"/>
+            <p:cNvPr id="135" name="pl135"/>
+            <p:cNvSpPr/>
+            <p:nvPr/>
+          </p:nvSpPr>
+          <p:spPr>
+            <a:xfrm>
+              <a:off x="906452" y="6036619"/>
+              <a:ext cx="4104737" cy="364842"/>
             </a:xfrm>
             <a:custGeom>
               <a:avLst/>
               <a:pathLst>
-                <a:path w="4135400" h="398431">
+                <a:path w="4104737" h="364842">
                   <a:moveTo>
-                    <a:pt x="4135400" y="398431"/>
+                    <a:pt x="4104737" y="364842"/>
                   </a:moveTo>
                   <a:lnTo>
-                    <a:pt x="2756933" y="277649"/>
-                  </a:lnTo>
-                  <a:lnTo>
-                    <a:pt x="1378466" y="268443"/>
+                    <a:pt x="2736491" y="254242"/>
+                  </a:lnTo>
+                  <a:lnTo>
+                    <a:pt x="1368245" y="245812"/>
                   </a:lnTo>
                   <a:lnTo>
                     <a:pt x="0" y="0"/>
@@ -7475,42 +7518,42 @@
         </p:sp>
         <p:sp>
           <p:nvSpPr>
-            <p:cNvPr id="135" name="pg135"/>
-            <p:cNvSpPr/>
-            <p:nvPr/>
-          </p:nvSpPr>
-          <p:spPr>
-            <a:xfrm>
-              <a:off x="872793" y="4193823"/>
-              <a:ext cx="4135400" cy="1869605"/>
+            <p:cNvPr id="136" name="pg136"/>
+            <p:cNvSpPr/>
+            <p:nvPr/>
+          </p:nvSpPr>
+          <p:spPr>
+            <a:xfrm>
+              <a:off x="906452" y="4360667"/>
+              <a:ext cx="4104737" cy="1711990"/>
             </a:xfrm>
             <a:custGeom>
               <a:avLst/>
               <a:pathLst>
-                <a:path w="4135400" h="1869605">
+                <a:path w="4104737" h="1711990">
                   <a:moveTo>
                     <a:pt x="0" y="0"/>
                   </a:moveTo>
                   <a:lnTo>
-                    <a:pt x="1378466" y="451296"/>
-                  </a:lnTo>
-                  <a:lnTo>
-                    <a:pt x="2756933" y="548314"/>
-                  </a:lnTo>
-                  <a:lnTo>
-                    <a:pt x="4135400" y="702141"/>
-                  </a:lnTo>
-                  <a:lnTo>
-                    <a:pt x="4135400" y="1869605"/>
-                  </a:lnTo>
-                  <a:lnTo>
-                    <a:pt x="2756933" y="1722434"/>
-                  </a:lnTo>
-                  <a:lnTo>
-                    <a:pt x="1378466" y="1652658"/>
-                  </a:lnTo>
-                  <a:lnTo>
-                    <a:pt x="0" y="1307558"/>
+                    <a:pt x="1368245" y="413250"/>
+                  </a:lnTo>
+                  <a:lnTo>
+                    <a:pt x="2736491" y="502089"/>
+                  </a:lnTo>
+                  <a:lnTo>
+                    <a:pt x="4104737" y="642948"/>
+                  </a:lnTo>
+                  <a:lnTo>
+                    <a:pt x="4104737" y="1711990"/>
+                  </a:lnTo>
+                  <a:lnTo>
+                    <a:pt x="2736491" y="1577226"/>
+                  </a:lnTo>
+                  <a:lnTo>
+                    <a:pt x="1368245" y="1513332"/>
+                  </a:lnTo>
+                  <a:lnTo>
+                    <a:pt x="0" y="1197326"/>
                   </a:lnTo>
                   <a:close/>
                 </a:path>
@@ -7530,30 +7573,30 @@
         </p:sp>
         <p:sp>
           <p:nvSpPr>
-            <p:cNvPr id="136" name="pl136"/>
-            <p:cNvSpPr/>
-            <p:nvPr/>
-          </p:nvSpPr>
-          <p:spPr>
-            <a:xfrm>
-              <a:off x="872793" y="4193823"/>
-              <a:ext cx="4135400" cy="702141"/>
+            <p:cNvPr id="137" name="pl137"/>
+            <p:cNvSpPr/>
+            <p:nvPr/>
+          </p:nvSpPr>
+          <p:spPr>
+            <a:xfrm>
+              <a:off x="906452" y="4360667"/>
+              <a:ext cx="4104737" cy="642948"/>
             </a:xfrm>
             <a:custGeom>
               <a:avLst/>
               <a:pathLst>
-                <a:path w="4135400" h="702141">
+                <a:path w="4104737" h="642948">
                   <a:moveTo>
                     <a:pt x="0" y="0"/>
                   </a:moveTo>
                   <a:lnTo>
-                    <a:pt x="1378466" y="451296"/>
-                  </a:lnTo>
-                  <a:lnTo>
-                    <a:pt x="2756933" y="548314"/>
-                  </a:lnTo>
-                  <a:lnTo>
-                    <a:pt x="4135400" y="702141"/>
+                    <a:pt x="1368245" y="413250"/>
+                  </a:lnTo>
+                  <a:lnTo>
+                    <a:pt x="2736491" y="502089"/>
+                  </a:lnTo>
+                  <a:lnTo>
+                    <a:pt x="4104737" y="642948"/>
                   </a:lnTo>
                 </a:path>
               </a:pathLst>
@@ -7567,27 +7610,27 @@
         </p:sp>
         <p:sp>
           <p:nvSpPr>
-            <p:cNvPr id="137" name="pl137"/>
-            <p:cNvSpPr/>
-            <p:nvPr/>
-          </p:nvSpPr>
-          <p:spPr>
-            <a:xfrm>
-              <a:off x="872793" y="5501381"/>
-              <a:ext cx="4135400" cy="562046"/>
+            <p:cNvPr id="138" name="pl138"/>
+            <p:cNvSpPr/>
+            <p:nvPr/>
+          </p:nvSpPr>
+          <p:spPr>
+            <a:xfrm>
+              <a:off x="906452" y="5557993"/>
+              <a:ext cx="4104737" cy="514664"/>
             </a:xfrm>
             <a:custGeom>
               <a:avLst/>
               <a:pathLst>
-                <a:path w="4135400" h="562046">
+                <a:path w="4104737" h="514664">
                   <a:moveTo>
-                    <a:pt x="4135400" y="562046"/>
+                    <a:pt x="4104737" y="514664"/>
                   </a:moveTo>
                   <a:lnTo>
-                    <a:pt x="2756933" y="414875"/>
-                  </a:lnTo>
-                  <a:lnTo>
-                    <a:pt x="1378466" y="345099"/>
+                    <a:pt x="2736491" y="379900"/>
+                  </a:lnTo>
+                  <a:lnTo>
+                    <a:pt x="1368245" y="316006"/>
                   </a:lnTo>
                   <a:lnTo>
                     <a:pt x="0" y="0"/>
@@ -7604,42 +7647,42 @@
         </p:sp>
         <p:sp>
           <p:nvSpPr>
-            <p:cNvPr id="138" name="pg138"/>
-            <p:cNvSpPr/>
-            <p:nvPr/>
-          </p:nvSpPr>
-          <p:spPr>
-            <a:xfrm>
-              <a:off x="872793" y="4565639"/>
-              <a:ext cx="4135400" cy="1606364"/>
+            <p:cNvPr id="139" name="pg139"/>
+            <p:cNvSpPr/>
+            <p:nvPr/>
+          </p:nvSpPr>
+          <p:spPr>
+            <a:xfrm>
+              <a:off x="906452" y="4701137"/>
+              <a:ext cx="4104737" cy="1470941"/>
             </a:xfrm>
             <a:custGeom>
               <a:avLst/>
               <a:pathLst>
-                <a:path w="4135400" h="1606364">
+                <a:path w="4104737" h="1470941">
                   <a:moveTo>
                     <a:pt x="0" y="0"/>
                   </a:moveTo>
                   <a:lnTo>
-                    <a:pt x="1378466" y="362594"/>
-                  </a:lnTo>
-                  <a:lnTo>
-                    <a:pt x="2756933" y="309183"/>
-                  </a:lnTo>
-                  <a:lnTo>
-                    <a:pt x="4135400" y="474179"/>
-                  </a:lnTo>
-                  <a:lnTo>
-                    <a:pt x="4135400" y="1606364"/>
-                  </a:lnTo>
-                  <a:lnTo>
-                    <a:pt x="2756933" y="1473260"/>
-                  </a:lnTo>
-                  <a:lnTo>
-                    <a:pt x="1378466" y="1500790"/>
-                  </a:lnTo>
-                  <a:lnTo>
-                    <a:pt x="0" y="1232079"/>
+                    <a:pt x="1368245" y="332026"/>
+                  </a:lnTo>
+                  <a:lnTo>
+                    <a:pt x="2736491" y="283117"/>
+                  </a:lnTo>
+                  <a:lnTo>
+                    <a:pt x="4104737" y="434203"/>
+                  </a:lnTo>
+                  <a:lnTo>
+                    <a:pt x="4104737" y="1470941"/>
+                  </a:lnTo>
+                  <a:lnTo>
+                    <a:pt x="2736491" y="1349058"/>
+                  </a:lnTo>
+                  <a:lnTo>
+                    <a:pt x="1368245" y="1374268"/>
+                  </a:lnTo>
+                  <a:lnTo>
+                    <a:pt x="0" y="1128210"/>
                   </a:lnTo>
                   <a:close/>
                 </a:path>
@@ -7659,30 +7702,30 @@
         </p:sp>
         <p:sp>
           <p:nvSpPr>
-            <p:cNvPr id="139" name="pl139"/>
-            <p:cNvSpPr/>
-            <p:nvPr/>
-          </p:nvSpPr>
-          <p:spPr>
-            <a:xfrm>
-              <a:off x="872793" y="4565639"/>
-              <a:ext cx="4135400" cy="474179"/>
+            <p:cNvPr id="140" name="pl140"/>
+            <p:cNvSpPr/>
+            <p:nvPr/>
+          </p:nvSpPr>
+          <p:spPr>
+            <a:xfrm>
+              <a:off x="906452" y="4701137"/>
+              <a:ext cx="4104737" cy="434203"/>
             </a:xfrm>
             <a:custGeom>
               <a:avLst/>
               <a:pathLst>
-                <a:path w="4135400" h="474179">
+                <a:path w="4104737" h="434203">
                   <a:moveTo>
                     <a:pt x="0" y="0"/>
                   </a:moveTo>
                   <a:lnTo>
-                    <a:pt x="1378466" y="362594"/>
-                  </a:lnTo>
-                  <a:lnTo>
-                    <a:pt x="2756933" y="309183"/>
-                  </a:lnTo>
-                  <a:lnTo>
-                    <a:pt x="4135400" y="474179"/>
+                    <a:pt x="1368245" y="332026"/>
+                  </a:lnTo>
+                  <a:lnTo>
+                    <a:pt x="2736491" y="283117"/>
+                  </a:lnTo>
+                  <a:lnTo>
+                    <a:pt x="4104737" y="434203"/>
                   </a:lnTo>
                 </a:path>
               </a:pathLst>
@@ -7696,27 +7739,27 @@
         </p:sp>
         <p:sp>
           <p:nvSpPr>
-            <p:cNvPr id="140" name="pl140"/>
-            <p:cNvSpPr/>
-            <p:nvPr/>
-          </p:nvSpPr>
-          <p:spPr>
-            <a:xfrm>
-              <a:off x="872793" y="5797718"/>
-              <a:ext cx="4135400" cy="374285"/>
+            <p:cNvPr id="141" name="pl141"/>
+            <p:cNvSpPr/>
+            <p:nvPr/>
+          </p:nvSpPr>
+          <p:spPr>
+            <a:xfrm>
+              <a:off x="906452" y="5829348"/>
+              <a:ext cx="4104737" cy="342731"/>
             </a:xfrm>
             <a:custGeom>
               <a:avLst/>
               <a:pathLst>
-                <a:path w="4135400" h="374285">
+                <a:path w="4104737" h="342731">
                   <a:moveTo>
-                    <a:pt x="4135400" y="374285"/>
+                    <a:pt x="4104737" y="342731"/>
                   </a:moveTo>
                   <a:lnTo>
-                    <a:pt x="2756933" y="241181"/>
-                  </a:lnTo>
-                  <a:lnTo>
-                    <a:pt x="1378466" y="268711"/>
+                    <a:pt x="2736491" y="220848"/>
+                  </a:lnTo>
+                  <a:lnTo>
+                    <a:pt x="1368245" y="246058"/>
                   </a:lnTo>
                   <a:lnTo>
                     <a:pt x="0" y="0"/>
@@ -7733,30 +7776,30 @@
         </p:sp>
         <p:sp>
           <p:nvSpPr>
-            <p:cNvPr id="141" name="pl141"/>
-            <p:cNvSpPr/>
-            <p:nvPr/>
-          </p:nvSpPr>
-          <p:spPr>
-            <a:xfrm>
-              <a:off x="872793" y="5486213"/>
-              <a:ext cx="4135400" cy="441374"/>
+            <p:cNvPr id="142" name="pl142"/>
+            <p:cNvSpPr/>
+            <p:nvPr/>
+          </p:nvSpPr>
+          <p:spPr>
+            <a:xfrm>
+              <a:off x="906452" y="5544104"/>
+              <a:ext cx="4104737" cy="404164"/>
             </a:xfrm>
             <a:custGeom>
               <a:avLst/>
               <a:pathLst>
-                <a:path w="4135400" h="441374">
+                <a:path w="4104737" h="404164">
                   <a:moveTo>
                     <a:pt x="0" y="0"/>
                   </a:moveTo>
                   <a:lnTo>
-                    <a:pt x="1378466" y="301401"/>
-                  </a:lnTo>
-                  <a:lnTo>
-                    <a:pt x="2756933" y="286670"/>
-                  </a:lnTo>
-                  <a:lnTo>
-                    <a:pt x="4135400" y="441374"/>
+                    <a:pt x="1368245" y="275991"/>
+                  </a:lnTo>
+                  <a:lnTo>
+                    <a:pt x="2736491" y="262502"/>
+                  </a:lnTo>
+                  <a:lnTo>
+                    <a:pt x="4104737" y="404164"/>
                   </a:lnTo>
                 </a:path>
               </a:pathLst>
@@ -7779,30 +7822,30 @@
         </p:sp>
         <p:sp>
           <p:nvSpPr>
-            <p:cNvPr id="142" name="pl142"/>
-            <p:cNvSpPr/>
-            <p:nvPr/>
-          </p:nvSpPr>
-          <p:spPr>
-            <a:xfrm>
-              <a:off x="872793" y="4883360"/>
-              <a:ext cx="4135400" cy="628202"/>
+            <p:cNvPr id="143" name="pl143"/>
+            <p:cNvSpPr/>
+            <p:nvPr/>
+          </p:nvSpPr>
+          <p:spPr>
+            <a:xfrm>
+              <a:off x="906452" y="4992074"/>
+              <a:ext cx="4104737" cy="575242"/>
             </a:xfrm>
             <a:custGeom>
               <a:avLst/>
               <a:pathLst>
-                <a:path w="4135400" h="628202">
+                <a:path w="4104737" h="575242">
                   <a:moveTo>
                     <a:pt x="0" y="0"/>
                   </a:moveTo>
                   <a:lnTo>
-                    <a:pt x="1378466" y="394770"/>
-                  </a:lnTo>
-                  <a:lnTo>
-                    <a:pt x="2756933" y="477183"/>
-                  </a:lnTo>
-                  <a:lnTo>
-                    <a:pt x="4135400" y="628202"/>
+                    <a:pt x="1368245" y="361489"/>
+                  </a:lnTo>
+                  <a:lnTo>
+                    <a:pt x="2736491" y="436955"/>
+                  </a:lnTo>
+                  <a:lnTo>
+                    <a:pt x="4104737" y="575242"/>
                   </a:lnTo>
                 </a:path>
               </a:pathLst>
@@ -7825,30 +7868,30 @@
         </p:sp>
         <p:sp>
           <p:nvSpPr>
-            <p:cNvPr id="143" name="pl143"/>
-            <p:cNvSpPr/>
-            <p:nvPr/>
-          </p:nvSpPr>
-          <p:spPr>
-            <a:xfrm>
-              <a:off x="872793" y="5215301"/>
-              <a:ext cx="4135400" cy="421300"/>
+            <p:cNvPr id="144" name="pl144"/>
+            <p:cNvSpPr/>
+            <p:nvPr/>
+          </p:nvSpPr>
+          <p:spPr>
+            <a:xfrm>
+              <a:off x="906452" y="5296030"/>
+              <a:ext cx="4104737" cy="385783"/>
             </a:xfrm>
             <a:custGeom>
               <a:avLst/>
               <a:pathLst>
-                <a:path w="4135400" h="421300">
+                <a:path w="4104737" h="385783">
                   <a:moveTo>
                     <a:pt x="0" y="0"/>
                   </a:moveTo>
                   <a:lnTo>
-                    <a:pt x="1378466" y="312415"/>
-                  </a:lnTo>
-                  <a:lnTo>
-                    <a:pt x="2756933" y="273105"/>
-                  </a:lnTo>
-                  <a:lnTo>
-                    <a:pt x="4135400" y="421300"/>
+                    <a:pt x="1368245" y="286077"/>
+                  </a:lnTo>
+                  <a:lnTo>
+                    <a:pt x="2736491" y="250081"/>
+                  </a:lnTo>
+                  <a:lnTo>
+                    <a:pt x="4104737" y="385783"/>
                   </a:lnTo>
                 </a:path>
               </a:pathLst>
@@ -7871,14 +7914,14 @@
         </p:sp>
         <p:sp>
           <p:nvSpPr>
-            <p:cNvPr id="144" name="pt144"/>
-            <p:cNvSpPr/>
-            <p:nvPr/>
-          </p:nvSpPr>
-          <p:spPr>
-            <a:xfrm>
-              <a:off x="850141" y="5192648"/>
-              <a:ext cx="45305" cy="45305"/>
+            <p:cNvPr id="145" name="pt145"/>
+            <p:cNvSpPr/>
+            <p:nvPr/>
+          </p:nvSpPr>
+          <p:spPr>
+            <a:xfrm>
+              <a:off x="883390" y="5272969"/>
+              <a:ext cx="46123" cy="46123"/>
             </a:xfrm>
             <a:prstGeom prst="ellipse">
               <a:avLst/>
@@ -7888,7 +7931,7 @@
                 <a:alpha val="100000"/>
               </a:srgbClr>
             </a:solidFill>
-            <a:ln w="7363" cap="rnd">
+            <a:ln w="8181" cap="rnd">
               <a:solidFill>
                 <a:srgbClr val="009E73">
                   <a:alpha val="100000"/>
@@ -7906,14 +7949,14 @@
         </p:sp>
         <p:sp>
           <p:nvSpPr>
-            <p:cNvPr id="145" name="pt145"/>
-            <p:cNvSpPr/>
-            <p:nvPr/>
-          </p:nvSpPr>
-          <p:spPr>
-            <a:xfrm>
-              <a:off x="2228607" y="5505063"/>
-              <a:ext cx="45305" cy="45305"/>
+            <p:cNvPr id="146" name="pt146"/>
+            <p:cNvSpPr/>
+            <p:nvPr/>
+          </p:nvSpPr>
+          <p:spPr>
+            <a:xfrm>
+              <a:off x="2251636" y="5559046"/>
+              <a:ext cx="46123" cy="46123"/>
             </a:xfrm>
             <a:prstGeom prst="ellipse">
               <a:avLst/>
@@ -7923,7 +7966,7 @@
                 <a:alpha val="100000"/>
               </a:srgbClr>
             </a:solidFill>
-            <a:ln w="7363" cap="rnd">
+            <a:ln w="8181" cap="rnd">
               <a:solidFill>
                 <a:srgbClr val="009E73">
                   <a:alpha val="100000"/>
@@ -7941,14 +7984,14 @@
         </p:sp>
         <p:sp>
           <p:nvSpPr>
-            <p:cNvPr id="146" name="pt146"/>
-            <p:cNvSpPr/>
-            <p:nvPr/>
-          </p:nvSpPr>
-          <p:spPr>
-            <a:xfrm>
-              <a:off x="3607074" y="5465754"/>
-              <a:ext cx="45305" cy="45305"/>
+            <p:cNvPr id="147" name="pt147"/>
+            <p:cNvSpPr/>
+            <p:nvPr/>
+          </p:nvSpPr>
+          <p:spPr>
+            <a:xfrm>
+              <a:off x="3619882" y="5523050"/>
+              <a:ext cx="46123" cy="46123"/>
             </a:xfrm>
             <a:prstGeom prst="ellipse">
               <a:avLst/>
@@ -7958,7 +8001,7 @@
                 <a:alpha val="100000"/>
               </a:srgbClr>
             </a:solidFill>
-            <a:ln w="7363" cap="rnd">
+            <a:ln w="8181" cap="rnd">
               <a:solidFill>
                 <a:srgbClr val="009E73">
                   <a:alpha val="100000"/>
@@ -7976,14 +8019,14 @@
         </p:sp>
         <p:sp>
           <p:nvSpPr>
-            <p:cNvPr id="147" name="pt147"/>
-            <p:cNvSpPr/>
-            <p:nvPr/>
-          </p:nvSpPr>
-          <p:spPr>
-            <a:xfrm>
-              <a:off x="4985541" y="5613948"/>
-              <a:ext cx="45305" cy="45305"/>
+            <p:cNvPr id="148" name="pt148"/>
+            <p:cNvSpPr/>
+            <p:nvPr/>
+          </p:nvSpPr>
+          <p:spPr>
+            <a:xfrm>
+              <a:off x="4988128" y="5658752"/>
+              <a:ext cx="46123" cy="46123"/>
             </a:xfrm>
             <a:prstGeom prst="ellipse">
               <a:avLst/>
@@ -7993,7 +8036,7 @@
                 <a:alpha val="100000"/>
               </a:srgbClr>
             </a:solidFill>
-            <a:ln w="7363" cap="rnd">
+            <a:ln w="8181" cap="rnd">
               <a:solidFill>
                 <a:srgbClr val="009E73">
                   <a:alpha val="100000"/>
@@ -8011,14 +8054,14 @@
         </p:sp>
         <p:sp>
           <p:nvSpPr>
-            <p:cNvPr id="148" name="pt148"/>
-            <p:cNvSpPr/>
-            <p:nvPr/>
-          </p:nvSpPr>
-          <p:spPr>
-            <a:xfrm>
-              <a:off x="850141" y="4860707"/>
-              <a:ext cx="45305" cy="45305"/>
+            <p:cNvPr id="149" name="pt149"/>
+            <p:cNvSpPr/>
+            <p:nvPr/>
+          </p:nvSpPr>
+          <p:spPr>
+            <a:xfrm>
+              <a:off x="883390" y="4969012"/>
+              <a:ext cx="46123" cy="46123"/>
             </a:xfrm>
             <a:prstGeom prst="ellipse">
               <a:avLst/>
@@ -8028,7 +8071,7 @@
                 <a:alpha val="100000"/>
               </a:srgbClr>
             </a:solidFill>
-            <a:ln w="7363" cap="rnd">
+            <a:ln w="8181" cap="rnd">
               <a:solidFill>
                 <a:srgbClr val="999999">
                   <a:alpha val="100000"/>
@@ -8046,14 +8089,14 @@
         </p:sp>
         <p:sp>
           <p:nvSpPr>
-            <p:cNvPr id="149" name="pt149"/>
-            <p:cNvSpPr/>
-            <p:nvPr/>
-          </p:nvSpPr>
-          <p:spPr>
-            <a:xfrm>
-              <a:off x="2228607" y="5255478"/>
-              <a:ext cx="45305" cy="45305"/>
+            <p:cNvPr id="150" name="pt150"/>
+            <p:cNvSpPr/>
+            <p:nvPr/>
+          </p:nvSpPr>
+          <p:spPr>
+            <a:xfrm>
+              <a:off x="2251636" y="5330502"/>
+              <a:ext cx="46123" cy="46123"/>
             </a:xfrm>
             <a:prstGeom prst="ellipse">
               <a:avLst/>
@@ -8063,7 +8106,7 @@
                 <a:alpha val="100000"/>
               </a:srgbClr>
             </a:solidFill>
-            <a:ln w="7363" cap="rnd">
+            <a:ln w="8181" cap="rnd">
               <a:solidFill>
                 <a:srgbClr val="999999">
                   <a:alpha val="100000"/>
@@ -8081,14 +8124,14 @@
         </p:sp>
         <p:sp>
           <p:nvSpPr>
-            <p:cNvPr id="150" name="pt150"/>
-            <p:cNvSpPr/>
-            <p:nvPr/>
-          </p:nvSpPr>
-          <p:spPr>
-            <a:xfrm>
-              <a:off x="3607074" y="5337891"/>
-              <a:ext cx="45305" cy="45305"/>
+            <p:cNvPr id="151" name="pt151"/>
+            <p:cNvSpPr/>
+            <p:nvPr/>
+          </p:nvSpPr>
+          <p:spPr>
+            <a:xfrm>
+              <a:off x="3619882" y="5405967"/>
+              <a:ext cx="46123" cy="46123"/>
             </a:xfrm>
             <a:prstGeom prst="ellipse">
               <a:avLst/>
@@ -8098,7 +8141,7 @@
                 <a:alpha val="100000"/>
               </a:srgbClr>
             </a:solidFill>
-            <a:ln w="7363" cap="rnd">
+            <a:ln w="8181" cap="rnd">
               <a:solidFill>
                 <a:srgbClr val="999999">
                   <a:alpha val="100000"/>
@@ -8116,14 +8159,14 @@
         </p:sp>
         <p:sp>
           <p:nvSpPr>
-            <p:cNvPr id="151" name="pt151"/>
-            <p:cNvSpPr/>
-            <p:nvPr/>
-          </p:nvSpPr>
-          <p:spPr>
-            <a:xfrm>
-              <a:off x="4985541" y="5488910"/>
-              <a:ext cx="45305" cy="45305"/>
+            <p:cNvPr id="152" name="pt152"/>
+            <p:cNvSpPr/>
+            <p:nvPr/>
+          </p:nvSpPr>
+          <p:spPr>
+            <a:xfrm>
+              <a:off x="4988128" y="5544254"/>
+              <a:ext cx="46123" cy="46123"/>
             </a:xfrm>
             <a:prstGeom prst="ellipse">
               <a:avLst/>
@@ -8133,7 +8176,7 @@
                 <a:alpha val="100000"/>
               </a:srgbClr>
             </a:solidFill>
-            <a:ln w="7363" cap="rnd">
+            <a:ln w="8181" cap="rnd">
               <a:solidFill>
                 <a:srgbClr val="999999">
                   <a:alpha val="100000"/>
@@ -8151,14 +8194,14 @@
         </p:sp>
         <p:sp>
           <p:nvSpPr>
-            <p:cNvPr id="152" name="pt152"/>
-            <p:cNvSpPr/>
-            <p:nvPr/>
-          </p:nvSpPr>
-          <p:spPr>
-            <a:xfrm>
-              <a:off x="850141" y="5463561"/>
-              <a:ext cx="45305" cy="45305"/>
+            <p:cNvPr id="153" name="pt153"/>
+            <p:cNvSpPr/>
+            <p:nvPr/>
+          </p:nvSpPr>
+          <p:spPr>
+            <a:xfrm>
+              <a:off x="883390" y="5521042"/>
+              <a:ext cx="46123" cy="46123"/>
             </a:xfrm>
             <a:prstGeom prst="ellipse">
               <a:avLst/>
@@ -8168,7 +8211,7 @@
                 <a:alpha val="100000"/>
               </a:srgbClr>
             </a:solidFill>
-            <a:ln w="7363" cap="rnd">
+            <a:ln w="8181" cap="rnd">
               <a:solidFill>
                 <a:srgbClr val="0072B2">
                   <a:alpha val="100000"/>
@@ -8186,14 +8229,14 @@
         </p:sp>
         <p:sp>
           <p:nvSpPr>
-            <p:cNvPr id="153" name="pt153"/>
-            <p:cNvSpPr/>
-            <p:nvPr/>
-          </p:nvSpPr>
-          <p:spPr>
-            <a:xfrm>
-              <a:off x="2228607" y="5764962"/>
-              <a:ext cx="45305" cy="45305"/>
+            <p:cNvPr id="154" name="pt154"/>
+            <p:cNvSpPr/>
+            <p:nvPr/>
+          </p:nvSpPr>
+          <p:spPr>
+            <a:xfrm>
+              <a:off x="2251636" y="5797034"/>
+              <a:ext cx="46123" cy="46123"/>
             </a:xfrm>
             <a:prstGeom prst="ellipse">
               <a:avLst/>
@@ -8203,7 +8246,7 @@
                 <a:alpha val="100000"/>
               </a:srgbClr>
             </a:solidFill>
-            <a:ln w="7363" cap="rnd">
+            <a:ln w="8181" cap="rnd">
               <a:solidFill>
                 <a:srgbClr val="0072B2">
                   <a:alpha val="100000"/>
@@ -8221,14 +8264,14 @@
         </p:sp>
         <p:sp>
           <p:nvSpPr>
-            <p:cNvPr id="154" name="pt154"/>
-            <p:cNvSpPr/>
-            <p:nvPr/>
-          </p:nvSpPr>
-          <p:spPr>
-            <a:xfrm>
-              <a:off x="3607074" y="5750231"/>
-              <a:ext cx="45305" cy="45305"/>
+            <p:cNvPr id="155" name="pt155"/>
+            <p:cNvSpPr/>
+            <p:nvPr/>
+          </p:nvSpPr>
+          <p:spPr>
+            <a:xfrm>
+              <a:off x="3619882" y="5783545"/>
+              <a:ext cx="46123" cy="46123"/>
             </a:xfrm>
             <a:prstGeom prst="ellipse">
               <a:avLst/>
@@ -8238,7 +8281,7 @@
                 <a:alpha val="100000"/>
               </a:srgbClr>
             </a:solidFill>
-            <a:ln w="7363" cap="rnd">
+            <a:ln w="8181" cap="rnd">
               <a:solidFill>
                 <a:srgbClr val="0072B2">
                   <a:alpha val="100000"/>
@@ -8256,14 +8299,14 @@
         </p:sp>
         <p:sp>
           <p:nvSpPr>
-            <p:cNvPr id="155" name="pt155"/>
-            <p:cNvSpPr/>
-            <p:nvPr/>
-          </p:nvSpPr>
-          <p:spPr>
-            <a:xfrm>
-              <a:off x="4985541" y="5904935"/>
-              <a:ext cx="45305" cy="45305"/>
+            <p:cNvPr id="156" name="pt156"/>
+            <p:cNvSpPr/>
+            <p:nvPr/>
+          </p:nvSpPr>
+          <p:spPr>
+            <a:xfrm>
+              <a:off x="4988128" y="5925207"/>
+              <a:ext cx="46123" cy="46123"/>
             </a:xfrm>
             <a:prstGeom prst="ellipse">
               <a:avLst/>
@@ -8273,7 +8316,7 @@
                 <a:alpha val="100000"/>
               </a:srgbClr>
             </a:solidFill>
-            <a:ln w="7363" cap="rnd">
+            <a:ln w="8181" cap="rnd">
               <a:solidFill>
                 <a:srgbClr val="0072B2">
                   <a:alpha val="100000"/>
@@ -8291,21 +8334,21 @@
         </p:sp>
         <p:sp>
           <p:nvSpPr>
-            <p:cNvPr id="156" name="pl156"/>
-            <p:cNvSpPr/>
-            <p:nvPr/>
-          </p:nvSpPr>
-          <p:spPr>
-            <a:xfrm>
-              <a:off x="666023" y="4082389"/>
-              <a:ext cx="0" cy="2451548"/>
+            <p:cNvPr id="157" name="pl157"/>
+            <p:cNvSpPr/>
+            <p:nvPr/>
+          </p:nvSpPr>
+          <p:spPr>
+            <a:xfrm>
+              <a:off x="701215" y="4258627"/>
+              <a:ext cx="0" cy="2244873"/>
             </a:xfrm>
             <a:custGeom>
               <a:avLst/>
               <a:pathLst>
-                <a:path w="0" h="2451548">
+                <a:path w="0" h="2244873">
                   <a:moveTo>
-                    <a:pt x="0" y="2451548"/>
+                    <a:pt x="0" y="2244873"/>
                   </a:moveTo>
                   <a:lnTo>
                     <a:pt x="0" y="0"/>
@@ -8331,14 +8374,14 @@
         </p:sp>
         <p:sp>
           <p:nvSpPr>
-            <p:cNvPr id="157" name="tx157"/>
-            <p:cNvSpPr/>
-            <p:nvPr/>
-          </p:nvSpPr>
-          <p:spPr>
-            <a:xfrm>
-              <a:off x="487953" y="6034167"/>
-              <a:ext cx="126827" cy="65379"/>
+            <p:cNvPr id="158" name="tx158"/>
+            <p:cNvSpPr/>
+            <p:nvPr/>
+          </p:nvSpPr>
+          <p:spPr>
+            <a:xfrm>
+              <a:off x="503004" y="6039403"/>
+              <a:ext cx="141274" cy="72786"/>
             </a:xfrm>
             <a:prstGeom prst="rect">
               <a:avLst/>
@@ -8358,7 +8401,7 @@
                 </a:spcAft>
               </a:pPr>
               <a:r>
-                <a:rPr sz="720" i="0" b="0">
+                <a:rPr sz="800" i="0" b="0">
                   <a:solidFill>
                     <a:srgbClr val="262626">
                       <a:alpha val="100000"/>
@@ -8374,14 +8417,14 @@
         </p:sp>
         <p:sp>
           <p:nvSpPr>
-            <p:cNvPr id="158" name="tx158"/>
-            <p:cNvSpPr/>
-            <p:nvPr/>
-          </p:nvSpPr>
-          <p:spPr>
-            <a:xfrm>
-              <a:off x="487953" y="5437259"/>
-              <a:ext cx="126827" cy="65379"/>
+            <p:cNvPr id="159" name="tx159"/>
+            <p:cNvSpPr/>
+            <p:nvPr/>
+          </p:nvSpPr>
+          <p:spPr>
+            <a:xfrm>
+              <a:off x="503004" y="5492818"/>
+              <a:ext cx="141274" cy="72786"/>
             </a:xfrm>
             <a:prstGeom prst="rect">
               <a:avLst/>
@@ -8401,7 +8444,7 @@
                 </a:spcAft>
               </a:pPr>
               <a:r>
-                <a:rPr sz="720" i="0" b="0">
+                <a:rPr sz="800" i="0" b="0">
                   <a:solidFill>
                     <a:srgbClr val="262626">
                       <a:alpha val="100000"/>
@@ -8417,14 +8460,14 @@
         </p:sp>
         <p:sp>
           <p:nvSpPr>
-            <p:cNvPr id="159" name="tx159"/>
-            <p:cNvSpPr/>
-            <p:nvPr/>
-          </p:nvSpPr>
-          <p:spPr>
-            <a:xfrm>
-              <a:off x="487953" y="4840352"/>
-              <a:ext cx="126827" cy="65379"/>
+            <p:cNvPr id="160" name="tx160"/>
+            <p:cNvSpPr/>
+            <p:nvPr/>
+          </p:nvSpPr>
+          <p:spPr>
+            <a:xfrm>
+              <a:off x="503004" y="4946232"/>
+              <a:ext cx="141274" cy="72786"/>
             </a:xfrm>
             <a:prstGeom prst="rect">
               <a:avLst/>
@@ -8444,7 +8487,7 @@
                 </a:spcAft>
               </a:pPr>
               <a:r>
-                <a:rPr sz="720" i="0" b="0">
+                <a:rPr sz="800" i="0" b="0">
                   <a:solidFill>
                     <a:srgbClr val="262626">
                       <a:alpha val="100000"/>
@@ -8460,14 +8503,14 @@
         </p:sp>
         <p:sp>
           <p:nvSpPr>
-            <p:cNvPr id="160" name="tx160"/>
-            <p:cNvSpPr/>
-            <p:nvPr/>
-          </p:nvSpPr>
-          <p:spPr>
-            <a:xfrm>
-              <a:off x="487953" y="4243444"/>
-              <a:ext cx="126827" cy="65379"/>
+            <p:cNvPr id="161" name="tx161"/>
+            <p:cNvSpPr/>
+            <p:nvPr/>
+          </p:nvSpPr>
+          <p:spPr>
+            <a:xfrm>
+              <a:off x="503004" y="4399646"/>
+              <a:ext cx="141274" cy="72786"/>
             </a:xfrm>
             <a:prstGeom prst="rect">
               <a:avLst/>
@@ -8487,7 +8530,7 @@
                 </a:spcAft>
               </a:pPr>
               <a:r>
-                <a:rPr sz="720" i="0" b="0">
+                <a:rPr sz="800" i="0" b="0">
                   <a:solidFill>
                     <a:srgbClr val="262626">
                       <a:alpha val="100000"/>
@@ -8503,24 +8546,24 @@
         </p:sp>
         <p:sp>
           <p:nvSpPr>
-            <p:cNvPr id="161" name="pl161"/>
-            <p:cNvSpPr/>
-            <p:nvPr/>
-          </p:nvSpPr>
-          <p:spPr>
-            <a:xfrm>
-              <a:off x="637555" y="6066856"/>
-              <a:ext cx="28468" cy="0"/>
+            <p:cNvPr id="162" name="pl162"/>
+            <p:cNvSpPr/>
+            <p:nvPr/>
+          </p:nvSpPr>
+          <p:spPr>
+            <a:xfrm>
+              <a:off x="669584" y="6075797"/>
+              <a:ext cx="31631" cy="0"/>
             </a:xfrm>
             <a:custGeom>
               <a:avLst/>
               <a:pathLst>
-                <a:path w="28468" h="0">
+                <a:path w="31631" h="0">
                   <a:moveTo>
                     <a:pt x="0" y="0"/>
                   </a:moveTo>
                   <a:lnTo>
-                    <a:pt x="28468" y="0"/>
+                    <a:pt x="31631" y="0"/>
                   </a:lnTo>
                 </a:path>
               </a:pathLst>
@@ -8543,24 +8586,24 @@
         </p:sp>
         <p:sp>
           <p:nvSpPr>
-            <p:cNvPr id="162" name="pl162"/>
-            <p:cNvSpPr/>
-            <p:nvPr/>
-          </p:nvSpPr>
-          <p:spPr>
-            <a:xfrm>
-              <a:off x="637555" y="5469949"/>
-              <a:ext cx="28468" cy="0"/>
+            <p:cNvPr id="163" name="pl163"/>
+            <p:cNvSpPr/>
+            <p:nvPr/>
+          </p:nvSpPr>
+          <p:spPr>
+            <a:xfrm>
+              <a:off x="669584" y="5529211"/>
+              <a:ext cx="31631" cy="0"/>
             </a:xfrm>
             <a:custGeom>
               <a:avLst/>
               <a:pathLst>
-                <a:path w="28468" h="0">
+                <a:path w="31631" h="0">
                   <a:moveTo>
                     <a:pt x="0" y="0"/>
                   </a:moveTo>
                   <a:lnTo>
-                    <a:pt x="28468" y="0"/>
+                    <a:pt x="31631" y="0"/>
                   </a:lnTo>
                 </a:path>
               </a:pathLst>
@@ -8583,24 +8626,24 @@
         </p:sp>
         <p:sp>
           <p:nvSpPr>
-            <p:cNvPr id="163" name="pl163"/>
-            <p:cNvSpPr/>
-            <p:nvPr/>
-          </p:nvSpPr>
-          <p:spPr>
-            <a:xfrm>
-              <a:off x="637555" y="4873042"/>
-              <a:ext cx="28468" cy="0"/>
+            <p:cNvPr id="164" name="pl164"/>
+            <p:cNvSpPr/>
+            <p:nvPr/>
+          </p:nvSpPr>
+          <p:spPr>
+            <a:xfrm>
+              <a:off x="669584" y="4982625"/>
+              <a:ext cx="31631" cy="0"/>
             </a:xfrm>
             <a:custGeom>
               <a:avLst/>
               <a:pathLst>
-                <a:path w="28468" h="0">
+                <a:path w="31631" h="0">
                   <a:moveTo>
                     <a:pt x="0" y="0"/>
                   </a:moveTo>
                   <a:lnTo>
-                    <a:pt x="28468" y="0"/>
+                    <a:pt x="31631" y="0"/>
                   </a:lnTo>
                 </a:path>
               </a:pathLst>
@@ -8623,24 +8666,24 @@
         </p:sp>
         <p:sp>
           <p:nvSpPr>
-            <p:cNvPr id="164" name="pl164"/>
-            <p:cNvSpPr/>
-            <p:nvPr/>
-          </p:nvSpPr>
-          <p:spPr>
-            <a:xfrm>
-              <a:off x="637555" y="4276134"/>
-              <a:ext cx="28468" cy="0"/>
+            <p:cNvPr id="165" name="pl165"/>
+            <p:cNvSpPr/>
+            <p:nvPr/>
+          </p:nvSpPr>
+          <p:spPr>
+            <a:xfrm>
+              <a:off x="669584" y="4436039"/>
+              <a:ext cx="31631" cy="0"/>
             </a:xfrm>
             <a:custGeom>
               <a:avLst/>
               <a:pathLst>
-                <a:path w="28468" h="0">
+                <a:path w="31631" h="0">
                   <a:moveTo>
                     <a:pt x="0" y="0"/>
                   </a:moveTo>
                   <a:lnTo>
-                    <a:pt x="28468" y="0"/>
+                    <a:pt x="31631" y="0"/>
                   </a:lnTo>
                 </a:path>
               </a:pathLst>
@@ -8663,24 +8706,24 @@
         </p:sp>
         <p:sp>
           <p:nvSpPr>
-            <p:cNvPr id="165" name="pl165"/>
-            <p:cNvSpPr/>
-            <p:nvPr/>
-          </p:nvSpPr>
-          <p:spPr>
-            <a:xfrm>
-              <a:off x="666023" y="6533937"/>
-              <a:ext cx="4548940" cy="0"/>
+            <p:cNvPr id="166" name="pl166"/>
+            <p:cNvSpPr/>
+            <p:nvPr/>
+          </p:nvSpPr>
+          <p:spPr>
+            <a:xfrm>
+              <a:off x="701215" y="6503501"/>
+              <a:ext cx="4515211" cy="0"/>
             </a:xfrm>
             <a:custGeom>
               <a:avLst/>
               <a:pathLst>
-                <a:path w="4548940" h="0">
+                <a:path w="4515211" h="0">
                   <a:moveTo>
                     <a:pt x="0" y="0"/>
                   </a:moveTo>
                   <a:lnTo>
-                    <a:pt x="4548940" y="0"/>
+                    <a:pt x="4515211" y="0"/>
                   </a:lnTo>
                 </a:path>
               </a:pathLst>
@@ -8703,21 +8746,21 @@
         </p:sp>
         <p:sp>
           <p:nvSpPr>
-            <p:cNvPr id="166" name="pl166"/>
-            <p:cNvSpPr/>
-            <p:nvPr/>
-          </p:nvSpPr>
-          <p:spPr>
-            <a:xfrm>
-              <a:off x="872793" y="6533937"/>
-              <a:ext cx="0" cy="28468"/>
+            <p:cNvPr id="167" name="pl167"/>
+            <p:cNvSpPr/>
+            <p:nvPr/>
+          </p:nvSpPr>
+          <p:spPr>
+            <a:xfrm>
+              <a:off x="906452" y="6503501"/>
+              <a:ext cx="0" cy="31631"/>
             </a:xfrm>
             <a:custGeom>
               <a:avLst/>
               <a:pathLst>
-                <a:path w="0" h="28468">
+                <a:path w="0" h="31631">
                   <a:moveTo>
-                    <a:pt x="0" y="28468"/>
+                    <a:pt x="0" y="31631"/>
                   </a:moveTo>
                   <a:lnTo>
                     <a:pt x="0" y="0"/>
@@ -8743,21 +8786,21 @@
         </p:sp>
         <p:sp>
           <p:nvSpPr>
-            <p:cNvPr id="167" name="pl167"/>
-            <p:cNvSpPr/>
-            <p:nvPr/>
-          </p:nvSpPr>
-          <p:spPr>
-            <a:xfrm>
-              <a:off x="2251260" y="6533937"/>
-              <a:ext cx="0" cy="28468"/>
+            <p:cNvPr id="168" name="pl168"/>
+            <p:cNvSpPr/>
+            <p:nvPr/>
+          </p:nvSpPr>
+          <p:spPr>
+            <a:xfrm>
+              <a:off x="2274698" y="6503501"/>
+              <a:ext cx="0" cy="31631"/>
             </a:xfrm>
             <a:custGeom>
               <a:avLst/>
               <a:pathLst>
-                <a:path w="0" h="28468">
+                <a:path w="0" h="31631">
                   <a:moveTo>
-                    <a:pt x="0" y="28468"/>
+                    <a:pt x="0" y="31631"/>
                   </a:moveTo>
                   <a:lnTo>
                     <a:pt x="0" y="0"/>
@@ -8783,21 +8826,21 @@
         </p:sp>
         <p:sp>
           <p:nvSpPr>
-            <p:cNvPr id="168" name="pl168"/>
-            <p:cNvSpPr/>
-            <p:nvPr/>
-          </p:nvSpPr>
-          <p:spPr>
-            <a:xfrm>
-              <a:off x="3629727" y="6533937"/>
-              <a:ext cx="0" cy="28468"/>
+            <p:cNvPr id="169" name="pl169"/>
+            <p:cNvSpPr/>
+            <p:nvPr/>
+          </p:nvSpPr>
+          <p:spPr>
+            <a:xfrm>
+              <a:off x="3642944" y="6503501"/>
+              <a:ext cx="0" cy="31631"/>
             </a:xfrm>
             <a:custGeom>
               <a:avLst/>
               <a:pathLst>
-                <a:path w="0" h="28468">
+                <a:path w="0" h="31631">
                   <a:moveTo>
-                    <a:pt x="0" y="28468"/>
+                    <a:pt x="0" y="31631"/>
                   </a:moveTo>
                   <a:lnTo>
                     <a:pt x="0" y="0"/>
@@ -8823,21 +8866,21 @@
         </p:sp>
         <p:sp>
           <p:nvSpPr>
-            <p:cNvPr id="169" name="pl169"/>
-            <p:cNvSpPr/>
-            <p:nvPr/>
-          </p:nvSpPr>
-          <p:spPr>
-            <a:xfrm>
-              <a:off x="5008194" y="6533937"/>
-              <a:ext cx="0" cy="28468"/>
+            <p:cNvPr id="170" name="pl170"/>
+            <p:cNvSpPr/>
+            <p:nvPr/>
+          </p:nvSpPr>
+          <p:spPr>
+            <a:xfrm>
+              <a:off x="5011190" y="6503501"/>
+              <a:ext cx="0" cy="31631"/>
             </a:xfrm>
             <a:custGeom>
               <a:avLst/>
               <a:pathLst>
-                <a:path w="0" h="28468">
+                <a:path w="0" h="31631">
                   <a:moveTo>
-                    <a:pt x="0" y="28468"/>
+                    <a:pt x="0" y="31631"/>
                   </a:moveTo>
                   <a:lnTo>
                     <a:pt x="0" y="0"/>
@@ -8863,14 +8906,14 @@
         </p:sp>
         <p:sp>
           <p:nvSpPr>
-            <p:cNvPr id="170" name="tx170"/>
-            <p:cNvSpPr/>
-            <p:nvPr/>
-          </p:nvSpPr>
-          <p:spPr>
-            <a:xfrm>
-              <a:off x="847419" y="6585180"/>
-              <a:ext cx="50749" cy="65379"/>
+            <p:cNvPr id="171" name="tx171"/>
+            <p:cNvSpPr/>
+            <p:nvPr/>
+          </p:nvSpPr>
+          <p:spPr>
+            <a:xfrm>
+              <a:off x="878197" y="6560437"/>
+              <a:ext cx="56509" cy="72786"/>
             </a:xfrm>
             <a:prstGeom prst="rect">
               <a:avLst/>
@@ -8890,7 +8933,7 @@
                 </a:spcAft>
               </a:pPr>
               <a:r>
-                <a:rPr sz="720" i="0" b="0">
+                <a:rPr sz="800" i="0" b="0">
                   <a:solidFill>
                     <a:srgbClr val="262626">
                       <a:alpha val="100000"/>
@@ -8906,14 +8949,14 @@
         </p:sp>
         <p:sp>
           <p:nvSpPr>
-            <p:cNvPr id="171" name="tx171"/>
-            <p:cNvSpPr/>
-            <p:nvPr/>
-          </p:nvSpPr>
-          <p:spPr>
-            <a:xfrm>
-              <a:off x="2200511" y="6585180"/>
-              <a:ext cx="101498" cy="65379"/>
+            <p:cNvPr id="172" name="tx172"/>
+            <p:cNvSpPr/>
+            <p:nvPr/>
+          </p:nvSpPr>
+          <p:spPr>
+            <a:xfrm>
+              <a:off x="2218188" y="6560437"/>
+              <a:ext cx="113019" cy="72786"/>
             </a:xfrm>
             <a:prstGeom prst="rect">
               <a:avLst/>
@@ -8933,7 +8976,7 @@
                 </a:spcAft>
               </a:pPr>
               <a:r>
-                <a:rPr sz="720" i="0" b="0">
+                <a:rPr sz="800" i="0" b="0">
                   <a:solidFill>
                     <a:srgbClr val="262626">
                       <a:alpha val="100000"/>
@@ -8949,14 +8992,14 @@
         </p:sp>
         <p:sp>
           <p:nvSpPr>
-            <p:cNvPr id="172" name="tx172"/>
-            <p:cNvSpPr/>
-            <p:nvPr/>
-          </p:nvSpPr>
-          <p:spPr>
-            <a:xfrm>
-              <a:off x="3578978" y="6585180"/>
-              <a:ext cx="101498" cy="65379"/>
+            <p:cNvPr id="173" name="tx173"/>
+            <p:cNvSpPr/>
+            <p:nvPr/>
+          </p:nvSpPr>
+          <p:spPr>
+            <a:xfrm>
+              <a:off x="3586434" y="6560437"/>
+              <a:ext cx="113019" cy="72786"/>
             </a:xfrm>
             <a:prstGeom prst="rect">
               <a:avLst/>
@@ -8976,7 +9019,7 @@
                 </a:spcAft>
               </a:pPr>
               <a:r>
-                <a:rPr sz="720" i="0" b="0">
+                <a:rPr sz="800" i="0" b="0">
                   <a:solidFill>
                     <a:srgbClr val="262626">
                       <a:alpha val="100000"/>
@@ -8992,14 +9035,14 @@
         </p:sp>
         <p:sp>
           <p:nvSpPr>
-            <p:cNvPr id="173" name="tx173"/>
-            <p:cNvSpPr/>
-            <p:nvPr/>
-          </p:nvSpPr>
-          <p:spPr>
-            <a:xfrm>
-              <a:off x="4957444" y="6585180"/>
-              <a:ext cx="101498" cy="65379"/>
+            <p:cNvPr id="174" name="tx174"/>
+            <p:cNvSpPr/>
+            <p:nvPr/>
+          </p:nvSpPr>
+          <p:spPr>
+            <a:xfrm>
+              <a:off x="4954680" y="6560437"/>
+              <a:ext cx="113019" cy="72786"/>
             </a:xfrm>
             <a:prstGeom prst="rect">
               <a:avLst/>
@@ -9019,7 +9062,7 @@
                 </a:spcAft>
               </a:pPr>
               <a:r>
-                <a:rPr sz="720" i="0" b="0">
+                <a:rPr sz="800" i="0" b="0">
                   <a:solidFill>
                     <a:srgbClr val="262626">
                       <a:alpha val="100000"/>
@@ -9035,14 +9078,14 @@
         </p:sp>
         <p:sp>
           <p:nvSpPr>
-            <p:cNvPr id="174" name="tx174"/>
-            <p:cNvSpPr/>
-            <p:nvPr/>
-          </p:nvSpPr>
-          <p:spPr>
-            <a:xfrm>
-              <a:off x="2127546" y="6698139"/>
-              <a:ext cx="1625894" cy="81838"/>
+            <p:cNvPr id="175" name="tx175"/>
+            <p:cNvSpPr/>
+            <p:nvPr/>
+          </p:nvSpPr>
+          <p:spPr>
+            <a:xfrm>
+              <a:off x="2054936" y="6686252"/>
+              <a:ext cx="1807768" cy="90982"/>
             </a:xfrm>
             <a:prstGeom prst="rect">
               <a:avLst/>
@@ -9062,7 +9105,7 @@
                 </a:spcAft>
               </a:pPr>
               <a:r>
-                <a:rPr sz="900" i="0" b="0">
+                <a:rPr sz="1000" i="0" b="0">
                   <a:solidFill>
                     <a:srgbClr val="0D0D0D">
                       <a:alpha val="100000"/>
@@ -9078,14 +9121,14 @@
         </p:sp>
         <p:sp>
           <p:nvSpPr>
-            <p:cNvPr id="175" name="tx175"/>
+            <p:cNvPr id="176" name="tx176"/>
             <p:cNvSpPr/>
             <p:nvPr/>
           </p:nvSpPr>
           <p:spPr>
             <a:xfrm rot="-5400000">
-              <a:off x="-157963" y="5267244"/>
-              <a:ext cx="1105143" cy="81838"/>
+              <a:off x="-215250" y="5335573"/>
+              <a:ext cx="1228862" cy="90982"/>
             </a:xfrm>
             <a:prstGeom prst="rect">
               <a:avLst/>
@@ -9105,7 +9148,7 @@
                 </a:spcAft>
               </a:pPr>
               <a:r>
-                <a:rPr sz="900" i="0" b="0">
+                <a:rPr sz="1000" i="0" b="0">
                   <a:solidFill>
                     <a:srgbClr val="0D0D0D">
                       <a:alpha val="100000"/>
@@ -9121,14 +9164,14 @@
         </p:sp>
         <p:sp>
           <p:nvSpPr>
-            <p:cNvPr id="176" name="tx176"/>
-            <p:cNvSpPr/>
-            <p:nvPr/>
-          </p:nvSpPr>
-          <p:spPr>
-            <a:xfrm>
-              <a:off x="666023" y="3704223"/>
-              <a:ext cx="3172510" cy="74432"/>
+            <p:cNvPr id="177" name="tx177"/>
+            <p:cNvSpPr/>
+            <p:nvPr/>
+          </p:nvSpPr>
+          <p:spPr>
+            <a:xfrm>
+              <a:off x="701215" y="3708629"/>
+              <a:ext cx="3561770" cy="83576"/>
             </a:xfrm>
             <a:prstGeom prst="rect">
               <a:avLst/>
@@ -9148,7 +9191,7 @@
                 </a:spcAft>
               </a:pPr>
               <a:r>
-                <a:rPr sz="819" i="0" b="0">
+                <a:rPr sz="919" i="0" b="0">
                   <a:solidFill>
                     <a:srgbClr val="4D4D4D">
                       <a:alpha val="100000"/>
@@ -9164,14 +9207,14 @@
         </p:sp>
         <p:sp>
           <p:nvSpPr>
-            <p:cNvPr id="177" name="tx177"/>
-            <p:cNvSpPr/>
-            <p:nvPr/>
-          </p:nvSpPr>
-          <p:spPr>
-            <a:xfrm>
-              <a:off x="666023" y="3529604"/>
-              <a:ext cx="2314712" cy="90982"/>
+            <p:cNvPr id="178" name="tx178"/>
+            <p:cNvSpPr/>
+            <p:nvPr/>
+          </p:nvSpPr>
+          <p:spPr>
+            <a:xfrm>
+              <a:off x="701215" y="3515888"/>
+              <a:ext cx="2546329" cy="100035"/>
             </a:xfrm>
             <a:prstGeom prst="rect">
               <a:avLst/>
@@ -9191,7 +9234,7 @@
                 </a:spcAft>
               </a:pPr>
               <a:r>
-                <a:rPr sz="1000" i="0" b="1">
+                <a:rPr sz="1100" i="0" b="1">
                   <a:solidFill>
                     <a:srgbClr val="000000">
                       <a:alpha val="100000"/>
@@ -9207,14 +9250,14 @@
         </p:sp>
         <p:sp>
           <p:nvSpPr>
-            <p:cNvPr id="178" name="tx178"/>
-            <p:cNvSpPr/>
-            <p:nvPr/>
-          </p:nvSpPr>
-          <p:spPr>
-            <a:xfrm>
-              <a:off x="335613" y="3524129"/>
-              <a:ext cx="84764" cy="109179"/>
+            <p:cNvPr id="179" name="tx179"/>
+            <p:cNvSpPr/>
+            <p:nvPr/>
+          </p:nvSpPr>
+          <p:spPr>
+            <a:xfrm>
+              <a:off x="332100" y="3506092"/>
+              <a:ext cx="91805" cy="118231"/>
             </a:xfrm>
             <a:prstGeom prst="rect">
               <a:avLst/>
@@ -9234,7 +9277,7 @@
                 </a:spcAft>
               </a:pPr>
               <a:r>
-                <a:rPr sz="1200" i="0" b="1">
+                <a:rPr sz="1300" i="0" b="1">
                   <a:solidFill>
                     <a:srgbClr val="000000">
                       <a:alpha val="100000"/>
@@ -9250,14 +9293,14 @@
         </p:sp>
         <p:sp>
           <p:nvSpPr>
-            <p:cNvPr id="179" name="rc179"/>
-            <p:cNvSpPr/>
-            <p:nvPr/>
-          </p:nvSpPr>
-          <p:spPr>
-            <a:xfrm>
-              <a:off x="5704410" y="4082389"/>
-              <a:ext cx="4548940" cy="2451548"/>
+            <p:cNvPr id="180" name="rc180"/>
+            <p:cNvSpPr/>
+            <p:nvPr/>
+          </p:nvSpPr>
+          <p:spPr>
+            <a:xfrm>
+              <a:off x="5738138" y="4258627"/>
+              <a:ext cx="4515211" cy="2244873"/>
             </a:xfrm>
             <a:prstGeom prst="rect">
               <a:avLst/>
@@ -9276,27 +9319,27 @@
         </p:sp>
         <p:sp>
           <p:nvSpPr>
-            <p:cNvPr id="180" name="pl180"/>
-            <p:cNvSpPr/>
-            <p:nvPr/>
-          </p:nvSpPr>
-          <p:spPr>
-            <a:xfrm>
-              <a:off x="5704410" y="6422503"/>
-              <a:ext cx="4548940" cy="0"/>
+            <p:cNvPr id="181" name="pl181"/>
+            <p:cNvSpPr/>
+            <p:nvPr/>
+          </p:nvSpPr>
+          <p:spPr>
+            <a:xfrm>
+              <a:off x="5738138" y="6401461"/>
+              <a:ext cx="4515211" cy="0"/>
             </a:xfrm>
             <a:custGeom>
               <a:avLst/>
               <a:pathLst>
-                <a:path w="4548940" h="0">
+                <a:path w="4515211" h="0">
                   <a:moveTo>
                     <a:pt x="0" y="0"/>
                   </a:moveTo>
                   <a:lnTo>
-                    <a:pt x="4548940" y="0"/>
-                  </a:lnTo>
-                  <a:lnTo>
-                    <a:pt x="4548940" y="0"/>
+                    <a:pt x="4515211" y="0"/>
+                  </a:lnTo>
+                  <a:lnTo>
+                    <a:pt x="4515211" y="0"/>
                   </a:lnTo>
                 </a:path>
               </a:pathLst>
@@ -9319,27 +9362,27 @@
         </p:sp>
         <p:sp>
           <p:nvSpPr>
-            <p:cNvPr id="181" name="pl181"/>
-            <p:cNvSpPr/>
-            <p:nvPr/>
-          </p:nvSpPr>
-          <p:spPr>
-            <a:xfrm>
-              <a:off x="5704410" y="5954189"/>
-              <a:ext cx="4548940" cy="0"/>
+            <p:cNvPr id="182" name="pl182"/>
+            <p:cNvSpPr/>
+            <p:nvPr/>
+          </p:nvSpPr>
+          <p:spPr>
+            <a:xfrm>
+              <a:off x="5738138" y="5972628"/>
+              <a:ext cx="4515211" cy="0"/>
             </a:xfrm>
             <a:custGeom>
               <a:avLst/>
               <a:pathLst>
-                <a:path w="4548940" h="0">
+                <a:path w="4515211" h="0">
                   <a:moveTo>
                     <a:pt x="0" y="0"/>
                   </a:moveTo>
                   <a:lnTo>
-                    <a:pt x="4548940" y="0"/>
-                  </a:lnTo>
-                  <a:lnTo>
-                    <a:pt x="4548940" y="0"/>
+                    <a:pt x="4515211" y="0"/>
+                  </a:lnTo>
+                  <a:lnTo>
+                    <a:pt x="4515211" y="0"/>
                   </a:lnTo>
                 </a:path>
               </a:pathLst>
@@ -9362,27 +9405,27 @@
         </p:sp>
         <p:sp>
           <p:nvSpPr>
-            <p:cNvPr id="182" name="pl182"/>
-            <p:cNvSpPr/>
-            <p:nvPr/>
-          </p:nvSpPr>
-          <p:spPr>
-            <a:xfrm>
-              <a:off x="5704410" y="5485875"/>
-              <a:ext cx="4548940" cy="0"/>
+            <p:cNvPr id="183" name="pl183"/>
+            <p:cNvSpPr/>
+            <p:nvPr/>
+          </p:nvSpPr>
+          <p:spPr>
+            <a:xfrm>
+              <a:off x="5738138" y="5543795"/>
+              <a:ext cx="4515211" cy="0"/>
             </a:xfrm>
             <a:custGeom>
               <a:avLst/>
               <a:pathLst>
-                <a:path w="4548940" h="0">
+                <a:path w="4515211" h="0">
                   <a:moveTo>
                     <a:pt x="0" y="0"/>
                   </a:moveTo>
                   <a:lnTo>
-                    <a:pt x="4548940" y="0"/>
-                  </a:lnTo>
-                  <a:lnTo>
-                    <a:pt x="4548940" y="0"/>
+                    <a:pt x="4515211" y="0"/>
+                  </a:lnTo>
+                  <a:lnTo>
+                    <a:pt x="4515211" y="0"/>
                   </a:lnTo>
                 </a:path>
               </a:pathLst>
@@ -9405,27 +9448,27 @@
         </p:sp>
         <p:sp>
           <p:nvSpPr>
-            <p:cNvPr id="183" name="pl183"/>
-            <p:cNvSpPr/>
-            <p:nvPr/>
-          </p:nvSpPr>
-          <p:spPr>
-            <a:xfrm>
-              <a:off x="5704410" y="5017561"/>
-              <a:ext cx="4548940" cy="0"/>
+            <p:cNvPr id="184" name="pl184"/>
+            <p:cNvSpPr/>
+            <p:nvPr/>
+          </p:nvSpPr>
+          <p:spPr>
+            <a:xfrm>
+              <a:off x="5738138" y="5114961"/>
+              <a:ext cx="4515211" cy="0"/>
             </a:xfrm>
             <a:custGeom>
               <a:avLst/>
               <a:pathLst>
-                <a:path w="4548940" h="0">
+                <a:path w="4515211" h="0">
                   <a:moveTo>
                     <a:pt x="0" y="0"/>
                   </a:moveTo>
                   <a:lnTo>
-                    <a:pt x="4548940" y="0"/>
-                  </a:lnTo>
-                  <a:lnTo>
-                    <a:pt x="4548940" y="0"/>
+                    <a:pt x="4515211" y="0"/>
+                  </a:lnTo>
+                  <a:lnTo>
+                    <a:pt x="4515211" y="0"/>
                   </a:lnTo>
                 </a:path>
               </a:pathLst>
@@ -9448,27 +9491,27 @@
         </p:sp>
         <p:sp>
           <p:nvSpPr>
-            <p:cNvPr id="184" name="pl184"/>
-            <p:cNvSpPr/>
-            <p:nvPr/>
-          </p:nvSpPr>
-          <p:spPr>
-            <a:xfrm>
-              <a:off x="5704410" y="4549247"/>
-              <a:ext cx="4548940" cy="0"/>
+            <p:cNvPr id="185" name="pl185"/>
+            <p:cNvSpPr/>
+            <p:nvPr/>
+          </p:nvSpPr>
+          <p:spPr>
+            <a:xfrm>
+              <a:off x="5738138" y="4686128"/>
+              <a:ext cx="4515211" cy="0"/>
             </a:xfrm>
             <a:custGeom>
               <a:avLst/>
               <a:pathLst>
-                <a:path w="4548940" h="0">
+                <a:path w="4515211" h="0">
                   <a:moveTo>
                     <a:pt x="0" y="0"/>
                   </a:moveTo>
                   <a:lnTo>
-                    <a:pt x="4548940" y="0"/>
-                  </a:lnTo>
-                  <a:lnTo>
-                    <a:pt x="4548940" y="0"/>
+                    <a:pt x="4515211" y="0"/>
+                  </a:lnTo>
+                  <a:lnTo>
+                    <a:pt x="4515211" y="0"/>
                   </a:lnTo>
                 </a:path>
               </a:pathLst>
@@ -9491,30 +9534,30 @@
         </p:sp>
         <p:sp>
           <p:nvSpPr>
-            <p:cNvPr id="185" name="pl185"/>
-            <p:cNvSpPr/>
-            <p:nvPr/>
-          </p:nvSpPr>
-          <p:spPr>
-            <a:xfrm>
-              <a:off x="5911180" y="4193823"/>
-              <a:ext cx="4135400" cy="2228680"/>
+            <p:cNvPr id="186" name="pl186"/>
+            <p:cNvSpPr/>
+            <p:nvPr/>
+          </p:nvSpPr>
+          <p:spPr>
+            <a:xfrm>
+              <a:off x="5943375" y="4360667"/>
+              <a:ext cx="4104737" cy="2040794"/>
             </a:xfrm>
             <a:custGeom>
               <a:avLst/>
               <a:pathLst>
-                <a:path w="4135400" h="2228680">
+                <a:path w="4104737" h="2040794">
                   <a:moveTo>
                     <a:pt x="0" y="0"/>
                   </a:moveTo>
                   <a:lnTo>
-                    <a:pt x="1378466" y="645714"/>
-                  </a:lnTo>
-                  <a:lnTo>
-                    <a:pt x="2756933" y="2022351"/>
-                  </a:lnTo>
-                  <a:lnTo>
-                    <a:pt x="4135400" y="2228680"/>
+                    <a:pt x="1368245" y="591278"/>
+                  </a:lnTo>
+                  <a:lnTo>
+                    <a:pt x="2736491" y="1851859"/>
+                  </a:lnTo>
+                  <a:lnTo>
+                    <a:pt x="4104737" y="2040794"/>
                   </a:lnTo>
                 </a:path>
               </a:pathLst>
@@ -9537,30 +9580,30 @@
         </p:sp>
         <p:sp>
           <p:nvSpPr>
-            <p:cNvPr id="186" name="pl186"/>
-            <p:cNvSpPr/>
-            <p:nvPr/>
-          </p:nvSpPr>
-          <p:spPr>
-            <a:xfrm>
-              <a:off x="5911180" y="4520258"/>
-              <a:ext cx="4135400" cy="1902245"/>
+            <p:cNvPr id="187" name="pl187"/>
+            <p:cNvSpPr/>
+            <p:nvPr/>
+          </p:nvSpPr>
+          <p:spPr>
+            <a:xfrm>
+              <a:off x="5943375" y="4659582"/>
+              <a:ext cx="4104737" cy="1741878"/>
             </a:xfrm>
             <a:custGeom>
               <a:avLst/>
               <a:pathLst>
-                <a:path w="4135400" h="1902245">
+                <a:path w="4104737" h="1741878">
                   <a:moveTo>
                     <a:pt x="0" y="0"/>
                   </a:moveTo>
                   <a:lnTo>
-                    <a:pt x="1378466" y="256757"/>
-                  </a:lnTo>
-                  <a:lnTo>
-                    <a:pt x="2756933" y="1380060"/>
-                  </a:lnTo>
-                  <a:lnTo>
-                    <a:pt x="4135400" y="1902245"/>
+                    <a:pt x="1368245" y="235111"/>
+                  </a:lnTo>
+                  <a:lnTo>
+                    <a:pt x="2736491" y="1263716"/>
+                  </a:lnTo>
+                  <a:lnTo>
+                    <a:pt x="4104737" y="1741878"/>
                   </a:lnTo>
                 </a:path>
               </a:pathLst>
@@ -9583,30 +9626,30 @@
         </p:sp>
         <p:sp>
           <p:nvSpPr>
-            <p:cNvPr id="187" name="pl187"/>
-            <p:cNvSpPr/>
-            <p:nvPr/>
-          </p:nvSpPr>
-          <p:spPr>
-            <a:xfrm>
-              <a:off x="5911180" y="4295748"/>
-              <a:ext cx="4135400" cy="2126754"/>
+            <p:cNvPr id="188" name="pl188"/>
+            <p:cNvSpPr/>
+            <p:nvPr/>
+          </p:nvSpPr>
+          <p:spPr>
+            <a:xfrm>
+              <a:off x="5943375" y="4454000"/>
+              <a:ext cx="4104737" cy="1947461"/>
             </a:xfrm>
             <a:custGeom>
               <a:avLst/>
               <a:pathLst>
-                <a:path w="4135400" h="2126754">
+                <a:path w="4104737" h="1947461">
                   <a:moveTo>
                     <a:pt x="0" y="0"/>
                   </a:moveTo>
                   <a:lnTo>
-                    <a:pt x="1378466" y="522828"/>
-                  </a:lnTo>
-                  <a:lnTo>
-                    <a:pt x="2756933" y="1656983"/>
-                  </a:lnTo>
-                  <a:lnTo>
-                    <a:pt x="4135400" y="2126754"/>
+                    <a:pt x="1368245" y="478751"/>
+                  </a:lnTo>
+                  <a:lnTo>
+                    <a:pt x="2736491" y="1517292"/>
+                  </a:lnTo>
+                  <a:lnTo>
+                    <a:pt x="4104737" y="1947461"/>
                   </a:lnTo>
                 </a:path>
               </a:pathLst>
@@ -9629,14 +9672,14 @@
         </p:sp>
         <p:sp>
           <p:nvSpPr>
-            <p:cNvPr id="188" name="pt188"/>
-            <p:cNvSpPr/>
-            <p:nvPr/>
-          </p:nvSpPr>
-          <p:spPr>
-            <a:xfrm>
-              <a:off x="5888527" y="4273096"/>
-              <a:ext cx="45305" cy="45305"/>
+            <p:cNvPr id="189" name="pt189"/>
+            <p:cNvSpPr/>
+            <p:nvPr/>
+          </p:nvSpPr>
+          <p:spPr>
+            <a:xfrm>
+              <a:off x="5920314" y="4430938"/>
+              <a:ext cx="46123" cy="46123"/>
             </a:xfrm>
             <a:prstGeom prst="ellipse">
               <a:avLst/>
@@ -9646,7 +9689,7 @@
                 <a:alpha val="100000"/>
               </a:srgbClr>
             </a:solidFill>
-            <a:ln w="7363" cap="rnd">
+            <a:ln w="8181" cap="rnd">
               <a:solidFill>
                 <a:srgbClr val="009E73">
                   <a:alpha val="100000"/>
@@ -9664,14 +9707,14 @@
         </p:sp>
         <p:sp>
           <p:nvSpPr>
-            <p:cNvPr id="189" name="pt189"/>
-            <p:cNvSpPr/>
-            <p:nvPr/>
-          </p:nvSpPr>
-          <p:spPr>
-            <a:xfrm>
-              <a:off x="7266994" y="4795924"/>
-              <a:ext cx="45305" cy="45305"/>
+            <p:cNvPr id="190" name="pt190"/>
+            <p:cNvSpPr/>
+            <p:nvPr/>
+          </p:nvSpPr>
+          <p:spPr>
+            <a:xfrm>
+              <a:off x="7288559" y="4909690"/>
+              <a:ext cx="46123" cy="46123"/>
             </a:xfrm>
             <a:prstGeom prst="ellipse">
               <a:avLst/>
@@ -9681,7 +9724,7 @@
                 <a:alpha val="100000"/>
               </a:srgbClr>
             </a:solidFill>
-            <a:ln w="7363" cap="rnd">
+            <a:ln w="8181" cap="rnd">
               <a:solidFill>
                 <a:srgbClr val="009E73">
                   <a:alpha val="100000"/>
@@ -9699,14 +9742,14 @@
         </p:sp>
         <p:sp>
           <p:nvSpPr>
-            <p:cNvPr id="190" name="pt190"/>
-            <p:cNvSpPr/>
-            <p:nvPr/>
-          </p:nvSpPr>
-          <p:spPr>
-            <a:xfrm>
-              <a:off x="8645461" y="5930079"/>
-              <a:ext cx="45305" cy="45305"/>
+            <p:cNvPr id="191" name="pt191"/>
+            <p:cNvSpPr/>
+            <p:nvPr/>
+          </p:nvSpPr>
+          <p:spPr>
+            <a:xfrm>
+              <a:off x="8656805" y="5948231"/>
+              <a:ext cx="46123" cy="46123"/>
             </a:xfrm>
             <a:prstGeom prst="ellipse">
               <a:avLst/>
@@ -9716,7 +9759,7 @@
                 <a:alpha val="100000"/>
               </a:srgbClr>
             </a:solidFill>
-            <a:ln w="7363" cap="rnd">
+            <a:ln w="8181" cap="rnd">
               <a:solidFill>
                 <a:srgbClr val="009E73">
                   <a:alpha val="100000"/>
@@ -9734,14 +9777,14 @@
         </p:sp>
         <p:sp>
           <p:nvSpPr>
-            <p:cNvPr id="191" name="pt191"/>
-            <p:cNvSpPr/>
-            <p:nvPr/>
-          </p:nvSpPr>
-          <p:spPr>
-            <a:xfrm>
-              <a:off x="10023927" y="6399851"/>
-              <a:ext cx="45305" cy="45305"/>
+            <p:cNvPr id="192" name="pt192"/>
+            <p:cNvSpPr/>
+            <p:nvPr/>
+          </p:nvSpPr>
+          <p:spPr>
+            <a:xfrm>
+              <a:off x="10025051" y="6378399"/>
+              <a:ext cx="46123" cy="46123"/>
             </a:xfrm>
             <a:prstGeom prst="ellipse">
               <a:avLst/>
@@ -9751,7 +9794,7 @@
                 <a:alpha val="100000"/>
               </a:srgbClr>
             </a:solidFill>
-            <a:ln w="7363" cap="rnd">
+            <a:ln w="8181" cap="rnd">
               <a:solidFill>
                 <a:srgbClr val="009E73">
                   <a:alpha val="100000"/>
@@ -9769,14 +9812,14 @@
         </p:sp>
         <p:sp>
           <p:nvSpPr>
-            <p:cNvPr id="192" name="pt192"/>
-            <p:cNvSpPr/>
-            <p:nvPr/>
-          </p:nvSpPr>
-          <p:spPr>
-            <a:xfrm>
-              <a:off x="5888527" y="4497605"/>
-              <a:ext cx="45305" cy="45305"/>
+            <p:cNvPr id="193" name="pt193"/>
+            <p:cNvSpPr/>
+            <p:nvPr/>
+          </p:nvSpPr>
+          <p:spPr>
+            <a:xfrm>
+              <a:off x="5920314" y="4636521"/>
+              <a:ext cx="46123" cy="46123"/>
             </a:xfrm>
             <a:prstGeom prst="ellipse">
               <a:avLst/>
@@ -9786,7 +9829,7 @@
                 <a:alpha val="100000"/>
               </a:srgbClr>
             </a:solidFill>
-            <a:ln w="7363" cap="rnd">
+            <a:ln w="8181" cap="rnd">
               <a:solidFill>
                 <a:srgbClr val="999999">
                   <a:alpha val="100000"/>
@@ -9804,14 +9847,14 @@
         </p:sp>
         <p:sp>
           <p:nvSpPr>
-            <p:cNvPr id="193" name="pt193"/>
-            <p:cNvSpPr/>
-            <p:nvPr/>
-          </p:nvSpPr>
-          <p:spPr>
-            <a:xfrm>
-              <a:off x="7266994" y="4754362"/>
-              <a:ext cx="45305" cy="45305"/>
+            <p:cNvPr id="194" name="pt194"/>
+            <p:cNvSpPr/>
+            <p:nvPr/>
+          </p:nvSpPr>
+          <p:spPr>
+            <a:xfrm>
+              <a:off x="7288559" y="4871632"/>
+              <a:ext cx="46123" cy="46123"/>
             </a:xfrm>
             <a:prstGeom prst="ellipse">
               <a:avLst/>
@@ -9821,7 +9864,7 @@
                 <a:alpha val="100000"/>
               </a:srgbClr>
             </a:solidFill>
-            <a:ln w="7363" cap="rnd">
+            <a:ln w="8181" cap="rnd">
               <a:solidFill>
                 <a:srgbClr val="999999">
                   <a:alpha val="100000"/>
@@ -9839,14 +9882,14 @@
         </p:sp>
         <p:sp>
           <p:nvSpPr>
-            <p:cNvPr id="194" name="pt194"/>
-            <p:cNvSpPr/>
-            <p:nvPr/>
-          </p:nvSpPr>
-          <p:spPr>
-            <a:xfrm>
-              <a:off x="8645461" y="5877666"/>
-              <a:ext cx="45305" cy="45305"/>
+            <p:cNvPr id="195" name="pt195"/>
+            <p:cNvSpPr/>
+            <p:nvPr/>
+          </p:nvSpPr>
+          <p:spPr>
+            <a:xfrm>
+              <a:off x="8656805" y="5900237"/>
+              <a:ext cx="46123" cy="46123"/>
             </a:xfrm>
             <a:prstGeom prst="ellipse">
               <a:avLst/>
@@ -9856,7 +9899,7 @@
                 <a:alpha val="100000"/>
               </a:srgbClr>
             </a:solidFill>
-            <a:ln w="7363" cap="rnd">
+            <a:ln w="8181" cap="rnd">
               <a:solidFill>
                 <a:srgbClr val="999999">
                   <a:alpha val="100000"/>
@@ -9874,14 +9917,14 @@
         </p:sp>
         <p:sp>
           <p:nvSpPr>
-            <p:cNvPr id="195" name="pt195"/>
-            <p:cNvSpPr/>
-            <p:nvPr/>
-          </p:nvSpPr>
-          <p:spPr>
-            <a:xfrm>
-              <a:off x="10023927" y="6399851"/>
-              <a:ext cx="45305" cy="45305"/>
+            <p:cNvPr id="196" name="pt196"/>
+            <p:cNvSpPr/>
+            <p:nvPr/>
+          </p:nvSpPr>
+          <p:spPr>
+            <a:xfrm>
+              <a:off x="10025051" y="6378399"/>
+              <a:ext cx="46123" cy="46123"/>
             </a:xfrm>
             <a:prstGeom prst="ellipse">
               <a:avLst/>
@@ -9891,7 +9934,7 @@
                 <a:alpha val="100000"/>
               </a:srgbClr>
             </a:solidFill>
-            <a:ln w="7363" cap="rnd">
+            <a:ln w="8181" cap="rnd">
               <a:solidFill>
                 <a:srgbClr val="999999">
                   <a:alpha val="100000"/>
@@ -9909,14 +9952,14 @@
         </p:sp>
         <p:sp>
           <p:nvSpPr>
-            <p:cNvPr id="196" name="pt196"/>
-            <p:cNvSpPr/>
-            <p:nvPr/>
-          </p:nvSpPr>
-          <p:spPr>
-            <a:xfrm>
-              <a:off x="5888527" y="4171170"/>
-              <a:ext cx="45305" cy="45305"/>
+            <p:cNvPr id="197" name="pt197"/>
+            <p:cNvSpPr/>
+            <p:nvPr/>
+          </p:nvSpPr>
+          <p:spPr>
+            <a:xfrm>
+              <a:off x="5920314" y="4337605"/>
+              <a:ext cx="46123" cy="46123"/>
             </a:xfrm>
             <a:prstGeom prst="ellipse">
               <a:avLst/>
@@ -9926,7 +9969,7 @@
                 <a:alpha val="100000"/>
               </a:srgbClr>
             </a:solidFill>
-            <a:ln w="7363" cap="rnd">
+            <a:ln w="8181" cap="rnd">
               <a:solidFill>
                 <a:srgbClr val="0072B2">
                   <a:alpha val="100000"/>
@@ -9944,14 +9987,14 @@
         </p:sp>
         <p:sp>
           <p:nvSpPr>
-            <p:cNvPr id="197" name="pt197"/>
-            <p:cNvSpPr/>
-            <p:nvPr/>
-          </p:nvSpPr>
-          <p:spPr>
-            <a:xfrm>
-              <a:off x="7266994" y="4816885"/>
-              <a:ext cx="45305" cy="45305"/>
+            <p:cNvPr id="198" name="pt198"/>
+            <p:cNvSpPr/>
+            <p:nvPr/>
+          </p:nvSpPr>
+          <p:spPr>
+            <a:xfrm>
+              <a:off x="7288559" y="4928883"/>
+              <a:ext cx="46123" cy="46123"/>
             </a:xfrm>
             <a:prstGeom prst="ellipse">
               <a:avLst/>
@@ -9961,7 +10004,7 @@
                 <a:alpha val="100000"/>
               </a:srgbClr>
             </a:solidFill>
-            <a:ln w="7363" cap="rnd">
+            <a:ln w="8181" cap="rnd">
               <a:solidFill>
                 <a:srgbClr val="0072B2">
                   <a:alpha val="100000"/>
@@ -9979,14 +10022,14 @@
         </p:sp>
         <p:sp>
           <p:nvSpPr>
-            <p:cNvPr id="198" name="pt198"/>
-            <p:cNvSpPr/>
-            <p:nvPr/>
-          </p:nvSpPr>
-          <p:spPr>
-            <a:xfrm>
-              <a:off x="8645461" y="6193522"/>
-              <a:ext cx="45305" cy="45305"/>
+            <p:cNvPr id="199" name="pt199"/>
+            <p:cNvSpPr/>
+            <p:nvPr/>
+          </p:nvSpPr>
+          <p:spPr>
+            <a:xfrm>
+              <a:off x="8656805" y="6189465"/>
+              <a:ext cx="46123" cy="46123"/>
             </a:xfrm>
             <a:prstGeom prst="ellipse">
               <a:avLst/>
@@ -9996,7 +10039,7 @@
                 <a:alpha val="100000"/>
               </a:srgbClr>
             </a:solidFill>
-            <a:ln w="7363" cap="rnd">
+            <a:ln w="8181" cap="rnd">
               <a:solidFill>
                 <a:srgbClr val="0072B2">
                   <a:alpha val="100000"/>
@@ -10014,14 +10057,14 @@
         </p:sp>
         <p:sp>
           <p:nvSpPr>
-            <p:cNvPr id="199" name="pt199"/>
-            <p:cNvSpPr/>
-            <p:nvPr/>
-          </p:nvSpPr>
-          <p:spPr>
-            <a:xfrm>
-              <a:off x="10023927" y="6399851"/>
-              <a:ext cx="45305" cy="45305"/>
+            <p:cNvPr id="200" name="pt200"/>
+            <p:cNvSpPr/>
+            <p:nvPr/>
+          </p:nvSpPr>
+          <p:spPr>
+            <a:xfrm>
+              <a:off x="10025051" y="6378399"/>
+              <a:ext cx="46123" cy="46123"/>
             </a:xfrm>
             <a:prstGeom prst="ellipse">
               <a:avLst/>
@@ -10031,7 +10074,7 @@
                 <a:alpha val="100000"/>
               </a:srgbClr>
             </a:solidFill>
-            <a:ln w="7363" cap="rnd">
+            <a:ln w="8181" cap="rnd">
               <a:solidFill>
                 <a:srgbClr val="0072B2">
                   <a:alpha val="100000"/>
@@ -10049,13 +10092,13 @@
         </p:sp>
         <p:sp>
           <p:nvSpPr>
-            <p:cNvPr id="200" name="pt200"/>
-            <p:cNvSpPr/>
-            <p:nvPr/>
-          </p:nvSpPr>
-          <p:spPr>
-            <a:xfrm>
-              <a:off x="9993308" y="6369231"/>
+            <p:cNvPr id="201" name="pt201"/>
+            <p:cNvSpPr/>
+            <p:nvPr/>
+          </p:nvSpPr>
+          <p:spPr>
+            <a:xfrm>
+              <a:off x="9994841" y="6348189"/>
               <a:ext cx="106544" cy="106544"/>
             </a:xfrm>
             <a:prstGeom prst="ellipse">
@@ -10079,13 +10122,13 @@
         </p:sp>
         <p:sp>
           <p:nvSpPr>
-            <p:cNvPr id="201" name="pt201"/>
-            <p:cNvSpPr/>
-            <p:nvPr/>
-          </p:nvSpPr>
-          <p:spPr>
-            <a:xfrm>
-              <a:off x="9993308" y="6369231"/>
+            <p:cNvPr id="202" name="pt202"/>
+            <p:cNvSpPr/>
+            <p:nvPr/>
+          </p:nvSpPr>
+          <p:spPr>
+            <a:xfrm>
+              <a:off x="9994841" y="6348189"/>
               <a:ext cx="106544" cy="106544"/>
             </a:xfrm>
             <a:prstGeom prst="ellipse">
@@ -10109,13 +10152,13 @@
         </p:sp>
         <p:sp>
           <p:nvSpPr>
-            <p:cNvPr id="202" name="pt202"/>
-            <p:cNvSpPr/>
-            <p:nvPr/>
-          </p:nvSpPr>
-          <p:spPr>
-            <a:xfrm>
-              <a:off x="9993308" y="6369231"/>
+            <p:cNvPr id="203" name="pt203"/>
+            <p:cNvSpPr/>
+            <p:nvPr/>
+          </p:nvSpPr>
+          <p:spPr>
+            <a:xfrm>
+              <a:off x="9994841" y="6348189"/>
               <a:ext cx="106544" cy="106544"/>
             </a:xfrm>
             <a:prstGeom prst="ellipse">
@@ -10139,21 +10182,21 @@
         </p:sp>
         <p:sp>
           <p:nvSpPr>
-            <p:cNvPr id="203" name="pl203"/>
-            <p:cNvSpPr/>
-            <p:nvPr/>
-          </p:nvSpPr>
-          <p:spPr>
-            <a:xfrm>
-              <a:off x="5704410" y="4082389"/>
-              <a:ext cx="0" cy="2451548"/>
+            <p:cNvPr id="204" name="pl204"/>
+            <p:cNvSpPr/>
+            <p:nvPr/>
+          </p:nvSpPr>
+          <p:spPr>
+            <a:xfrm>
+              <a:off x="5738138" y="4258627"/>
+              <a:ext cx="0" cy="2244873"/>
             </a:xfrm>
             <a:custGeom>
               <a:avLst/>
               <a:pathLst>
-                <a:path w="0" h="2451548">
+                <a:path w="0" h="2244873">
                   <a:moveTo>
-                    <a:pt x="0" y="2451548"/>
+                    <a:pt x="0" y="2244873"/>
                   </a:moveTo>
                   <a:lnTo>
                     <a:pt x="0" y="0"/>
@@ -10179,14 +10222,14 @@
         </p:sp>
         <p:sp>
           <p:nvSpPr>
-            <p:cNvPr id="204" name="tx204"/>
-            <p:cNvSpPr/>
-            <p:nvPr/>
-          </p:nvSpPr>
-          <p:spPr>
-            <a:xfrm>
-              <a:off x="5602418" y="6389814"/>
-              <a:ext cx="50749" cy="65379"/>
+            <p:cNvPr id="205" name="tx205"/>
+            <p:cNvSpPr/>
+            <p:nvPr/>
+          </p:nvSpPr>
+          <p:spPr>
+            <a:xfrm>
+              <a:off x="5624692" y="6365068"/>
+              <a:ext cx="56509" cy="72786"/>
             </a:xfrm>
             <a:prstGeom prst="rect">
               <a:avLst/>
@@ -10206,7 +10249,7 @@
                 </a:spcAft>
               </a:pPr>
               <a:r>
-                <a:rPr sz="720" i="0" b="0">
+                <a:rPr sz="800" i="0" b="0">
                   <a:solidFill>
                     <a:srgbClr val="262626">
                       <a:alpha val="100000"/>
@@ -10222,14 +10265,14 @@
         </p:sp>
         <p:sp>
           <p:nvSpPr>
-            <p:cNvPr id="205" name="tx205"/>
-            <p:cNvSpPr/>
-            <p:nvPr/>
-          </p:nvSpPr>
-          <p:spPr>
-            <a:xfrm>
-              <a:off x="5602418" y="5921500"/>
-              <a:ext cx="50749" cy="65379"/>
+            <p:cNvPr id="206" name="tx206"/>
+            <p:cNvSpPr/>
+            <p:nvPr/>
+          </p:nvSpPr>
+          <p:spPr>
+            <a:xfrm>
+              <a:off x="5624692" y="5936235"/>
+              <a:ext cx="56509" cy="72786"/>
             </a:xfrm>
             <a:prstGeom prst="rect">
               <a:avLst/>
@@ -10249,7 +10292,7 @@
                 </a:spcAft>
               </a:pPr>
               <a:r>
-                <a:rPr sz="720" i="0" b="0">
+                <a:rPr sz="800" i="0" b="0">
                   <a:solidFill>
                     <a:srgbClr val="262626">
                       <a:alpha val="100000"/>
@@ -10265,14 +10308,14 @@
         </p:sp>
         <p:sp>
           <p:nvSpPr>
-            <p:cNvPr id="206" name="tx206"/>
-            <p:cNvSpPr/>
-            <p:nvPr/>
-          </p:nvSpPr>
-          <p:spPr>
-            <a:xfrm>
-              <a:off x="5551669" y="5453186"/>
-              <a:ext cx="101498" cy="65379"/>
+            <p:cNvPr id="207" name="tx207"/>
+            <p:cNvSpPr/>
+            <p:nvPr/>
+          </p:nvSpPr>
+          <p:spPr>
+            <a:xfrm>
+              <a:off x="5568182" y="5507401"/>
+              <a:ext cx="113019" cy="72786"/>
             </a:xfrm>
             <a:prstGeom prst="rect">
               <a:avLst/>
@@ -10292,7 +10335,7 @@
                 </a:spcAft>
               </a:pPr>
               <a:r>
-                <a:rPr sz="720" i="0" b="0">
+                <a:rPr sz="800" i="0" b="0">
                   <a:solidFill>
                     <a:srgbClr val="262626">
                       <a:alpha val="100000"/>
@@ -10308,14 +10351,14 @@
         </p:sp>
         <p:sp>
           <p:nvSpPr>
-            <p:cNvPr id="207" name="tx207"/>
-            <p:cNvSpPr/>
-            <p:nvPr/>
-          </p:nvSpPr>
-          <p:spPr>
-            <a:xfrm>
-              <a:off x="5551669" y="4984872"/>
-              <a:ext cx="101498" cy="65379"/>
+            <p:cNvPr id="208" name="tx208"/>
+            <p:cNvSpPr/>
+            <p:nvPr/>
+          </p:nvSpPr>
+          <p:spPr>
+            <a:xfrm>
+              <a:off x="5568182" y="5078568"/>
+              <a:ext cx="113019" cy="72786"/>
             </a:xfrm>
             <a:prstGeom prst="rect">
               <a:avLst/>
@@ -10335,7 +10378,7 @@
                 </a:spcAft>
               </a:pPr>
               <a:r>
-                <a:rPr sz="720" i="0" b="0">
+                <a:rPr sz="800" i="0" b="0">
                   <a:solidFill>
                     <a:srgbClr val="262626">
                       <a:alpha val="100000"/>
@@ -10351,14 +10394,14 @@
         </p:sp>
         <p:sp>
           <p:nvSpPr>
-            <p:cNvPr id="208" name="tx208"/>
-            <p:cNvSpPr/>
-            <p:nvPr/>
-          </p:nvSpPr>
-          <p:spPr>
-            <a:xfrm>
-              <a:off x="5551669" y="4516557"/>
-              <a:ext cx="101498" cy="65379"/>
+            <p:cNvPr id="209" name="tx209"/>
+            <p:cNvSpPr/>
+            <p:nvPr/>
+          </p:nvSpPr>
+          <p:spPr>
+            <a:xfrm>
+              <a:off x="5568182" y="4649735"/>
+              <a:ext cx="113019" cy="72786"/>
             </a:xfrm>
             <a:prstGeom prst="rect">
               <a:avLst/>
@@ -10378,7 +10421,7 @@
                 </a:spcAft>
               </a:pPr>
               <a:r>
-                <a:rPr sz="720" i="0" b="0">
+                <a:rPr sz="800" i="0" b="0">
                   <a:solidFill>
                     <a:srgbClr val="262626">
                       <a:alpha val="100000"/>
@@ -10394,24 +10437,24 @@
         </p:sp>
         <p:sp>
           <p:nvSpPr>
-            <p:cNvPr id="209" name="pl209"/>
-            <p:cNvSpPr/>
-            <p:nvPr/>
-          </p:nvSpPr>
-          <p:spPr>
-            <a:xfrm>
-              <a:off x="5675942" y="6422503"/>
-              <a:ext cx="28468" cy="0"/>
+            <p:cNvPr id="210" name="pl210"/>
+            <p:cNvSpPr/>
+            <p:nvPr/>
+          </p:nvSpPr>
+          <p:spPr>
+            <a:xfrm>
+              <a:off x="5706507" y="6401461"/>
+              <a:ext cx="31631" cy="0"/>
             </a:xfrm>
             <a:custGeom>
               <a:avLst/>
               <a:pathLst>
-                <a:path w="28468" h="0">
+                <a:path w="31631" h="0">
                   <a:moveTo>
                     <a:pt x="0" y="0"/>
                   </a:moveTo>
                   <a:lnTo>
-                    <a:pt x="28468" y="0"/>
+                    <a:pt x="31631" y="0"/>
                   </a:lnTo>
                 </a:path>
               </a:pathLst>
@@ -10434,24 +10477,24 @@
         </p:sp>
         <p:sp>
           <p:nvSpPr>
-            <p:cNvPr id="210" name="pl210"/>
-            <p:cNvSpPr/>
-            <p:nvPr/>
-          </p:nvSpPr>
-          <p:spPr>
-            <a:xfrm>
-              <a:off x="5675942" y="5954189"/>
-              <a:ext cx="28468" cy="0"/>
+            <p:cNvPr id="211" name="pl211"/>
+            <p:cNvSpPr/>
+            <p:nvPr/>
+          </p:nvSpPr>
+          <p:spPr>
+            <a:xfrm>
+              <a:off x="5706507" y="5972628"/>
+              <a:ext cx="31631" cy="0"/>
             </a:xfrm>
             <a:custGeom>
               <a:avLst/>
               <a:pathLst>
-                <a:path w="28468" h="0">
+                <a:path w="31631" h="0">
                   <a:moveTo>
                     <a:pt x="0" y="0"/>
                   </a:moveTo>
                   <a:lnTo>
-                    <a:pt x="28468" y="0"/>
+                    <a:pt x="31631" y="0"/>
                   </a:lnTo>
                 </a:path>
               </a:pathLst>
@@ -10474,24 +10517,24 @@
         </p:sp>
         <p:sp>
           <p:nvSpPr>
-            <p:cNvPr id="211" name="pl211"/>
-            <p:cNvSpPr/>
-            <p:nvPr/>
-          </p:nvSpPr>
-          <p:spPr>
-            <a:xfrm>
-              <a:off x="5675942" y="5485875"/>
-              <a:ext cx="28468" cy="0"/>
+            <p:cNvPr id="212" name="pl212"/>
+            <p:cNvSpPr/>
+            <p:nvPr/>
+          </p:nvSpPr>
+          <p:spPr>
+            <a:xfrm>
+              <a:off x="5706507" y="5543795"/>
+              <a:ext cx="31631" cy="0"/>
             </a:xfrm>
             <a:custGeom>
               <a:avLst/>
               <a:pathLst>
-                <a:path w="28468" h="0">
+                <a:path w="31631" h="0">
                   <a:moveTo>
                     <a:pt x="0" y="0"/>
                   </a:moveTo>
                   <a:lnTo>
-                    <a:pt x="28468" y="0"/>
+                    <a:pt x="31631" y="0"/>
                   </a:lnTo>
                 </a:path>
               </a:pathLst>
@@ -10514,24 +10557,24 @@
         </p:sp>
         <p:sp>
           <p:nvSpPr>
-            <p:cNvPr id="212" name="pl212"/>
-            <p:cNvSpPr/>
-            <p:nvPr/>
-          </p:nvSpPr>
-          <p:spPr>
-            <a:xfrm>
-              <a:off x="5675942" y="5017561"/>
-              <a:ext cx="28468" cy="0"/>
+            <p:cNvPr id="213" name="pl213"/>
+            <p:cNvSpPr/>
+            <p:nvPr/>
+          </p:nvSpPr>
+          <p:spPr>
+            <a:xfrm>
+              <a:off x="5706507" y="5114961"/>
+              <a:ext cx="31631" cy="0"/>
             </a:xfrm>
             <a:custGeom>
               <a:avLst/>
               <a:pathLst>
-                <a:path w="28468" h="0">
+                <a:path w="31631" h="0">
                   <a:moveTo>
                     <a:pt x="0" y="0"/>
                   </a:moveTo>
                   <a:lnTo>
-                    <a:pt x="28468" y="0"/>
+                    <a:pt x="31631" y="0"/>
                   </a:lnTo>
                 </a:path>
               </a:pathLst>
@@ -10554,24 +10597,24 @@
         </p:sp>
         <p:sp>
           <p:nvSpPr>
-            <p:cNvPr id="213" name="pl213"/>
-            <p:cNvSpPr/>
-            <p:nvPr/>
-          </p:nvSpPr>
-          <p:spPr>
-            <a:xfrm>
-              <a:off x="5675942" y="4549247"/>
-              <a:ext cx="28468" cy="0"/>
+            <p:cNvPr id="214" name="pl214"/>
+            <p:cNvSpPr/>
+            <p:nvPr/>
+          </p:nvSpPr>
+          <p:spPr>
+            <a:xfrm>
+              <a:off x="5706507" y="4686128"/>
+              <a:ext cx="31631" cy="0"/>
             </a:xfrm>
             <a:custGeom>
               <a:avLst/>
               <a:pathLst>
-                <a:path w="28468" h="0">
+                <a:path w="31631" h="0">
                   <a:moveTo>
                     <a:pt x="0" y="0"/>
                   </a:moveTo>
                   <a:lnTo>
-                    <a:pt x="28468" y="0"/>
+                    <a:pt x="31631" y="0"/>
                   </a:lnTo>
                 </a:path>
               </a:pathLst>
@@ -10594,24 +10637,24 @@
         </p:sp>
         <p:sp>
           <p:nvSpPr>
-            <p:cNvPr id="214" name="pl214"/>
-            <p:cNvSpPr/>
-            <p:nvPr/>
-          </p:nvSpPr>
-          <p:spPr>
-            <a:xfrm>
-              <a:off x="5704410" y="6533937"/>
-              <a:ext cx="4548940" cy="0"/>
+            <p:cNvPr id="215" name="pl215"/>
+            <p:cNvSpPr/>
+            <p:nvPr/>
+          </p:nvSpPr>
+          <p:spPr>
+            <a:xfrm>
+              <a:off x="5738138" y="6503501"/>
+              <a:ext cx="4515211" cy="0"/>
             </a:xfrm>
             <a:custGeom>
               <a:avLst/>
               <a:pathLst>
-                <a:path w="4548940" h="0">
+                <a:path w="4515211" h="0">
                   <a:moveTo>
                     <a:pt x="0" y="0"/>
                   </a:moveTo>
                   <a:lnTo>
-                    <a:pt x="4548940" y="0"/>
+                    <a:pt x="4515211" y="0"/>
                   </a:lnTo>
                 </a:path>
               </a:pathLst>
@@ -10634,21 +10677,21 @@
         </p:sp>
         <p:sp>
           <p:nvSpPr>
-            <p:cNvPr id="215" name="pl215"/>
-            <p:cNvSpPr/>
-            <p:nvPr/>
-          </p:nvSpPr>
-          <p:spPr>
-            <a:xfrm>
-              <a:off x="5911180" y="6533937"/>
-              <a:ext cx="0" cy="28468"/>
+            <p:cNvPr id="216" name="pl216"/>
+            <p:cNvSpPr/>
+            <p:nvPr/>
+          </p:nvSpPr>
+          <p:spPr>
+            <a:xfrm>
+              <a:off x="5943375" y="6503501"/>
+              <a:ext cx="0" cy="31631"/>
             </a:xfrm>
             <a:custGeom>
               <a:avLst/>
               <a:pathLst>
-                <a:path w="0" h="28468">
+                <a:path w="0" h="31631">
                   <a:moveTo>
-                    <a:pt x="0" y="28468"/>
+                    <a:pt x="0" y="31631"/>
                   </a:moveTo>
                   <a:lnTo>
                     <a:pt x="0" y="0"/>
@@ -10674,21 +10717,21 @@
         </p:sp>
         <p:sp>
           <p:nvSpPr>
-            <p:cNvPr id="216" name="pl216"/>
-            <p:cNvSpPr/>
-            <p:nvPr/>
-          </p:nvSpPr>
-          <p:spPr>
-            <a:xfrm>
-              <a:off x="7289647" y="6533937"/>
-              <a:ext cx="0" cy="28468"/>
+            <p:cNvPr id="217" name="pl217"/>
+            <p:cNvSpPr/>
+            <p:nvPr/>
+          </p:nvSpPr>
+          <p:spPr>
+            <a:xfrm>
+              <a:off x="7311621" y="6503501"/>
+              <a:ext cx="0" cy="31631"/>
             </a:xfrm>
             <a:custGeom>
               <a:avLst/>
               <a:pathLst>
-                <a:path w="0" h="28468">
+                <a:path w="0" h="31631">
                   <a:moveTo>
-                    <a:pt x="0" y="28468"/>
+                    <a:pt x="0" y="31631"/>
                   </a:moveTo>
                   <a:lnTo>
                     <a:pt x="0" y="0"/>
@@ -10714,21 +10757,21 @@
         </p:sp>
         <p:sp>
           <p:nvSpPr>
-            <p:cNvPr id="217" name="pl217"/>
-            <p:cNvSpPr/>
-            <p:nvPr/>
-          </p:nvSpPr>
-          <p:spPr>
-            <a:xfrm>
-              <a:off x="8668113" y="6533937"/>
-              <a:ext cx="0" cy="28468"/>
+            <p:cNvPr id="218" name="pl218"/>
+            <p:cNvSpPr/>
+            <p:nvPr/>
+          </p:nvSpPr>
+          <p:spPr>
+            <a:xfrm>
+              <a:off x="8679867" y="6503501"/>
+              <a:ext cx="0" cy="31631"/>
             </a:xfrm>
             <a:custGeom>
               <a:avLst/>
               <a:pathLst>
-                <a:path w="0" h="28468">
+                <a:path w="0" h="31631">
                   <a:moveTo>
-                    <a:pt x="0" y="28468"/>
+                    <a:pt x="0" y="31631"/>
                   </a:moveTo>
                   <a:lnTo>
                     <a:pt x="0" y="0"/>
@@ -10754,21 +10797,21 @@
         </p:sp>
         <p:sp>
           <p:nvSpPr>
-            <p:cNvPr id="218" name="pl218"/>
-            <p:cNvSpPr/>
-            <p:nvPr/>
-          </p:nvSpPr>
-          <p:spPr>
-            <a:xfrm>
-              <a:off x="10046580" y="6533937"/>
-              <a:ext cx="0" cy="28468"/>
+            <p:cNvPr id="219" name="pl219"/>
+            <p:cNvSpPr/>
+            <p:nvPr/>
+          </p:nvSpPr>
+          <p:spPr>
+            <a:xfrm>
+              <a:off x="10048113" y="6503501"/>
+              <a:ext cx="0" cy="31631"/>
             </a:xfrm>
             <a:custGeom>
               <a:avLst/>
               <a:pathLst>
-                <a:path w="0" h="28468">
+                <a:path w="0" h="31631">
                   <a:moveTo>
-                    <a:pt x="0" y="28468"/>
+                    <a:pt x="0" y="31631"/>
                   </a:moveTo>
                   <a:lnTo>
                     <a:pt x="0" y="0"/>
@@ -10794,14 +10837,14 @@
         </p:sp>
         <p:sp>
           <p:nvSpPr>
-            <p:cNvPr id="219" name="tx219"/>
-            <p:cNvSpPr/>
-            <p:nvPr/>
-          </p:nvSpPr>
-          <p:spPr>
-            <a:xfrm>
-              <a:off x="5885805" y="6585180"/>
-              <a:ext cx="50749" cy="65379"/>
+            <p:cNvPr id="220" name="tx220"/>
+            <p:cNvSpPr/>
+            <p:nvPr/>
+          </p:nvSpPr>
+          <p:spPr>
+            <a:xfrm>
+              <a:off x="5915120" y="6560437"/>
+              <a:ext cx="56509" cy="72786"/>
             </a:xfrm>
             <a:prstGeom prst="rect">
               <a:avLst/>
@@ -10821,7 +10864,7 @@
                 </a:spcAft>
               </a:pPr>
               <a:r>
-                <a:rPr sz="720" i="0" b="0">
+                <a:rPr sz="800" i="0" b="0">
                   <a:solidFill>
                     <a:srgbClr val="262626">
                       <a:alpha val="100000"/>
@@ -10837,14 +10880,14 @@
         </p:sp>
         <p:sp>
           <p:nvSpPr>
-            <p:cNvPr id="220" name="tx220"/>
-            <p:cNvSpPr/>
-            <p:nvPr/>
-          </p:nvSpPr>
-          <p:spPr>
-            <a:xfrm>
-              <a:off x="7238897" y="6585180"/>
-              <a:ext cx="101498" cy="65379"/>
+            <p:cNvPr id="221" name="tx221"/>
+            <p:cNvSpPr/>
+            <p:nvPr/>
+          </p:nvSpPr>
+          <p:spPr>
+            <a:xfrm>
+              <a:off x="7255111" y="6560437"/>
+              <a:ext cx="113019" cy="72786"/>
             </a:xfrm>
             <a:prstGeom prst="rect">
               <a:avLst/>
@@ -10864,7 +10907,7 @@
                 </a:spcAft>
               </a:pPr>
               <a:r>
-                <a:rPr sz="720" i="0" b="0">
+                <a:rPr sz="800" i="0" b="0">
                   <a:solidFill>
                     <a:srgbClr val="262626">
                       <a:alpha val="100000"/>
@@ -10880,14 +10923,14 @@
         </p:sp>
         <p:sp>
           <p:nvSpPr>
-            <p:cNvPr id="221" name="tx221"/>
-            <p:cNvSpPr/>
-            <p:nvPr/>
-          </p:nvSpPr>
-          <p:spPr>
-            <a:xfrm>
-              <a:off x="8617364" y="6585180"/>
-              <a:ext cx="101498" cy="65379"/>
+            <p:cNvPr id="222" name="tx222"/>
+            <p:cNvSpPr/>
+            <p:nvPr/>
+          </p:nvSpPr>
+          <p:spPr>
+            <a:xfrm>
+              <a:off x="8623357" y="6560437"/>
+              <a:ext cx="113019" cy="72786"/>
             </a:xfrm>
             <a:prstGeom prst="rect">
               <a:avLst/>
@@ -10907,7 +10950,7 @@
                 </a:spcAft>
               </a:pPr>
               <a:r>
-                <a:rPr sz="720" i="0" b="0">
+                <a:rPr sz="800" i="0" b="0">
                   <a:solidFill>
                     <a:srgbClr val="262626">
                       <a:alpha val="100000"/>
@@ -10923,14 +10966,14 @@
         </p:sp>
         <p:sp>
           <p:nvSpPr>
-            <p:cNvPr id="222" name="tx222"/>
-            <p:cNvSpPr/>
-            <p:nvPr/>
-          </p:nvSpPr>
-          <p:spPr>
-            <a:xfrm>
-              <a:off x="9995831" y="6585180"/>
-              <a:ext cx="101498" cy="65379"/>
+            <p:cNvPr id="223" name="tx223"/>
+            <p:cNvSpPr/>
+            <p:nvPr/>
+          </p:nvSpPr>
+          <p:spPr>
+            <a:xfrm>
+              <a:off x="9991603" y="6560437"/>
+              <a:ext cx="113019" cy="72786"/>
             </a:xfrm>
             <a:prstGeom prst="rect">
               <a:avLst/>
@@ -10950,7 +10993,7 @@
                 </a:spcAft>
               </a:pPr>
               <a:r>
-                <a:rPr sz="720" i="0" b="0">
+                <a:rPr sz="800" i="0" b="0">
                   <a:solidFill>
                     <a:srgbClr val="262626">
                       <a:alpha val="100000"/>
@@ -10966,14 +11009,14 @@
         </p:sp>
         <p:sp>
           <p:nvSpPr>
-            <p:cNvPr id="223" name="tx223"/>
-            <p:cNvSpPr/>
-            <p:nvPr/>
-          </p:nvSpPr>
-          <p:spPr>
-            <a:xfrm>
-              <a:off x="7165933" y="6698139"/>
-              <a:ext cx="1625894" cy="81838"/>
+            <p:cNvPr id="224" name="tx224"/>
+            <p:cNvSpPr/>
+            <p:nvPr/>
+          </p:nvSpPr>
+          <p:spPr>
+            <a:xfrm>
+              <a:off x="7091860" y="6686252"/>
+              <a:ext cx="1807768" cy="90982"/>
             </a:xfrm>
             <a:prstGeom prst="rect">
               <a:avLst/>
@@ -10993,7 +11036,7 @@
                 </a:spcAft>
               </a:pPr>
               <a:r>
-                <a:rPr sz="900" i="0" b="0">
+                <a:rPr sz="1000" i="0" b="0">
                   <a:solidFill>
                     <a:srgbClr val="0D0D0D">
                       <a:alpha val="100000"/>
@@ -11009,14 +11052,14 @@
         </p:sp>
         <p:sp>
           <p:nvSpPr>
-            <p:cNvPr id="224" name="tx224"/>
+            <p:cNvPr id="225" name="tx225"/>
             <p:cNvSpPr/>
             <p:nvPr/>
           </p:nvSpPr>
           <p:spPr>
             <a:xfrm rot="-5400000">
-              <a:off x="4886641" y="5267244"/>
-              <a:ext cx="1143365" cy="81838"/>
+              <a:off x="4828805" y="5335573"/>
+              <a:ext cx="1271107" cy="90982"/>
             </a:xfrm>
             <a:prstGeom prst="rect">
               <a:avLst/>
@@ -11036,7 +11079,7 @@
                 </a:spcAft>
               </a:pPr>
               <a:r>
-                <a:rPr sz="900" i="0" b="0">
+                <a:rPr sz="1000" i="0" b="0">
                   <a:solidFill>
                     <a:srgbClr val="0D0D0D">
                       <a:alpha val="100000"/>
@@ -11052,14 +11095,14 @@
         </p:sp>
         <p:sp>
           <p:nvSpPr>
-            <p:cNvPr id="225" name="tx225"/>
-            <p:cNvSpPr/>
-            <p:nvPr/>
-          </p:nvSpPr>
-          <p:spPr>
-            <a:xfrm>
-              <a:off x="5704410" y="3704223"/>
-              <a:ext cx="3718499" cy="74432"/>
+            <p:cNvPr id="226" name="tx226"/>
+            <p:cNvSpPr/>
+            <p:nvPr/>
+          </p:nvSpPr>
+          <p:spPr>
+            <a:xfrm>
+              <a:off x="5738138" y="3708629"/>
+              <a:ext cx="4174144" cy="83576"/>
             </a:xfrm>
             <a:prstGeom prst="rect">
               <a:avLst/>
@@ -11079,7 +11122,7 @@
                 </a:spcAft>
               </a:pPr>
               <a:r>
-                <a:rPr sz="819" i="0" b="0">
+                <a:rPr sz="919" i="0" b="0">
                   <a:solidFill>
                     <a:srgbClr val="4D4D4D">
                       <a:alpha val="100000"/>
@@ -11095,14 +11138,14 @@
         </p:sp>
         <p:sp>
           <p:nvSpPr>
-            <p:cNvPr id="226" name="tx226"/>
-            <p:cNvSpPr/>
-            <p:nvPr/>
-          </p:nvSpPr>
-          <p:spPr>
-            <a:xfrm>
-              <a:off x="5704410" y="3816695"/>
-              <a:ext cx="5210525" cy="74432"/>
+            <p:cNvPr id="227" name="tx227"/>
+            <p:cNvSpPr/>
+            <p:nvPr/>
+          </p:nvSpPr>
+          <p:spPr>
+            <a:xfrm>
+              <a:off x="5738138" y="3834817"/>
+              <a:ext cx="3936400" cy="83576"/>
             </a:xfrm>
             <a:prstGeom prst="rect">
               <a:avLst/>
@@ -11122,7 +11165,7 @@
                 </a:spcAft>
               </a:pPr>
               <a:r>
-                <a:rPr sz="819" i="0" b="0">
+                <a:rPr sz="919" i="0" b="0">
                   <a:solidFill>
                     <a:srgbClr val="4D4D4D">
                       <a:alpha val="100000"/>
@@ -11131,21 +11174,21 @@
                   <a:latin typeface="Arial"/>
                   <a:cs typeface="Arial"/>
                 </a:rPr>
-                <a:t>A finer grid (3-23 yr, Extended Data Table 2) places the optimum at 18-20 yr and shows AIC rising again by 23 yr, </a:t>
+                <a:t>A finer grid (3-23 yr, Extended Data Table 2) places the optimum at 18-20 yr </a:t>
               </a:r>
             </a:p>
           </p:txBody>
         </p:sp>
         <p:sp>
           <p:nvSpPr>
-            <p:cNvPr id="227" name="tx227"/>
-            <p:cNvSpPr/>
-            <p:nvPr/>
-          </p:nvSpPr>
-          <p:spPr>
-            <a:xfrm>
-              <a:off x="5704410" y="3929166"/>
-              <a:ext cx="3039648" cy="74432"/>
+            <p:cNvPr id="228" name="tx228"/>
+            <p:cNvSpPr/>
+            <p:nvPr/>
+          </p:nvSpPr>
+          <p:spPr>
+            <a:xfrm>
+              <a:off x="5738138" y="3961004"/>
+              <a:ext cx="1914022" cy="83576"/>
             </a:xfrm>
             <a:prstGeom prst="rect">
               <a:avLst/>
@@ -11165,7 +11208,50 @@
                 </a:spcAft>
               </a:pPr>
               <a:r>
-                <a:rPr sz="819" i="0" b="0">
+                <a:rPr sz="919" i="0" b="0">
+                  <a:solidFill>
+                    <a:srgbClr val="4D4D4D">
+                      <a:alpha val="100000"/>
+                    </a:srgbClr>
+                  </a:solidFill>
+                  <a:latin typeface="Arial"/>
+                  <a:cs typeface="Arial"/>
+                </a:rPr>
+                <a:t>and shows AIC rising again by 23 yr, </a:t>
+              </a:r>
+            </a:p>
+          </p:txBody>
+        </p:sp>
+        <p:sp>
+          <p:nvSpPr>
+            <p:cNvPr id="229" name="tx229"/>
+            <p:cNvSpPr/>
+            <p:nvPr/>
+          </p:nvSpPr>
+          <p:spPr>
+            <a:xfrm>
+              <a:off x="5738138" y="4087191"/>
+              <a:ext cx="3413272" cy="83576"/>
+            </a:xfrm>
+            <a:prstGeom prst="rect">
+              <a:avLst/>
+            </a:prstGeom>
+            <a:noFill/>
+          </p:spPr>
+          <p:txBody>
+            <a:bodyPr lIns="0" rIns="0" tIns="0" bIns="0" anchorCtr="1" anchor="ctr" wrap="none"/>
+            <a:lstStyle/>
+            <a:p>
+              <a:pPr algn="l" marL="0" marR="0" indent="0">
+                <a:spcBef>
+                  <a:spcPts val="0"/>
+                </a:spcBef>
+                <a:spcAft>
+                  <a:spcPts val="0"/>
+                </a:spcAft>
+              </a:pPr>
+              <a:r>
+                <a:rPr sz="919" i="0" b="0">
                   <a:solidFill>
                     <a:srgbClr val="4D4D4D">
                       <a:alpha val="100000"/>
@@ -11181,14 +11267,14 @@
         </p:sp>
         <p:sp>
           <p:nvSpPr>
-            <p:cNvPr id="228" name="tx228"/>
-            <p:cNvSpPr/>
-            <p:nvPr/>
-          </p:nvSpPr>
-          <p:spPr>
-            <a:xfrm>
-              <a:off x="5704410" y="3529604"/>
-              <a:ext cx="2570652" cy="90982"/>
+            <p:cNvPr id="230" name="tx230"/>
+            <p:cNvSpPr/>
+            <p:nvPr/>
+          </p:nvSpPr>
+          <p:spPr>
+            <a:xfrm>
+              <a:off x="5738138" y="3515888"/>
+              <a:ext cx="2827782" cy="100035"/>
             </a:xfrm>
             <a:prstGeom prst="rect">
               <a:avLst/>
@@ -11208,7 +11294,7 @@
                 </a:spcAft>
               </a:pPr>
               <a:r>
-                <a:rPr sz="1000" i="0" b="1">
+                <a:rPr sz="1100" i="0" b="1">
                   <a:solidFill>
                     <a:srgbClr val="000000">
                       <a:alpha val="100000"/>
@@ -11224,14 +11310,14 @@
         </p:sp>
         <p:sp>
           <p:nvSpPr>
-            <p:cNvPr id="229" name="tx229"/>
-            <p:cNvSpPr/>
-            <p:nvPr/>
-          </p:nvSpPr>
-          <p:spPr>
-            <a:xfrm>
-              <a:off x="5395041" y="3524129"/>
-              <a:ext cx="93085" cy="109179"/>
+            <p:cNvPr id="231" name="tx231"/>
+            <p:cNvSpPr/>
+            <p:nvPr/>
+          </p:nvSpPr>
+          <p:spPr>
+            <a:xfrm>
+              <a:off x="5392611" y="3506092"/>
+              <a:ext cx="100858" cy="118231"/>
             </a:xfrm>
             <a:prstGeom prst="rect">
               <a:avLst/>
@@ -11251,7 +11337,7 @@
                 </a:spcAft>
               </a:pPr>
               <a:r>
-                <a:rPr sz="1200" i="0" b="1">
+                <a:rPr sz="1300" i="0" b="1">
                   <a:solidFill>
                     <a:srgbClr val="000000">
                       <a:alpha val="100000"/>

--- a/figures/Fig7_window_baseline_sensitivity_v2.pptx
+++ b/figures/Fig7_window_baseline_sensitivity_v2.pptx
@@ -2445,7 +2445,7 @@
           </p:nvSpPr>
           <p:spPr>
             <a:xfrm>
-              <a:off x="701215" y="2242379"/>
+              <a:off x="701215" y="2247675"/>
               <a:ext cx="4501084" cy="0"/>
             </a:xfrm>
             <a:custGeom>
@@ -2488,7 +2488,7 @@
           </p:nvSpPr>
           <p:spPr>
             <a:xfrm>
-              <a:off x="701215" y="1523176"/>
+              <a:off x="701215" y="1533767"/>
               <a:ext cx="4501084" cy="0"/>
             </a:xfrm>
             <a:custGeom>
@@ -2531,7 +2531,7 @@
           </p:nvSpPr>
           <p:spPr>
             <a:xfrm>
-              <a:off x="701215" y="2961583"/>
+              <a:off x="701215" y="819860"/>
               <a:ext cx="4501084" cy="0"/>
             </a:xfrm>
             <a:custGeom>
@@ -2550,6 +2550,49 @@
                 </a:path>
               </a:pathLst>
             </a:custGeom>
+            <a:ln w="6775" cap="flat">
+              <a:solidFill>
+                <a:srgbClr val="EBEBEB">
+                  <a:alpha val="100000"/>
+                </a:srgbClr>
+              </a:solidFill>
+              <a:prstDash val="solid"/>
+              <a:round/>
+            </a:ln>
+          </p:spPr>
+          <p:txBody>
+            <a:bodyPr/>
+            <a:lstStyle/>
+            <a:p/>
+          </p:txBody>
+        </p:sp>
+        <p:sp>
+          <p:nvSpPr>
+            <p:cNvPr id="12" name="pl12"/>
+            <p:cNvSpPr/>
+            <p:nvPr/>
+          </p:nvSpPr>
+          <p:spPr>
+            <a:xfrm>
+              <a:off x="701215" y="2961583"/>
+              <a:ext cx="4501084" cy="0"/>
+            </a:xfrm>
+            <a:custGeom>
+              <a:avLst/>
+              <a:pathLst>
+                <a:path w="4501084" h="0">
+                  <a:moveTo>
+                    <a:pt x="0" y="0"/>
+                  </a:moveTo>
+                  <a:lnTo>
+                    <a:pt x="4501084" y="0"/>
+                  </a:lnTo>
+                  <a:lnTo>
+                    <a:pt x="4501084" y="0"/>
+                  </a:lnTo>
+                </a:path>
+              </a:pathLst>
+            </a:custGeom>
             <a:ln w="9485" cap="flat">
               <a:solidFill>
                 <a:srgbClr val="8C8C8C">
@@ -2568,42 +2611,42 @@
         </p:sp>
         <p:sp>
           <p:nvSpPr>
-            <p:cNvPr id="12" name="pg12"/>
+            <p:cNvPr id="13" name="pg13"/>
             <p:cNvSpPr/>
             <p:nvPr/>
           </p:nvSpPr>
           <p:spPr>
             <a:xfrm>
               <a:off x="905810" y="920789"/>
-              <a:ext cx="4091894" cy="1848371"/>
+              <a:ext cx="4091894" cy="1838368"/>
             </a:xfrm>
             <a:custGeom>
               <a:avLst/>
               <a:pathLst>
-                <a:path w="4091894" h="1848371">
+                <a:path w="4091894" h="1838368">
                   <a:moveTo>
-                    <a:pt x="0" y="989118"/>
+                    <a:pt x="0" y="982300"/>
                   </a:moveTo>
                   <a:lnTo>
-                    <a:pt x="1363964" y="766715"/>
-                  </a:lnTo>
-                  <a:lnTo>
-                    <a:pt x="2727929" y="155159"/>
+                    <a:pt x="1363964" y="741814"/>
+                  </a:lnTo>
+                  <a:lnTo>
+                    <a:pt x="2727929" y="155166"/>
                   </a:lnTo>
                   <a:lnTo>
                     <a:pt x="4091894" y="0"/>
                   </a:lnTo>
                   <a:lnTo>
-                    <a:pt x="4091894" y="1163317"/>
-                  </a:lnTo>
-                  <a:lnTo>
-                    <a:pt x="2727929" y="1263025"/>
-                  </a:lnTo>
-                  <a:lnTo>
-                    <a:pt x="1363964" y="1731403"/>
-                  </a:lnTo>
-                  <a:lnTo>
-                    <a:pt x="0" y="1848371"/>
+                    <a:pt x="4091894" y="1158940"/>
+                  </a:lnTo>
+                  <a:lnTo>
+                    <a:pt x="2727929" y="1259884"/>
+                  </a:lnTo>
+                  <a:lnTo>
+                    <a:pt x="1363964" y="1707998"/>
+                  </a:lnTo>
+                  <a:lnTo>
+                    <a:pt x="0" y="1838368"/>
                   </a:lnTo>
                   <a:close/>
                 </a:path>
@@ -2623,27 +2666,27 @@
         </p:sp>
         <p:sp>
           <p:nvSpPr>
-            <p:cNvPr id="13" name="pl13"/>
+            <p:cNvPr id="14" name="pl14"/>
             <p:cNvSpPr/>
             <p:nvPr/>
           </p:nvSpPr>
           <p:spPr>
             <a:xfrm>
               <a:off x="905810" y="920789"/>
-              <a:ext cx="4091894" cy="989118"/>
+              <a:ext cx="4091894" cy="982300"/>
             </a:xfrm>
             <a:custGeom>
               <a:avLst/>
               <a:pathLst>
-                <a:path w="4091894" h="989118">
+                <a:path w="4091894" h="982300">
                   <a:moveTo>
-                    <a:pt x="0" y="989118"/>
+                    <a:pt x="0" y="982300"/>
                   </a:moveTo>
                   <a:lnTo>
-                    <a:pt x="1363964" y="766715"/>
-                  </a:lnTo>
-                  <a:lnTo>
-                    <a:pt x="2727929" y="155159"/>
+                    <a:pt x="1363964" y="741814"/>
+                  </a:lnTo>
+                  <a:lnTo>
+                    <a:pt x="2727929" y="155166"/>
                   </a:lnTo>
                   <a:lnTo>
                     <a:pt x="4091894" y="0"/>
@@ -2660,30 +2703,30 @@
         </p:sp>
         <p:sp>
           <p:nvSpPr>
-            <p:cNvPr id="14" name="pl14"/>
-            <p:cNvSpPr/>
-            <p:nvPr/>
-          </p:nvSpPr>
-          <p:spPr>
-            <a:xfrm>
-              <a:off x="905810" y="2084107"/>
-              <a:ext cx="4091894" cy="685053"/>
+            <p:cNvPr id="15" name="pl15"/>
+            <p:cNvSpPr/>
+            <p:nvPr/>
+          </p:nvSpPr>
+          <p:spPr>
+            <a:xfrm>
+              <a:off x="905810" y="2079729"/>
+              <a:ext cx="4091894" cy="679428"/>
             </a:xfrm>
             <a:custGeom>
               <a:avLst/>
               <a:pathLst>
-                <a:path w="4091894" h="685053">
+                <a:path w="4091894" h="679428">
                   <a:moveTo>
                     <a:pt x="4091894" y="0"/>
                   </a:moveTo>
                   <a:lnTo>
-                    <a:pt x="2727929" y="99707"/>
-                  </a:lnTo>
-                  <a:lnTo>
-                    <a:pt x="1363964" y="568086"/>
-                  </a:lnTo>
-                  <a:lnTo>
-                    <a:pt x="0" y="685053"/>
+                    <a:pt x="2727929" y="100944"/>
+                  </a:lnTo>
+                  <a:lnTo>
+                    <a:pt x="1363964" y="549058"/>
+                  </a:lnTo>
+                  <a:lnTo>
+                    <a:pt x="0" y="679428"/>
                   </a:lnTo>
                 </a:path>
               </a:pathLst>
@@ -2697,42 +2740,42 @@
         </p:sp>
         <p:sp>
           <p:nvSpPr>
-            <p:cNvPr id="15" name="pg15"/>
-            <p:cNvSpPr/>
-            <p:nvPr/>
-          </p:nvSpPr>
-          <p:spPr>
-            <a:xfrm>
-              <a:off x="905810" y="1085787"/>
-              <a:ext cx="4091894" cy="1727642"/>
+            <p:cNvPr id="16" name="pg16"/>
+            <p:cNvSpPr/>
+            <p:nvPr/>
+          </p:nvSpPr>
+          <p:spPr>
+            <a:xfrm>
+              <a:off x="905810" y="1026196"/>
+              <a:ext cx="4091894" cy="1766242"/>
             </a:xfrm>
             <a:custGeom>
               <a:avLst/>
               <a:pathLst>
-                <a:path w="4091894" h="1727642">
+                <a:path w="4091894" h="1766242">
                   <a:moveTo>
-                    <a:pt x="0" y="865811"/>
+                    <a:pt x="0" y="906638"/>
                   </a:moveTo>
                   <a:lnTo>
-                    <a:pt x="1363964" y="687414"/>
-                  </a:lnTo>
-                  <a:lnTo>
-                    <a:pt x="2727929" y="227129"/>
+                    <a:pt x="1363964" y="696380"/>
+                  </a:lnTo>
+                  <a:lnTo>
+                    <a:pt x="2727929" y="247330"/>
                   </a:lnTo>
                   <a:lnTo>
                     <a:pt x="4091894" y="0"/>
                   </a:lnTo>
                   <a:lnTo>
-                    <a:pt x="4091894" y="1102166"/>
-                  </a:lnTo>
-                  <a:lnTo>
-                    <a:pt x="2727929" y="1262568"/>
-                  </a:lnTo>
-                  <a:lnTo>
-                    <a:pt x="1363964" y="1626419"/>
-                  </a:lnTo>
-                  <a:lnTo>
-                    <a:pt x="0" y="1727642"/>
+                    <a:pt x="4091894" y="1111982"/>
+                  </a:lnTo>
+                  <a:lnTo>
+                    <a:pt x="2727929" y="1288190"/>
+                  </a:lnTo>
+                  <a:lnTo>
+                    <a:pt x="1363964" y="1640704"/>
+                  </a:lnTo>
+                  <a:lnTo>
+                    <a:pt x="0" y="1766242"/>
                   </a:lnTo>
                   <a:close/>
                 </a:path>
@@ -2752,27 +2795,27 @@
         </p:sp>
         <p:sp>
           <p:nvSpPr>
-            <p:cNvPr id="16" name="pl16"/>
-            <p:cNvSpPr/>
-            <p:nvPr/>
-          </p:nvSpPr>
-          <p:spPr>
-            <a:xfrm>
-              <a:off x="905810" y="1085787"/>
-              <a:ext cx="4091894" cy="865811"/>
+            <p:cNvPr id="17" name="pl17"/>
+            <p:cNvSpPr/>
+            <p:nvPr/>
+          </p:nvSpPr>
+          <p:spPr>
+            <a:xfrm>
+              <a:off x="905810" y="1026196"/>
+              <a:ext cx="4091894" cy="906638"/>
             </a:xfrm>
             <a:custGeom>
               <a:avLst/>
               <a:pathLst>
-                <a:path w="4091894" h="865811">
+                <a:path w="4091894" h="906638">
                   <a:moveTo>
-                    <a:pt x="0" y="865811"/>
+                    <a:pt x="0" y="906638"/>
                   </a:moveTo>
                   <a:lnTo>
-                    <a:pt x="1363964" y="687414"/>
-                  </a:lnTo>
-                  <a:lnTo>
-                    <a:pt x="2727929" y="227129"/>
+                    <a:pt x="1363964" y="696380"/>
+                  </a:lnTo>
+                  <a:lnTo>
+                    <a:pt x="2727929" y="247330"/>
                   </a:lnTo>
                   <a:lnTo>
                     <a:pt x="4091894" y="0"/>
@@ -2789,30 +2832,30 @@
         </p:sp>
         <p:sp>
           <p:nvSpPr>
-            <p:cNvPr id="17" name="pl17"/>
-            <p:cNvSpPr/>
-            <p:nvPr/>
-          </p:nvSpPr>
-          <p:spPr>
-            <a:xfrm>
-              <a:off x="905810" y="2187953"/>
-              <a:ext cx="4091894" cy="625476"/>
+            <p:cNvPr id="18" name="pl18"/>
+            <p:cNvSpPr/>
+            <p:nvPr/>
+          </p:nvSpPr>
+          <p:spPr>
+            <a:xfrm>
+              <a:off x="905810" y="2138178"/>
+              <a:ext cx="4091894" cy="654259"/>
             </a:xfrm>
             <a:custGeom>
               <a:avLst/>
               <a:pathLst>
-                <a:path w="4091894" h="625476">
+                <a:path w="4091894" h="654259">
                   <a:moveTo>
                     <a:pt x="4091894" y="0"/>
                   </a:moveTo>
                   <a:lnTo>
-                    <a:pt x="2727929" y="160402"/>
-                  </a:lnTo>
-                  <a:lnTo>
-                    <a:pt x="1363964" y="524253"/>
-                  </a:lnTo>
-                  <a:lnTo>
-                    <a:pt x="0" y="625476"/>
+                    <a:pt x="2727929" y="176208"/>
+                  </a:lnTo>
+                  <a:lnTo>
+                    <a:pt x="1363964" y="528722"/>
+                  </a:lnTo>
+                  <a:lnTo>
+                    <a:pt x="0" y="654259"/>
                   </a:lnTo>
                 </a:path>
               </a:pathLst>
@@ -2826,42 +2869,42 @@
         </p:sp>
         <p:sp>
           <p:nvSpPr>
-            <p:cNvPr id="18" name="pg18"/>
-            <p:cNvSpPr/>
-            <p:nvPr/>
-          </p:nvSpPr>
-          <p:spPr>
-            <a:xfrm>
-              <a:off x="905810" y="942931"/>
-              <a:ext cx="4091894" cy="1687811"/>
+            <p:cNvPr id="19" name="pg19"/>
+            <p:cNvSpPr/>
+            <p:nvPr/>
+          </p:nvSpPr>
+          <p:spPr>
+            <a:xfrm>
+              <a:off x="905810" y="924584"/>
+              <a:ext cx="4091894" cy="1688926"/>
             </a:xfrm>
             <a:custGeom>
               <a:avLst/>
               <a:pathLst>
-                <a:path w="4091894" h="1687811">
+                <a:path w="4091894" h="1688926">
                   <a:moveTo>
-                    <a:pt x="0" y="781385"/>
+                    <a:pt x="0" y="783802"/>
                   </a:moveTo>
                   <a:lnTo>
-                    <a:pt x="1363964" y="568564"/>
-                  </a:lnTo>
-                  <a:lnTo>
-                    <a:pt x="2727929" y="140755"/>
+                    <a:pt x="1363964" y="550565"/>
+                  </a:lnTo>
+                  <a:lnTo>
+                    <a:pt x="2727929" y="148723"/>
                   </a:lnTo>
                   <a:lnTo>
                     <a:pt x="4091894" y="0"/>
                   </a:lnTo>
                   <a:lnTo>
-                    <a:pt x="4091894" y="1126544"/>
-                  </a:lnTo>
-                  <a:lnTo>
-                    <a:pt x="2727929" y="1241480"/>
-                  </a:lnTo>
-                  <a:lnTo>
-                    <a:pt x="1363964" y="1567476"/>
-                  </a:lnTo>
-                  <a:lnTo>
-                    <a:pt x="0" y="1687811"/>
+                    <a:pt x="4091894" y="1128601"/>
+                  </a:lnTo>
+                  <a:lnTo>
+                    <a:pt x="2727929" y="1250520"/>
+                  </a:lnTo>
+                  <a:lnTo>
+                    <a:pt x="1363964" y="1555386"/>
+                  </a:lnTo>
+                  <a:lnTo>
+                    <a:pt x="0" y="1688926"/>
                   </a:lnTo>
                   <a:close/>
                 </a:path>
@@ -2881,27 +2924,27 @@
         </p:sp>
         <p:sp>
           <p:nvSpPr>
-            <p:cNvPr id="19" name="pl19"/>
-            <p:cNvSpPr/>
-            <p:nvPr/>
-          </p:nvSpPr>
-          <p:spPr>
-            <a:xfrm>
-              <a:off x="905810" y="942931"/>
-              <a:ext cx="4091894" cy="781385"/>
+            <p:cNvPr id="20" name="pl20"/>
+            <p:cNvSpPr/>
+            <p:nvPr/>
+          </p:nvSpPr>
+          <p:spPr>
+            <a:xfrm>
+              <a:off x="905810" y="924584"/>
+              <a:ext cx="4091894" cy="783802"/>
             </a:xfrm>
             <a:custGeom>
               <a:avLst/>
               <a:pathLst>
-                <a:path w="4091894" h="781385">
+                <a:path w="4091894" h="783802">
                   <a:moveTo>
-                    <a:pt x="0" y="781385"/>
+                    <a:pt x="0" y="783802"/>
                   </a:moveTo>
                   <a:lnTo>
-                    <a:pt x="1363964" y="568564"/>
-                  </a:lnTo>
-                  <a:lnTo>
-                    <a:pt x="2727929" y="140755"/>
+                    <a:pt x="1363964" y="550565"/>
+                  </a:lnTo>
+                  <a:lnTo>
+                    <a:pt x="2727929" y="148723"/>
                   </a:lnTo>
                   <a:lnTo>
                     <a:pt x="4091894" y="0"/>
@@ -2918,30 +2961,30 @@
         </p:sp>
         <p:sp>
           <p:nvSpPr>
-            <p:cNvPr id="20" name="pl20"/>
-            <p:cNvSpPr/>
-            <p:nvPr/>
-          </p:nvSpPr>
-          <p:spPr>
-            <a:xfrm>
-              <a:off x="905810" y="2069475"/>
-              <a:ext cx="4091894" cy="561267"/>
+            <p:cNvPr id="21" name="pl21"/>
+            <p:cNvSpPr/>
+            <p:nvPr/>
+          </p:nvSpPr>
+          <p:spPr>
+            <a:xfrm>
+              <a:off x="905810" y="2053186"/>
+              <a:ext cx="4091894" cy="560324"/>
             </a:xfrm>
             <a:custGeom>
               <a:avLst/>
               <a:pathLst>
-                <a:path w="4091894" h="561267">
+                <a:path w="4091894" h="560324">
                   <a:moveTo>
                     <a:pt x="4091894" y="0"/>
                   </a:moveTo>
                   <a:lnTo>
-                    <a:pt x="2727929" y="114935"/>
-                  </a:lnTo>
-                  <a:lnTo>
-                    <a:pt x="1363964" y="440931"/>
-                  </a:lnTo>
-                  <a:lnTo>
-                    <a:pt x="0" y="561267"/>
+                    <a:pt x="2727929" y="121919"/>
+                  </a:lnTo>
+                  <a:lnTo>
+                    <a:pt x="1363964" y="426785"/>
+                  </a:lnTo>
+                  <a:lnTo>
+                    <a:pt x="0" y="560324"/>
                   </a:lnTo>
                 </a:path>
               </a:pathLst>
@@ -2955,27 +2998,27 @@
         </p:sp>
         <p:sp>
           <p:nvSpPr>
-            <p:cNvPr id="21" name="pl21"/>
-            <p:cNvSpPr/>
-            <p:nvPr/>
-          </p:nvSpPr>
-          <p:spPr>
-            <a:xfrm>
-              <a:off x="905810" y="1536023"/>
-              <a:ext cx="4091894" cy="825447"/>
+            <p:cNvPr id="22" name="pl22"/>
+            <p:cNvSpPr/>
+            <p:nvPr/>
+          </p:nvSpPr>
+          <p:spPr>
+            <a:xfrm>
+              <a:off x="905810" y="1533743"/>
+              <a:ext cx="4091894" cy="819248"/>
             </a:xfrm>
             <a:custGeom>
               <a:avLst/>
               <a:pathLst>
-                <a:path w="4091894" h="825447">
+                <a:path w="4091894" h="819248">
                   <a:moveTo>
-                    <a:pt x="0" y="825447"/>
+                    <a:pt x="0" y="819248"/>
                   </a:moveTo>
                   <a:lnTo>
-                    <a:pt x="1363964" y="660418"/>
-                  </a:lnTo>
-                  <a:lnTo>
-                    <a:pt x="2727929" y="125091"/>
+                    <a:pt x="1363964" y="638642"/>
+                  </a:lnTo>
+                  <a:lnTo>
+                    <a:pt x="2727929" y="125785"/>
                   </a:lnTo>
                   <a:lnTo>
                     <a:pt x="4091894" y="0"/>
@@ -3001,27 +3044,27 @@
         </p:sp>
         <p:sp>
           <p:nvSpPr>
-            <p:cNvPr id="22" name="pl22"/>
-            <p:cNvSpPr/>
-            <p:nvPr/>
-          </p:nvSpPr>
-          <p:spPr>
-            <a:xfrm>
-              <a:off x="905810" y="1667826"/>
-              <a:ext cx="4091894" cy="736985"/>
+            <p:cNvPr id="23" name="pl23"/>
+            <p:cNvSpPr/>
+            <p:nvPr/>
+          </p:nvSpPr>
+          <p:spPr>
+            <a:xfrm>
+              <a:off x="905810" y="1613518"/>
+              <a:ext cx="4091894" cy="771335"/>
             </a:xfrm>
             <a:custGeom>
               <a:avLst/>
               <a:pathLst>
-                <a:path w="4091894" h="736985">
+                <a:path w="4091894" h="771335">
                   <a:moveTo>
-                    <a:pt x="0" y="736985"/>
+                    <a:pt x="0" y="771335"/>
                   </a:moveTo>
                   <a:lnTo>
-                    <a:pt x="1363964" y="600497"/>
-                  </a:lnTo>
-                  <a:lnTo>
-                    <a:pt x="2727929" y="191247"/>
+                    <a:pt x="1363964" y="607002"/>
+                  </a:lnTo>
+                  <a:lnTo>
+                    <a:pt x="2727929" y="209112"/>
                   </a:lnTo>
                   <a:lnTo>
                     <a:pt x="4091894" y="0"/>
@@ -3047,27 +3090,27 @@
         </p:sp>
         <p:sp>
           <p:nvSpPr>
-            <p:cNvPr id="23" name="pl23"/>
-            <p:cNvSpPr/>
-            <p:nvPr/>
-          </p:nvSpPr>
-          <p:spPr>
-            <a:xfrm>
-              <a:off x="905810" y="1537706"/>
-              <a:ext cx="4091894" cy="663333"/>
+            <p:cNvPr id="24" name="pl24"/>
+            <p:cNvSpPr/>
+            <p:nvPr/>
+          </p:nvSpPr>
+          <p:spPr>
+            <a:xfrm>
+              <a:off x="905810" y="1520561"/>
+              <a:ext cx="4091894" cy="663883"/>
             </a:xfrm>
             <a:custGeom>
               <a:avLst/>
               <a:pathLst>
-                <a:path w="4091894" h="663333">
+                <a:path w="4091894" h="663883">
                   <a:moveTo>
-                    <a:pt x="0" y="663333"/>
+                    <a:pt x="0" y="663883"/>
                   </a:moveTo>
                   <a:lnTo>
-                    <a:pt x="1363964" y="500761"/>
-                  </a:lnTo>
-                  <a:lnTo>
-                    <a:pt x="2727929" y="127199"/>
+                    <a:pt x="1363964" y="484800"/>
+                  </a:lnTo>
+                  <a:lnTo>
+                    <a:pt x="2727929" y="134668"/>
                   </a:lnTo>
                   <a:lnTo>
                     <a:pt x="4091894" y="0"/>
@@ -3093,13 +3136,13 @@
         </p:sp>
         <p:sp>
           <p:nvSpPr>
-            <p:cNvPr id="24" name="pt24"/>
-            <p:cNvSpPr/>
-            <p:nvPr/>
-          </p:nvSpPr>
-          <p:spPr>
-            <a:xfrm>
-              <a:off x="882748" y="2177978"/>
+            <p:cNvPr id="25" name="pt25"/>
+            <p:cNvSpPr/>
+            <p:nvPr/>
+          </p:nvSpPr>
+          <p:spPr>
+            <a:xfrm>
+              <a:off x="882748" y="2161383"/>
               <a:ext cx="46123" cy="46123"/>
             </a:xfrm>
             <a:prstGeom prst="ellipse">
@@ -3128,13 +3171,13 @@
         </p:sp>
         <p:sp>
           <p:nvSpPr>
-            <p:cNvPr id="25" name="pt25"/>
-            <p:cNvSpPr/>
-            <p:nvPr/>
-          </p:nvSpPr>
-          <p:spPr>
-            <a:xfrm>
-              <a:off x="2246713" y="2015406"/>
+            <p:cNvPr id="26" name="pt26"/>
+            <p:cNvSpPr/>
+            <p:nvPr/>
+          </p:nvSpPr>
+          <p:spPr>
+            <a:xfrm>
+              <a:off x="2246713" y="1982300"/>
               <a:ext cx="46123" cy="46123"/>
             </a:xfrm>
             <a:prstGeom prst="ellipse">
@@ -3163,13 +3206,13 @@
         </p:sp>
         <p:sp>
           <p:nvSpPr>
-            <p:cNvPr id="26" name="pt26"/>
-            <p:cNvSpPr/>
-            <p:nvPr/>
-          </p:nvSpPr>
-          <p:spPr>
-            <a:xfrm>
-              <a:off x="3610678" y="1641844"/>
+            <p:cNvPr id="27" name="pt27"/>
+            <p:cNvSpPr/>
+            <p:nvPr/>
+          </p:nvSpPr>
+          <p:spPr>
+            <a:xfrm>
+              <a:off x="3610678" y="1632168"/>
               <a:ext cx="46123" cy="46123"/>
             </a:xfrm>
             <a:prstGeom prst="ellipse">
@@ -3198,13 +3241,13 @@
         </p:sp>
         <p:sp>
           <p:nvSpPr>
-            <p:cNvPr id="27" name="pt27"/>
-            <p:cNvSpPr/>
-            <p:nvPr/>
-          </p:nvSpPr>
-          <p:spPr>
-            <a:xfrm>
-              <a:off x="4974643" y="1514644"/>
+            <p:cNvPr id="28" name="pt28"/>
+            <p:cNvSpPr/>
+            <p:nvPr/>
+          </p:nvSpPr>
+          <p:spPr>
+            <a:xfrm>
+              <a:off x="4974643" y="1497500"/>
               <a:ext cx="46123" cy="46123"/>
             </a:xfrm>
             <a:prstGeom prst="ellipse">
@@ -3233,13 +3276,13 @@
         </p:sp>
         <p:sp>
           <p:nvSpPr>
-            <p:cNvPr id="28" name="pt28"/>
-            <p:cNvSpPr/>
-            <p:nvPr/>
-          </p:nvSpPr>
-          <p:spPr>
-            <a:xfrm>
-              <a:off x="882748" y="2381750"/>
+            <p:cNvPr id="29" name="pt29"/>
+            <p:cNvSpPr/>
+            <p:nvPr/>
+          </p:nvSpPr>
+          <p:spPr>
+            <a:xfrm>
+              <a:off x="882748" y="2361791"/>
               <a:ext cx="46123" cy="46123"/>
             </a:xfrm>
             <a:prstGeom prst="ellipse">
@@ -3268,13 +3311,13 @@
         </p:sp>
         <p:sp>
           <p:nvSpPr>
-            <p:cNvPr id="29" name="pt29"/>
-            <p:cNvSpPr/>
-            <p:nvPr/>
-          </p:nvSpPr>
-          <p:spPr>
-            <a:xfrm>
-              <a:off x="2246713" y="2245262"/>
+            <p:cNvPr id="30" name="pt30"/>
+            <p:cNvSpPr/>
+            <p:nvPr/>
+          </p:nvSpPr>
+          <p:spPr>
+            <a:xfrm>
+              <a:off x="2246713" y="2197458"/>
               <a:ext cx="46123" cy="46123"/>
             </a:xfrm>
             <a:prstGeom prst="ellipse">
@@ -3303,13 +3346,13 @@
         </p:sp>
         <p:sp>
           <p:nvSpPr>
-            <p:cNvPr id="30" name="pt30"/>
-            <p:cNvSpPr/>
-            <p:nvPr/>
-          </p:nvSpPr>
-          <p:spPr>
-            <a:xfrm>
-              <a:off x="3610678" y="1836012"/>
+            <p:cNvPr id="31" name="pt31"/>
+            <p:cNvSpPr/>
+            <p:nvPr/>
+          </p:nvSpPr>
+          <p:spPr>
+            <a:xfrm>
+              <a:off x="3610678" y="1799569"/>
               <a:ext cx="46123" cy="46123"/>
             </a:xfrm>
             <a:prstGeom prst="ellipse">
@@ -3338,13 +3381,13 @@
         </p:sp>
         <p:sp>
           <p:nvSpPr>
-            <p:cNvPr id="31" name="pt31"/>
-            <p:cNvSpPr/>
-            <p:nvPr/>
-          </p:nvSpPr>
-          <p:spPr>
-            <a:xfrm>
-              <a:off x="4974643" y="1644764"/>
+            <p:cNvPr id="32" name="pt32"/>
+            <p:cNvSpPr/>
+            <p:nvPr/>
+          </p:nvSpPr>
+          <p:spPr>
+            <a:xfrm>
+              <a:off x="4974643" y="1590456"/>
               <a:ext cx="46123" cy="46123"/>
             </a:xfrm>
             <a:prstGeom prst="ellipse">
@@ -3373,13 +3416,13 @@
         </p:sp>
         <p:sp>
           <p:nvSpPr>
-            <p:cNvPr id="32" name="pt32"/>
-            <p:cNvSpPr/>
-            <p:nvPr/>
-          </p:nvSpPr>
-          <p:spPr>
-            <a:xfrm>
-              <a:off x="882748" y="2338408"/>
+            <p:cNvPr id="33" name="pt33"/>
+            <p:cNvSpPr/>
+            <p:nvPr/>
+          </p:nvSpPr>
+          <p:spPr>
+            <a:xfrm>
+              <a:off x="882748" y="2329929"/>
               <a:ext cx="46123" cy="46123"/>
             </a:xfrm>
             <a:prstGeom prst="ellipse">
@@ -3408,13 +3451,13 @@
         </p:sp>
         <p:sp>
           <p:nvSpPr>
-            <p:cNvPr id="33" name="pt33"/>
-            <p:cNvSpPr/>
-            <p:nvPr/>
-          </p:nvSpPr>
-          <p:spPr>
-            <a:xfrm>
-              <a:off x="2246713" y="2173379"/>
+            <p:cNvPr id="34" name="pt34"/>
+            <p:cNvSpPr/>
+            <p:nvPr/>
+          </p:nvSpPr>
+          <p:spPr>
+            <a:xfrm>
+              <a:off x="2246713" y="2149323"/>
               <a:ext cx="46123" cy="46123"/>
             </a:xfrm>
             <a:prstGeom prst="ellipse">
@@ -3443,13 +3486,13 @@
         </p:sp>
         <p:sp>
           <p:nvSpPr>
-            <p:cNvPr id="34" name="pt34"/>
-            <p:cNvSpPr/>
-            <p:nvPr/>
-          </p:nvSpPr>
-          <p:spPr>
-            <a:xfrm>
-              <a:off x="3610678" y="1638052"/>
+            <p:cNvPr id="35" name="pt35"/>
+            <p:cNvSpPr/>
+            <p:nvPr/>
+          </p:nvSpPr>
+          <p:spPr>
+            <a:xfrm>
+              <a:off x="3610678" y="1636467"/>
               <a:ext cx="46123" cy="46123"/>
             </a:xfrm>
             <a:prstGeom prst="ellipse">
@@ -3478,13 +3521,13 @@
         </p:sp>
         <p:sp>
           <p:nvSpPr>
-            <p:cNvPr id="35" name="pt35"/>
-            <p:cNvSpPr/>
-            <p:nvPr/>
-          </p:nvSpPr>
-          <p:spPr>
-            <a:xfrm>
-              <a:off x="4974643" y="1512961"/>
+            <p:cNvPr id="36" name="pt36"/>
+            <p:cNvSpPr/>
+            <p:nvPr/>
+          </p:nvSpPr>
+          <p:spPr>
+            <a:xfrm>
+              <a:off x="4974643" y="1510681"/>
               <a:ext cx="46123" cy="46123"/>
             </a:xfrm>
             <a:prstGeom prst="ellipse">
@@ -3513,7 +3556,7 @@
         </p:sp>
         <p:sp>
           <p:nvSpPr>
-            <p:cNvPr id="36" name="pl36"/>
+            <p:cNvPr id="37" name="pl37"/>
             <p:cNvSpPr/>
             <p:nvPr/>
           </p:nvSpPr>
@@ -3553,7 +3596,7 @@
         </p:sp>
         <p:sp>
           <p:nvSpPr>
-            <p:cNvPr id="37" name="tx37"/>
+            <p:cNvPr id="38" name="tx38"/>
             <p:cNvSpPr/>
             <p:nvPr/>
           </p:nvSpPr>
@@ -3596,13 +3639,13 @@
         </p:sp>
         <p:sp>
           <p:nvSpPr>
-            <p:cNvPr id="38" name="tx38"/>
-            <p:cNvSpPr/>
-            <p:nvPr/>
-          </p:nvSpPr>
-          <p:spPr>
-            <a:xfrm>
-              <a:off x="503004" y="2205986"/>
+            <p:cNvPr id="39" name="tx39"/>
+            <p:cNvSpPr/>
+            <p:nvPr/>
+          </p:nvSpPr>
+          <p:spPr>
+            <a:xfrm>
+              <a:off x="503004" y="2211282"/>
               <a:ext cx="141274" cy="72786"/>
             </a:xfrm>
             <a:prstGeom prst="rect">
@@ -3639,13 +3682,13 @@
         </p:sp>
         <p:sp>
           <p:nvSpPr>
-            <p:cNvPr id="39" name="tx39"/>
-            <p:cNvSpPr/>
-            <p:nvPr/>
-          </p:nvSpPr>
-          <p:spPr>
-            <a:xfrm>
-              <a:off x="503004" y="1486783"/>
+            <p:cNvPr id="40" name="tx40"/>
+            <p:cNvSpPr/>
+            <p:nvPr/>
+          </p:nvSpPr>
+          <p:spPr>
+            <a:xfrm>
+              <a:off x="503004" y="1497374"/>
               <a:ext cx="141274" cy="72786"/>
             </a:xfrm>
             <a:prstGeom prst="rect">
@@ -3682,7 +3725,50 @@
         </p:sp>
         <p:sp>
           <p:nvSpPr>
-            <p:cNvPr id="40" name="pl40"/>
+            <p:cNvPr id="41" name="tx41"/>
+            <p:cNvSpPr/>
+            <p:nvPr/>
+          </p:nvSpPr>
+          <p:spPr>
+            <a:xfrm>
+              <a:off x="503004" y="783466"/>
+              <a:ext cx="141274" cy="72786"/>
+            </a:xfrm>
+            <a:prstGeom prst="rect">
+              <a:avLst/>
+            </a:prstGeom>
+            <a:noFill/>
+          </p:spPr>
+          <p:txBody>
+            <a:bodyPr lIns="0" rIns="0" tIns="0" bIns="0" anchorCtr="1" anchor="ctr" wrap="none"/>
+            <a:lstStyle/>
+            <a:p>
+              <a:pPr algn="l" marL="0" marR="0" indent="0">
+                <a:spcBef>
+                  <a:spcPts val="0"/>
+                </a:spcBef>
+                <a:spcAft>
+                  <a:spcPts val="0"/>
+                </a:spcAft>
+              </a:pPr>
+              <a:r>
+                <a:rPr sz="800" i="0" b="0">
+                  <a:solidFill>
+                    <a:srgbClr val="262626">
+                      <a:alpha val="100000"/>
+                    </a:srgbClr>
+                  </a:solidFill>
+                  <a:latin typeface="Arial"/>
+                  <a:cs typeface="Arial"/>
+                </a:rPr>
+                <a:t>1.6</a:t>
+              </a:r>
+            </a:p>
+          </p:txBody>
+        </p:sp>
+        <p:sp>
+          <p:nvSpPr>
+            <p:cNvPr id="42" name="pl42"/>
             <p:cNvSpPr/>
             <p:nvPr/>
           </p:nvSpPr>
@@ -3722,13 +3808,13 @@
         </p:sp>
         <p:sp>
           <p:nvSpPr>
-            <p:cNvPr id="41" name="pl41"/>
-            <p:cNvSpPr/>
-            <p:nvPr/>
-          </p:nvSpPr>
-          <p:spPr>
-            <a:xfrm>
-              <a:off x="669584" y="2242379"/>
+            <p:cNvPr id="43" name="pl43"/>
+            <p:cNvSpPr/>
+            <p:nvPr/>
+          </p:nvSpPr>
+          <p:spPr>
+            <a:xfrm>
+              <a:off x="669584" y="2247675"/>
               <a:ext cx="31631" cy="0"/>
             </a:xfrm>
             <a:custGeom>
@@ -3762,13 +3848,13 @@
         </p:sp>
         <p:sp>
           <p:nvSpPr>
-            <p:cNvPr id="42" name="pl42"/>
-            <p:cNvSpPr/>
-            <p:nvPr/>
-          </p:nvSpPr>
-          <p:spPr>
-            <a:xfrm>
-              <a:off x="669584" y="1523176"/>
+            <p:cNvPr id="44" name="pl44"/>
+            <p:cNvSpPr/>
+            <p:nvPr/>
+          </p:nvSpPr>
+          <p:spPr>
+            <a:xfrm>
+              <a:off x="669584" y="1533767"/>
               <a:ext cx="31631" cy="0"/>
             </a:xfrm>
             <a:custGeom>
@@ -3802,7 +3888,47 @@
         </p:sp>
         <p:sp>
           <p:nvSpPr>
-            <p:cNvPr id="43" name="pl43"/>
+            <p:cNvPr id="45" name="pl45"/>
+            <p:cNvSpPr/>
+            <p:nvPr/>
+          </p:nvSpPr>
+          <p:spPr>
+            <a:xfrm>
+              <a:off x="669584" y="819860"/>
+              <a:ext cx="31631" cy="0"/>
+            </a:xfrm>
+            <a:custGeom>
+              <a:avLst/>
+              <a:pathLst>
+                <a:path w="31631" h="0">
+                  <a:moveTo>
+                    <a:pt x="0" y="0"/>
+                  </a:moveTo>
+                  <a:lnTo>
+                    <a:pt x="31631" y="0"/>
+                  </a:lnTo>
+                </a:path>
+              </a:pathLst>
+            </a:custGeom>
+            <a:ln w="8130" cap="flat">
+              <a:solidFill>
+                <a:srgbClr val="333333">
+                  <a:alpha val="100000"/>
+                </a:srgbClr>
+              </a:solidFill>
+              <a:prstDash val="solid"/>
+              <a:round/>
+            </a:ln>
+          </p:spPr>
+          <p:txBody>
+            <a:bodyPr/>
+            <a:lstStyle/>
+            <a:p/>
+          </p:txBody>
+        </p:sp>
+        <p:sp>
+          <p:nvSpPr>
+            <p:cNvPr id="46" name="pl46"/>
             <p:cNvSpPr/>
             <p:nvPr/>
           </p:nvSpPr>
@@ -3842,7 +3968,7 @@
         </p:sp>
         <p:sp>
           <p:nvSpPr>
-            <p:cNvPr id="44" name="pl44"/>
+            <p:cNvPr id="47" name="pl47"/>
             <p:cNvSpPr/>
             <p:nvPr/>
           </p:nvSpPr>
@@ -3882,7 +4008,7 @@
         </p:sp>
         <p:sp>
           <p:nvSpPr>
-            <p:cNvPr id="45" name="pl45"/>
+            <p:cNvPr id="48" name="pl48"/>
             <p:cNvSpPr/>
             <p:nvPr/>
           </p:nvSpPr>
@@ -3922,7 +4048,7 @@
         </p:sp>
         <p:sp>
           <p:nvSpPr>
-            <p:cNvPr id="46" name="pl46"/>
+            <p:cNvPr id="49" name="pl49"/>
             <p:cNvSpPr/>
             <p:nvPr/>
           </p:nvSpPr>
@@ -3962,7 +4088,7 @@
         </p:sp>
         <p:sp>
           <p:nvSpPr>
-            <p:cNvPr id="47" name="pl47"/>
+            <p:cNvPr id="50" name="pl50"/>
             <p:cNvSpPr/>
             <p:nvPr/>
           </p:nvSpPr>
@@ -4002,7 +4128,7 @@
         </p:sp>
         <p:sp>
           <p:nvSpPr>
-            <p:cNvPr id="48" name="tx48"/>
+            <p:cNvPr id="51" name="tx51"/>
             <p:cNvSpPr/>
             <p:nvPr/>
           </p:nvSpPr>
@@ -4045,7 +4171,7 @@
         </p:sp>
         <p:sp>
           <p:nvSpPr>
-            <p:cNvPr id="49" name="tx49"/>
+            <p:cNvPr id="52" name="tx52"/>
             <p:cNvSpPr/>
             <p:nvPr/>
           </p:nvSpPr>
@@ -4088,7 +4214,7 @@
         </p:sp>
         <p:sp>
           <p:nvSpPr>
-            <p:cNvPr id="50" name="tx50"/>
+            <p:cNvPr id="53" name="tx53"/>
             <p:cNvSpPr/>
             <p:nvPr/>
           </p:nvSpPr>
@@ -4131,7 +4257,7 @@
         </p:sp>
         <p:sp>
           <p:nvSpPr>
-            <p:cNvPr id="51" name="tx51"/>
+            <p:cNvPr id="54" name="tx54"/>
             <p:cNvSpPr/>
             <p:nvPr/>
           </p:nvSpPr>
@@ -4174,7 +4300,7 @@
         </p:sp>
         <p:sp>
           <p:nvSpPr>
-            <p:cNvPr id="52" name="tx52"/>
+            <p:cNvPr id="55" name="tx55"/>
             <p:cNvSpPr/>
             <p:nvPr/>
           </p:nvSpPr>
@@ -4217,7 +4343,7 @@
         </p:sp>
         <p:sp>
           <p:nvSpPr>
-            <p:cNvPr id="53" name="tx53"/>
+            <p:cNvPr id="56" name="tx56"/>
             <p:cNvSpPr/>
             <p:nvPr/>
           </p:nvSpPr>
@@ -4260,7 +4386,7 @@
         </p:sp>
         <p:sp>
           <p:nvSpPr>
-            <p:cNvPr id="54" name="rc54"/>
+            <p:cNvPr id="57" name="rc57"/>
             <p:cNvSpPr/>
             <p:nvPr/>
           </p:nvSpPr>
@@ -4286,7 +4412,7 @@
         </p:sp>
         <p:sp>
           <p:nvSpPr>
-            <p:cNvPr id="55" name="tx55"/>
+            <p:cNvPr id="58" name="tx58"/>
             <p:cNvSpPr/>
             <p:nvPr/>
           </p:nvSpPr>
@@ -4329,7 +4455,7 @@
         </p:sp>
         <p:sp>
           <p:nvSpPr>
-            <p:cNvPr id="56" name="rc56"/>
+            <p:cNvPr id="59" name="rc59"/>
             <p:cNvSpPr/>
             <p:nvPr/>
           </p:nvSpPr>
@@ -4355,7 +4481,7 @@
         </p:sp>
         <p:sp>
           <p:nvSpPr>
-            <p:cNvPr id="57" name="pl57"/>
+            <p:cNvPr id="60" name="pl60"/>
             <p:cNvSpPr/>
             <p:nvPr/>
           </p:nvSpPr>
@@ -4395,7 +4521,7 @@
         </p:sp>
         <p:sp>
           <p:nvSpPr>
-            <p:cNvPr id="58" name="pt58"/>
+            <p:cNvPr id="61" name="pt61"/>
             <p:cNvSpPr/>
             <p:nvPr/>
           </p:nvSpPr>
@@ -4430,7 +4556,7 @@
         </p:sp>
         <p:sp>
           <p:nvSpPr>
-            <p:cNvPr id="59" name="rc59"/>
+            <p:cNvPr id="62" name="rc62"/>
             <p:cNvSpPr/>
             <p:nvPr/>
           </p:nvSpPr>
@@ -4456,7 +4582,7 @@
         </p:sp>
         <p:sp>
           <p:nvSpPr>
-            <p:cNvPr id="60" name="pl60"/>
+            <p:cNvPr id="63" name="pl63"/>
             <p:cNvSpPr/>
             <p:nvPr/>
           </p:nvSpPr>
@@ -4496,7 +4622,7 @@
         </p:sp>
         <p:sp>
           <p:nvSpPr>
-            <p:cNvPr id="61" name="pt61"/>
+            <p:cNvPr id="64" name="pt64"/>
             <p:cNvSpPr/>
             <p:nvPr/>
           </p:nvSpPr>
@@ -4531,7 +4657,7 @@
         </p:sp>
         <p:sp>
           <p:nvSpPr>
-            <p:cNvPr id="62" name="rc62"/>
+            <p:cNvPr id="65" name="rc65"/>
             <p:cNvSpPr/>
             <p:nvPr/>
           </p:nvSpPr>
@@ -4557,7 +4683,7 @@
         </p:sp>
         <p:sp>
           <p:nvSpPr>
-            <p:cNvPr id="63" name="pl63"/>
+            <p:cNvPr id="66" name="pl66"/>
             <p:cNvSpPr/>
             <p:nvPr/>
           </p:nvSpPr>
@@ -4597,7 +4723,7 @@
         </p:sp>
         <p:sp>
           <p:nvSpPr>
-            <p:cNvPr id="64" name="pt64"/>
+            <p:cNvPr id="67" name="pt67"/>
             <p:cNvSpPr/>
             <p:nvPr/>
           </p:nvSpPr>
@@ -4632,7 +4758,7 @@
         </p:sp>
         <p:sp>
           <p:nvSpPr>
-            <p:cNvPr id="65" name="tx65"/>
+            <p:cNvPr id="68" name="tx68"/>
             <p:cNvSpPr/>
             <p:nvPr/>
           </p:nvSpPr>
@@ -4675,7 +4801,7 @@
         </p:sp>
         <p:sp>
           <p:nvSpPr>
-            <p:cNvPr id="66" name="tx66"/>
+            <p:cNvPr id="69" name="tx69"/>
             <p:cNvSpPr/>
             <p:nvPr/>
           </p:nvSpPr>
@@ -4718,7 +4844,7 @@
         </p:sp>
         <p:sp>
           <p:nvSpPr>
-            <p:cNvPr id="67" name="tx67"/>
+            <p:cNvPr id="70" name="tx70"/>
             <p:cNvSpPr/>
             <p:nvPr/>
           </p:nvSpPr>
@@ -4761,7 +4887,7 @@
         </p:sp>
         <p:sp>
           <p:nvSpPr>
-            <p:cNvPr id="68" name="tx68"/>
+            <p:cNvPr id="71" name="tx71"/>
             <p:cNvSpPr/>
             <p:nvPr/>
           </p:nvSpPr>
@@ -4804,7 +4930,7 @@
         </p:sp>
         <p:sp>
           <p:nvSpPr>
-            <p:cNvPr id="69" name="tx69"/>
+            <p:cNvPr id="72" name="tx72"/>
             <p:cNvSpPr/>
             <p:nvPr/>
           </p:nvSpPr>
@@ -4847,7 +4973,7 @@
         </p:sp>
         <p:sp>
           <p:nvSpPr>
-            <p:cNvPr id="70" name="tx70"/>
+            <p:cNvPr id="73" name="tx73"/>
             <p:cNvSpPr/>
             <p:nvPr/>
           </p:nvSpPr>
@@ -4890,7 +5016,7 @@
         </p:sp>
         <p:sp>
           <p:nvSpPr>
-            <p:cNvPr id="71" name="rc71"/>
+            <p:cNvPr id="74" name="rc74"/>
             <p:cNvSpPr/>
             <p:nvPr/>
           </p:nvSpPr>
@@ -4916,7 +5042,7 @@
         </p:sp>
         <p:sp>
           <p:nvSpPr>
-            <p:cNvPr id="72" name="pl72"/>
+            <p:cNvPr id="75" name="pl75"/>
             <p:cNvSpPr/>
             <p:nvPr/>
           </p:nvSpPr>
@@ -4959,13 +5085,13 @@
         </p:sp>
         <p:sp>
           <p:nvSpPr>
-            <p:cNvPr id="73" name="pl73"/>
-            <p:cNvSpPr/>
-            <p:nvPr/>
-          </p:nvSpPr>
-          <p:spPr>
-            <a:xfrm>
-              <a:off x="5752266" y="2267385"/>
+            <p:cNvPr id="76" name="pl76"/>
+            <p:cNvSpPr/>
+            <p:nvPr/>
+          </p:nvSpPr>
+          <p:spPr>
+            <a:xfrm>
+              <a:off x="5752266" y="2302026"/>
               <a:ext cx="4501084" cy="0"/>
             </a:xfrm>
             <a:custGeom>
@@ -5002,13 +5128,13 @@
         </p:sp>
         <p:sp>
           <p:nvSpPr>
-            <p:cNvPr id="74" name="pl74"/>
-            <p:cNvSpPr/>
-            <p:nvPr/>
-          </p:nvSpPr>
-          <p:spPr>
-            <a:xfrm>
-              <a:off x="5752266" y="1573187"/>
+            <p:cNvPr id="77" name="pl77"/>
+            <p:cNvSpPr/>
+            <p:nvPr/>
+          </p:nvSpPr>
+          <p:spPr>
+            <a:xfrm>
+              <a:off x="5752266" y="1642469"/>
               <a:ext cx="4501084" cy="0"/>
             </a:xfrm>
             <a:custGeom>
@@ -5045,13 +5171,13 @@
         </p:sp>
         <p:sp>
           <p:nvSpPr>
-            <p:cNvPr id="75" name="pl75"/>
-            <p:cNvSpPr/>
-            <p:nvPr/>
-          </p:nvSpPr>
-          <p:spPr>
-            <a:xfrm>
-              <a:off x="5752266" y="878990"/>
+            <p:cNvPr id="78" name="pl78"/>
+            <p:cNvSpPr/>
+            <p:nvPr/>
+          </p:nvSpPr>
+          <p:spPr>
+            <a:xfrm>
+              <a:off x="5752266" y="982912"/>
               <a:ext cx="4501084" cy="0"/>
             </a:xfrm>
             <a:custGeom>
@@ -5088,7 +5214,7 @@
         </p:sp>
         <p:sp>
           <p:nvSpPr>
-            <p:cNvPr id="76" name="pl76"/>
+            <p:cNvPr id="79" name="pl79"/>
             <p:cNvSpPr/>
             <p:nvPr/>
           </p:nvSpPr>
@@ -5131,42 +5257,42 @@
         </p:sp>
         <p:sp>
           <p:nvSpPr>
-            <p:cNvPr id="77" name="pg77"/>
+            <p:cNvPr id="80" name="pg80"/>
             <p:cNvSpPr/>
             <p:nvPr/>
           </p:nvSpPr>
           <p:spPr>
             <a:xfrm>
               <a:off x="5956861" y="920789"/>
-              <a:ext cx="4091894" cy="1230277"/>
+              <a:ext cx="4091894" cy="1195307"/>
             </a:xfrm>
             <a:custGeom>
               <a:avLst/>
               <a:pathLst>
-                <a:path w="4091894" h="1230277">
+                <a:path w="4091894" h="1195307">
                   <a:moveTo>
-                    <a:pt x="0" y="59059"/>
+                    <a:pt x="0" y="64131"/>
                   </a:moveTo>
                   <a:lnTo>
                     <a:pt x="1363964" y="0"/>
                   </a:lnTo>
                   <a:lnTo>
-                    <a:pt x="2727929" y="18802"/>
-                  </a:lnTo>
-                  <a:lnTo>
-                    <a:pt x="4091894" y="38415"/>
-                  </a:lnTo>
-                  <a:lnTo>
-                    <a:pt x="4091894" y="1198196"/>
-                  </a:lnTo>
-                  <a:lnTo>
-                    <a:pt x="2727929" y="1189466"/>
-                  </a:lnTo>
-                  <a:lnTo>
-                    <a:pt x="1363964" y="1186280"/>
-                  </a:lnTo>
-                  <a:lnTo>
-                    <a:pt x="0" y="1230277"/>
+                    <a:pt x="2727929" y="25607"/>
+                  </a:lnTo>
+                  <a:lnTo>
+                    <a:pt x="4091894" y="52343"/>
+                  </a:lnTo>
+                  <a:lnTo>
+                    <a:pt x="4091894" y="1171008"/>
+                  </a:lnTo>
+                  <a:lnTo>
+                    <a:pt x="2727929" y="1156642"/>
+                  </a:lnTo>
+                  <a:lnTo>
+                    <a:pt x="1363964" y="1146573"/>
+                  </a:lnTo>
+                  <a:lnTo>
+                    <a:pt x="0" y="1195307"/>
                   </a:lnTo>
                   <a:close/>
                 </a:path>
@@ -5186,30 +5312,30 @@
         </p:sp>
         <p:sp>
           <p:nvSpPr>
-            <p:cNvPr id="78" name="pl78"/>
+            <p:cNvPr id="81" name="pl81"/>
             <p:cNvSpPr/>
             <p:nvPr/>
           </p:nvSpPr>
           <p:spPr>
             <a:xfrm>
               <a:off x="5956861" y="920789"/>
-              <a:ext cx="4091894" cy="59059"/>
+              <a:ext cx="4091894" cy="64131"/>
             </a:xfrm>
             <a:custGeom>
               <a:avLst/>
               <a:pathLst>
-                <a:path w="4091894" h="59059">
+                <a:path w="4091894" h="64131">
                   <a:moveTo>
-                    <a:pt x="0" y="59059"/>
+                    <a:pt x="0" y="64131"/>
                   </a:moveTo>
                   <a:lnTo>
                     <a:pt x="1363964" y="0"/>
                   </a:lnTo>
                   <a:lnTo>
-                    <a:pt x="2727929" y="18802"/>
-                  </a:lnTo>
-                  <a:lnTo>
-                    <a:pt x="4091894" y="38415"/>
+                    <a:pt x="2727929" y="25607"/>
+                  </a:lnTo>
+                  <a:lnTo>
+                    <a:pt x="4091894" y="52343"/>
                   </a:lnTo>
                 </a:path>
               </a:pathLst>
@@ -5223,30 +5349,30 @@
         </p:sp>
         <p:sp>
           <p:nvSpPr>
-            <p:cNvPr id="79" name="pl79"/>
-            <p:cNvSpPr/>
-            <p:nvPr/>
-          </p:nvSpPr>
-          <p:spPr>
-            <a:xfrm>
-              <a:off x="5956861" y="2107069"/>
-              <a:ext cx="4091894" cy="43997"/>
+            <p:cNvPr id="82" name="pl82"/>
+            <p:cNvSpPr/>
+            <p:nvPr/>
+          </p:nvSpPr>
+          <p:spPr>
+            <a:xfrm>
+              <a:off x="5956861" y="2067362"/>
+              <a:ext cx="4091894" cy="48734"/>
             </a:xfrm>
             <a:custGeom>
               <a:avLst/>
               <a:pathLst>
-                <a:path w="4091894" h="43997">
+                <a:path w="4091894" h="48734">
                   <a:moveTo>
-                    <a:pt x="4091894" y="11916"/>
+                    <a:pt x="4091894" y="24435"/>
                   </a:moveTo>
                   <a:lnTo>
-                    <a:pt x="2727929" y="3186"/>
+                    <a:pt x="2727929" y="10069"/>
                   </a:lnTo>
                   <a:lnTo>
                     <a:pt x="1363964" y="0"/>
                   </a:lnTo>
                   <a:lnTo>
-                    <a:pt x="0" y="43997"/>
+                    <a:pt x="0" y="48734"/>
                   </a:lnTo>
                 </a:path>
               </a:pathLst>
@@ -5260,42 +5386,42 @@
         </p:sp>
         <p:sp>
           <p:nvSpPr>
-            <p:cNvPr id="80" name="pg80"/>
-            <p:cNvSpPr/>
-            <p:nvPr/>
-          </p:nvSpPr>
-          <p:spPr>
-            <a:xfrm>
-              <a:off x="5956861" y="1108908"/>
-              <a:ext cx="4091894" cy="1190145"/>
+            <p:cNvPr id="83" name="pg83"/>
+            <p:cNvSpPr/>
+            <p:nvPr/>
+          </p:nvSpPr>
+          <p:spPr>
+            <a:xfrm>
+              <a:off x="5956861" y="1059659"/>
+              <a:ext cx="4091894" cy="1177132"/>
             </a:xfrm>
             <a:custGeom>
               <a:avLst/>
               <a:pathLst>
-                <a:path w="4091894" h="1190145">
+                <a:path w="4091894" h="1177132">
                   <a:moveTo>
-                    <a:pt x="0" y="48679"/>
+                    <a:pt x="0" y="70856"/>
                   </a:moveTo>
                   <a:lnTo>
                     <a:pt x="1363964" y="0"/>
                   </a:lnTo>
                   <a:lnTo>
-                    <a:pt x="2727929" y="53971"/>
-                  </a:lnTo>
-                  <a:lnTo>
-                    <a:pt x="4091894" y="72693"/>
-                  </a:lnTo>
-                  <a:lnTo>
-                    <a:pt x="4091894" y="1190145"/>
-                  </a:lnTo>
-                  <a:lnTo>
-                    <a:pt x="2727929" y="1181872"/>
-                  </a:lnTo>
-                  <a:lnTo>
-                    <a:pt x="1363964" y="1157626"/>
-                  </a:lnTo>
-                  <a:lnTo>
-                    <a:pt x="0" y="1187298"/>
+                    <a:pt x="2727929" y="68200"/>
+                  </a:lnTo>
+                  <a:lnTo>
+                    <a:pt x="4091894" y="93306"/>
+                  </a:lnTo>
+                  <a:lnTo>
+                    <a:pt x="4091894" y="1177132"/>
+                  </a:lnTo>
+                  <a:lnTo>
+                    <a:pt x="2727929" y="1164417"/>
+                  </a:lnTo>
+                  <a:lnTo>
+                    <a:pt x="1363964" y="1128224"/>
+                  </a:lnTo>
+                  <a:lnTo>
+                    <a:pt x="0" y="1176760"/>
                   </a:lnTo>
                   <a:close/>
                 </a:path>
@@ -5315,30 +5441,30 @@
         </p:sp>
         <p:sp>
           <p:nvSpPr>
-            <p:cNvPr id="81" name="pl81"/>
-            <p:cNvSpPr/>
-            <p:nvPr/>
-          </p:nvSpPr>
-          <p:spPr>
-            <a:xfrm>
-              <a:off x="5956861" y="1108908"/>
-              <a:ext cx="4091894" cy="72693"/>
+            <p:cNvPr id="84" name="pl84"/>
+            <p:cNvSpPr/>
+            <p:nvPr/>
+          </p:nvSpPr>
+          <p:spPr>
+            <a:xfrm>
+              <a:off x="5956861" y="1059659"/>
+              <a:ext cx="4091894" cy="93306"/>
             </a:xfrm>
             <a:custGeom>
               <a:avLst/>
               <a:pathLst>
-                <a:path w="4091894" h="72693">
+                <a:path w="4091894" h="93306">
                   <a:moveTo>
-                    <a:pt x="0" y="48679"/>
+                    <a:pt x="0" y="70856"/>
                   </a:moveTo>
                   <a:lnTo>
                     <a:pt x="1363964" y="0"/>
                   </a:lnTo>
                   <a:lnTo>
-                    <a:pt x="2727929" y="53971"/>
-                  </a:lnTo>
-                  <a:lnTo>
-                    <a:pt x="4091894" y="72693"/>
+                    <a:pt x="2727929" y="68200"/>
+                  </a:lnTo>
+                  <a:lnTo>
+                    <a:pt x="4091894" y="93306"/>
                   </a:lnTo>
                 </a:path>
               </a:pathLst>
@@ -5352,30 +5478,30 @@
         </p:sp>
         <p:sp>
           <p:nvSpPr>
-            <p:cNvPr id="82" name="pl82"/>
-            <p:cNvSpPr/>
-            <p:nvPr/>
-          </p:nvSpPr>
-          <p:spPr>
-            <a:xfrm>
-              <a:off x="5956861" y="2266534"/>
-              <a:ext cx="4091894" cy="32519"/>
+            <p:cNvPr id="85" name="pl85"/>
+            <p:cNvSpPr/>
+            <p:nvPr/>
+          </p:nvSpPr>
+          <p:spPr>
+            <a:xfrm>
+              <a:off x="5956861" y="2187883"/>
+              <a:ext cx="4091894" cy="48908"/>
             </a:xfrm>
             <a:custGeom>
               <a:avLst/>
               <a:pathLst>
-                <a:path w="4091894" h="32519">
+                <a:path w="4091894" h="48908">
                   <a:moveTo>
-                    <a:pt x="4091894" y="32519"/>
+                    <a:pt x="4091894" y="48908"/>
                   </a:moveTo>
                   <a:lnTo>
-                    <a:pt x="2727929" y="24246"/>
+                    <a:pt x="2727929" y="36193"/>
                   </a:lnTo>
                   <a:lnTo>
                     <a:pt x="1363964" y="0"/>
                   </a:lnTo>
                   <a:lnTo>
-                    <a:pt x="0" y="29672"/>
+                    <a:pt x="0" y="48536"/>
                   </a:lnTo>
                 </a:path>
               </a:pathLst>
@@ -5389,42 +5515,42 @@
         </p:sp>
         <p:sp>
           <p:nvSpPr>
-            <p:cNvPr id="83" name="pg83"/>
-            <p:cNvSpPr/>
-            <p:nvPr/>
-          </p:nvSpPr>
-          <p:spPr>
-            <a:xfrm>
-              <a:off x="5956861" y="1049089"/>
-              <a:ext cx="4091894" cy="1221950"/>
+            <p:cNvPr id="86" name="pg86"/>
+            <p:cNvSpPr/>
+            <p:nvPr/>
+          </p:nvSpPr>
+          <p:spPr>
+            <a:xfrm>
+              <a:off x="5956861" y="996659"/>
+              <a:ext cx="4091894" cy="1212041"/>
             </a:xfrm>
             <a:custGeom>
               <a:avLst/>
               <a:pathLst>
-                <a:path w="4091894" h="1221950">
+                <a:path w="4091894" h="1212041">
                   <a:moveTo>
-                    <a:pt x="0" y="75892"/>
+                    <a:pt x="0" y="97828"/>
                   </a:moveTo>
                   <a:lnTo>
                     <a:pt x="1363964" y="0"/>
                   </a:lnTo>
                   <a:lnTo>
-                    <a:pt x="2727929" y="31740"/>
-                  </a:lnTo>
-                  <a:lnTo>
-                    <a:pt x="4091894" y="20104"/>
-                  </a:lnTo>
-                  <a:lnTo>
-                    <a:pt x="4091894" y="1164572"/>
-                  </a:lnTo>
-                  <a:lnTo>
-                    <a:pt x="2727929" y="1181460"/>
-                  </a:lnTo>
-                  <a:lnTo>
-                    <a:pt x="1363964" y="1171263"/>
-                  </a:lnTo>
-                  <a:lnTo>
-                    <a:pt x="0" y="1221950"/>
+                    <a:pt x="2727929" y="48892"/>
+                  </a:lnTo>
+                  <a:lnTo>
+                    <a:pt x="4091894" y="49173"/>
+                  </a:lnTo>
+                  <a:lnTo>
+                    <a:pt x="4091894" y="1159997"/>
+                  </a:lnTo>
+                  <a:lnTo>
+                    <a:pt x="2727929" y="1168067"/>
+                  </a:lnTo>
+                  <a:lnTo>
+                    <a:pt x="1363964" y="1143027"/>
+                  </a:lnTo>
+                  <a:lnTo>
+                    <a:pt x="0" y="1212041"/>
                   </a:lnTo>
                   <a:close/>
                 </a:path>
@@ -5444,30 +5570,30 @@
         </p:sp>
         <p:sp>
           <p:nvSpPr>
-            <p:cNvPr id="84" name="pl84"/>
-            <p:cNvSpPr/>
-            <p:nvPr/>
-          </p:nvSpPr>
-          <p:spPr>
-            <a:xfrm>
-              <a:off x="5956861" y="1049089"/>
-              <a:ext cx="4091894" cy="75892"/>
+            <p:cNvPr id="87" name="pl87"/>
+            <p:cNvSpPr/>
+            <p:nvPr/>
+          </p:nvSpPr>
+          <p:spPr>
+            <a:xfrm>
+              <a:off x="5956861" y="996659"/>
+              <a:ext cx="4091894" cy="97828"/>
             </a:xfrm>
             <a:custGeom>
               <a:avLst/>
               <a:pathLst>
-                <a:path w="4091894" h="75892">
+                <a:path w="4091894" h="97828">
                   <a:moveTo>
-                    <a:pt x="0" y="75892"/>
+                    <a:pt x="0" y="97828"/>
                   </a:moveTo>
                   <a:lnTo>
                     <a:pt x="1363964" y="0"/>
                   </a:lnTo>
                   <a:lnTo>
-                    <a:pt x="2727929" y="31740"/>
-                  </a:lnTo>
-                  <a:lnTo>
-                    <a:pt x="4091894" y="20104"/>
+                    <a:pt x="2727929" y="48892"/>
+                  </a:lnTo>
+                  <a:lnTo>
+                    <a:pt x="4091894" y="49173"/>
                   </a:lnTo>
                 </a:path>
               </a:pathLst>
@@ -5481,30 +5607,30 @@
         </p:sp>
         <p:sp>
           <p:nvSpPr>
-            <p:cNvPr id="85" name="pl85"/>
-            <p:cNvSpPr/>
-            <p:nvPr/>
-          </p:nvSpPr>
-          <p:spPr>
-            <a:xfrm>
-              <a:off x="5956861" y="2213662"/>
-              <a:ext cx="4091894" cy="57377"/>
+            <p:cNvPr id="88" name="pl88"/>
+            <p:cNvSpPr/>
+            <p:nvPr/>
+          </p:nvSpPr>
+          <p:spPr>
+            <a:xfrm>
+              <a:off x="5956861" y="2139686"/>
+              <a:ext cx="4091894" cy="69014"/>
             </a:xfrm>
             <a:custGeom>
               <a:avLst/>
               <a:pathLst>
-                <a:path w="4091894" h="57377">
+                <a:path w="4091894" h="69014">
                   <a:moveTo>
-                    <a:pt x="4091894" y="0"/>
+                    <a:pt x="4091894" y="16969"/>
                   </a:moveTo>
                   <a:lnTo>
-                    <a:pt x="2727929" y="16887"/>
-                  </a:lnTo>
-                  <a:lnTo>
-                    <a:pt x="1363964" y="6690"/>
-                  </a:lnTo>
-                  <a:lnTo>
-                    <a:pt x="0" y="57377"/>
+                    <a:pt x="2727929" y="25040"/>
+                  </a:lnTo>
+                  <a:lnTo>
+                    <a:pt x="1363964" y="0"/>
+                  </a:lnTo>
+                  <a:lnTo>
+                    <a:pt x="0" y="69014"/>
                   </a:lnTo>
                 </a:path>
               </a:pathLst>
@@ -5518,30 +5644,30 @@
         </p:sp>
         <p:sp>
           <p:nvSpPr>
-            <p:cNvPr id="86" name="pl86"/>
-            <p:cNvSpPr/>
-            <p:nvPr/>
-          </p:nvSpPr>
-          <p:spPr>
-            <a:xfrm>
-              <a:off x="5956861" y="1549823"/>
-              <a:ext cx="4091894" cy="50992"/>
+            <p:cNvPr id="89" name="pl89"/>
+            <p:cNvSpPr/>
+            <p:nvPr/>
+          </p:nvSpPr>
+          <p:spPr>
+            <a:xfrm>
+              <a:off x="5956861" y="1528686"/>
+              <a:ext cx="4091894" cy="55913"/>
             </a:xfrm>
             <a:custGeom>
               <a:avLst/>
               <a:pathLst>
-                <a:path w="4091894" h="50992">
+                <a:path w="4091894" h="55913">
                   <a:moveTo>
-                    <a:pt x="0" y="50992"/>
+                    <a:pt x="0" y="55913"/>
                   </a:moveTo>
                   <a:lnTo>
                     <a:pt x="1363964" y="0"/>
                   </a:lnTo>
                   <a:lnTo>
-                    <a:pt x="2727929" y="10130"/>
-                  </a:lnTo>
-                  <a:lnTo>
-                    <a:pt x="4091894" y="23752"/>
+                    <a:pt x="2727929" y="17030"/>
+                  </a:lnTo>
+                  <a:lnTo>
+                    <a:pt x="4091894" y="36988"/>
                   </a:lnTo>
                 </a:path>
               </a:pathLst>
@@ -5564,30 +5690,30 @@
         </p:sp>
         <p:sp>
           <p:nvSpPr>
-            <p:cNvPr id="87" name="pl87"/>
-            <p:cNvSpPr/>
-            <p:nvPr/>
-          </p:nvSpPr>
-          <p:spPr>
-            <a:xfrm>
-              <a:off x="5956861" y="1723157"/>
-              <a:ext cx="4091894" cy="50553"/>
+            <p:cNvPr id="90" name="pl90"/>
+            <p:cNvSpPr/>
+            <p:nvPr/>
+          </p:nvSpPr>
+          <p:spPr>
+            <a:xfrm>
+              <a:off x="5956861" y="1658223"/>
+              <a:ext cx="4091894" cy="68938"/>
             </a:xfrm>
             <a:custGeom>
               <a:avLst/>
               <a:pathLst>
-                <a:path w="4091894" h="50553">
+                <a:path w="4091894" h="68938">
                   <a:moveTo>
-                    <a:pt x="0" y="38305"/>
+                    <a:pt x="0" y="58776"/>
                   </a:moveTo>
                   <a:lnTo>
                     <a:pt x="1363964" y="0"/>
                   </a:lnTo>
                   <a:lnTo>
-                    <a:pt x="2727929" y="37587"/>
-                  </a:lnTo>
-                  <a:lnTo>
-                    <a:pt x="4091894" y="50553"/>
+                    <a:pt x="2727929" y="50635"/>
+                  </a:lnTo>
+                  <a:lnTo>
+                    <a:pt x="4091894" y="68938"/>
                   </a:lnTo>
                 </a:path>
               </a:pathLst>
@@ -5610,30 +5736,30 @@
         </p:sp>
         <p:sp>
           <p:nvSpPr>
-            <p:cNvPr id="88" name="pl88"/>
-            <p:cNvSpPr/>
-            <p:nvPr/>
-          </p:nvSpPr>
-          <p:spPr>
-            <a:xfrm>
-              <a:off x="5956861" y="1670597"/>
-              <a:ext cx="4091894" cy="62219"/>
+            <p:cNvPr id="91" name="pl91"/>
+            <p:cNvSpPr/>
+            <p:nvPr/>
+          </p:nvSpPr>
+          <p:spPr>
+            <a:xfrm>
+              <a:off x="5956861" y="1603116"/>
+              <a:ext cx="4091894" cy="82281"/>
             </a:xfrm>
             <a:custGeom>
               <a:avLst/>
               <a:pathLst>
-                <a:path w="4091894" h="62219">
+                <a:path w="4091894" h="82281">
                   <a:moveTo>
-                    <a:pt x="0" y="62219"/>
+                    <a:pt x="0" y="82281"/>
                   </a:moveTo>
                   <a:lnTo>
                     <a:pt x="1363964" y="0"/>
                   </a:lnTo>
                   <a:lnTo>
-                    <a:pt x="2727929" y="19809"/>
-                  </a:lnTo>
-                  <a:lnTo>
-                    <a:pt x="4091894" y="5126"/>
+                    <a:pt x="2727929" y="35786"/>
+                  </a:lnTo>
+                  <a:lnTo>
+                    <a:pt x="4091894" y="31359"/>
                   </a:lnTo>
                 </a:path>
               </a:pathLst>
@@ -5656,13 +5782,13 @@
         </p:sp>
         <p:sp>
           <p:nvSpPr>
-            <p:cNvPr id="89" name="pt89"/>
-            <p:cNvSpPr/>
-            <p:nvPr/>
-          </p:nvSpPr>
-          <p:spPr>
-            <a:xfrm>
-              <a:off x="5933799" y="1709754"/>
+            <p:cNvPr id="92" name="pt92"/>
+            <p:cNvSpPr/>
+            <p:nvPr/>
+          </p:nvSpPr>
+          <p:spPr>
+            <a:xfrm>
+              <a:off x="5933799" y="1662335"/>
               <a:ext cx="46123" cy="46123"/>
             </a:xfrm>
             <a:prstGeom prst="ellipse">
@@ -5691,13 +5817,13 @@
         </p:sp>
         <p:sp>
           <p:nvSpPr>
-            <p:cNvPr id="90" name="pt90"/>
-            <p:cNvSpPr/>
-            <p:nvPr/>
-          </p:nvSpPr>
-          <p:spPr>
-            <a:xfrm>
-              <a:off x="7297764" y="1647535"/>
+            <p:cNvPr id="93" name="pt93"/>
+            <p:cNvSpPr/>
+            <p:nvPr/>
+          </p:nvSpPr>
+          <p:spPr>
+            <a:xfrm>
+              <a:off x="7297764" y="1580054"/>
               <a:ext cx="46123" cy="46123"/>
             </a:xfrm>
             <a:prstGeom prst="ellipse">
@@ -5726,13 +5852,13 @@
         </p:sp>
         <p:sp>
           <p:nvSpPr>
-            <p:cNvPr id="91" name="pt91"/>
-            <p:cNvSpPr/>
-            <p:nvPr/>
-          </p:nvSpPr>
-          <p:spPr>
-            <a:xfrm>
-              <a:off x="8661729" y="1667344"/>
+            <p:cNvPr id="94" name="pt94"/>
+            <p:cNvSpPr/>
+            <p:nvPr/>
+          </p:nvSpPr>
+          <p:spPr>
+            <a:xfrm>
+              <a:off x="8661729" y="1615840"/>
               <a:ext cx="46123" cy="46123"/>
             </a:xfrm>
             <a:prstGeom prst="ellipse">
@@ -5761,13 +5887,13 @@
         </p:sp>
         <p:sp>
           <p:nvSpPr>
-            <p:cNvPr id="92" name="pt92"/>
-            <p:cNvSpPr/>
-            <p:nvPr/>
-          </p:nvSpPr>
-          <p:spPr>
-            <a:xfrm>
-              <a:off x="10025694" y="1652661"/>
+            <p:cNvPr id="95" name="pt95"/>
+            <p:cNvSpPr/>
+            <p:nvPr/>
+          </p:nvSpPr>
+          <p:spPr>
+            <a:xfrm>
+              <a:off x="10025694" y="1611414"/>
               <a:ext cx="46123" cy="46123"/>
             </a:xfrm>
             <a:prstGeom prst="ellipse">
@@ -5796,13 +5922,13 @@
         </p:sp>
         <p:sp>
           <p:nvSpPr>
-            <p:cNvPr id="93" name="pt93"/>
-            <p:cNvSpPr/>
-            <p:nvPr/>
-          </p:nvSpPr>
-          <p:spPr>
-            <a:xfrm>
-              <a:off x="5933799" y="1738400"/>
+            <p:cNvPr id="96" name="pt96"/>
+            <p:cNvSpPr/>
+            <p:nvPr/>
+          </p:nvSpPr>
+          <p:spPr>
+            <a:xfrm>
+              <a:off x="5933799" y="1693938"/>
               <a:ext cx="46123" cy="46123"/>
             </a:xfrm>
             <a:prstGeom prst="ellipse">
@@ -5831,13 +5957,13 @@
         </p:sp>
         <p:sp>
           <p:nvSpPr>
-            <p:cNvPr id="94" name="pt94"/>
-            <p:cNvSpPr/>
-            <p:nvPr/>
-          </p:nvSpPr>
-          <p:spPr>
-            <a:xfrm>
-              <a:off x="7297764" y="1700095"/>
+            <p:cNvPr id="97" name="pt97"/>
+            <p:cNvSpPr/>
+            <p:nvPr/>
+          </p:nvSpPr>
+          <p:spPr>
+            <a:xfrm>
+              <a:off x="7297764" y="1635161"/>
               <a:ext cx="46123" cy="46123"/>
             </a:xfrm>
             <a:prstGeom prst="ellipse">
@@ -5866,13 +5992,13 @@
         </p:sp>
         <p:sp>
           <p:nvSpPr>
-            <p:cNvPr id="95" name="pt95"/>
-            <p:cNvSpPr/>
-            <p:nvPr/>
-          </p:nvSpPr>
-          <p:spPr>
-            <a:xfrm>
-              <a:off x="8661729" y="1737683"/>
+            <p:cNvPr id="98" name="pt98"/>
+            <p:cNvSpPr/>
+            <p:nvPr/>
+          </p:nvSpPr>
+          <p:spPr>
+            <a:xfrm>
+              <a:off x="8661729" y="1685797"/>
               <a:ext cx="46123" cy="46123"/>
             </a:xfrm>
             <a:prstGeom prst="ellipse">
@@ -5901,13 +6027,13 @@
         </p:sp>
         <p:sp>
           <p:nvSpPr>
-            <p:cNvPr id="96" name="pt96"/>
-            <p:cNvSpPr/>
-            <p:nvPr/>
-          </p:nvSpPr>
-          <p:spPr>
-            <a:xfrm>
-              <a:off x="10025694" y="1750649"/>
+            <p:cNvPr id="99" name="pt99"/>
+            <p:cNvSpPr/>
+            <p:nvPr/>
+          </p:nvSpPr>
+          <p:spPr>
+            <a:xfrm>
+              <a:off x="10025694" y="1704099"/>
               <a:ext cx="46123" cy="46123"/>
             </a:xfrm>
             <a:prstGeom prst="ellipse">
@@ -5936,13 +6062,13 @@
         </p:sp>
         <p:sp>
           <p:nvSpPr>
-            <p:cNvPr id="97" name="pt97"/>
-            <p:cNvSpPr/>
-            <p:nvPr/>
-          </p:nvSpPr>
-          <p:spPr>
-            <a:xfrm>
-              <a:off x="5933799" y="1577754"/>
+            <p:cNvPr id="100" name="pt100"/>
+            <p:cNvSpPr/>
+            <p:nvPr/>
+          </p:nvSpPr>
+          <p:spPr>
+            <a:xfrm>
+              <a:off x="5933799" y="1561537"/>
               <a:ext cx="46123" cy="46123"/>
             </a:xfrm>
             <a:prstGeom prst="ellipse">
@@ -5971,13 +6097,13 @@
         </p:sp>
         <p:sp>
           <p:nvSpPr>
-            <p:cNvPr id="98" name="pt98"/>
-            <p:cNvSpPr/>
-            <p:nvPr/>
-          </p:nvSpPr>
-          <p:spPr>
-            <a:xfrm>
-              <a:off x="7297764" y="1526762"/>
+            <p:cNvPr id="101" name="pt101"/>
+            <p:cNvSpPr/>
+            <p:nvPr/>
+          </p:nvSpPr>
+          <p:spPr>
+            <a:xfrm>
+              <a:off x="7297764" y="1505624"/>
               <a:ext cx="46123" cy="46123"/>
             </a:xfrm>
             <a:prstGeom prst="ellipse">
@@ -6006,13 +6132,13 @@
         </p:sp>
         <p:sp>
           <p:nvSpPr>
-            <p:cNvPr id="99" name="pt99"/>
-            <p:cNvSpPr/>
-            <p:nvPr/>
-          </p:nvSpPr>
-          <p:spPr>
-            <a:xfrm>
-              <a:off x="8661729" y="1536892"/>
+            <p:cNvPr id="102" name="pt102"/>
+            <p:cNvSpPr/>
+            <p:nvPr/>
+          </p:nvSpPr>
+          <p:spPr>
+            <a:xfrm>
+              <a:off x="8661729" y="1522654"/>
               <a:ext cx="46123" cy="46123"/>
             </a:xfrm>
             <a:prstGeom prst="ellipse">
@@ -6041,13 +6167,13 @@
         </p:sp>
         <p:sp>
           <p:nvSpPr>
-            <p:cNvPr id="100" name="pt100"/>
-            <p:cNvSpPr/>
-            <p:nvPr/>
-          </p:nvSpPr>
-          <p:spPr>
-            <a:xfrm>
-              <a:off x="10025694" y="1550514"/>
+            <p:cNvPr id="103" name="pt103"/>
+            <p:cNvSpPr/>
+            <p:nvPr/>
+          </p:nvSpPr>
+          <p:spPr>
+            <a:xfrm>
+              <a:off x="10025694" y="1542613"/>
               <a:ext cx="46123" cy="46123"/>
             </a:xfrm>
             <a:prstGeom prst="ellipse">
@@ -6076,7 +6202,7 @@
         </p:sp>
         <p:sp>
           <p:nvSpPr>
-            <p:cNvPr id="101" name="pl101"/>
+            <p:cNvPr id="104" name="pl104"/>
             <p:cNvSpPr/>
             <p:nvPr/>
           </p:nvSpPr>
@@ -6116,7 +6242,7 @@
         </p:sp>
         <p:sp>
           <p:nvSpPr>
-            <p:cNvPr id="102" name="tx102"/>
+            <p:cNvPr id="105" name="tx105"/>
             <p:cNvSpPr/>
             <p:nvPr/>
           </p:nvSpPr>
@@ -6159,13 +6285,13 @@
         </p:sp>
         <p:sp>
           <p:nvSpPr>
-            <p:cNvPr id="103" name="tx103"/>
-            <p:cNvSpPr/>
-            <p:nvPr/>
-          </p:nvSpPr>
-          <p:spPr>
-            <a:xfrm>
-              <a:off x="5554055" y="2230992"/>
+            <p:cNvPr id="106" name="tx106"/>
+            <p:cNvSpPr/>
+            <p:nvPr/>
+          </p:nvSpPr>
+          <p:spPr>
+            <a:xfrm>
+              <a:off x="5554055" y="2265633"/>
               <a:ext cx="141274" cy="72786"/>
             </a:xfrm>
             <a:prstGeom prst="rect">
@@ -6202,13 +6328,13 @@
         </p:sp>
         <p:sp>
           <p:nvSpPr>
-            <p:cNvPr id="104" name="tx104"/>
-            <p:cNvSpPr/>
-            <p:nvPr/>
-          </p:nvSpPr>
-          <p:spPr>
-            <a:xfrm>
-              <a:off x="5554055" y="1536794"/>
+            <p:cNvPr id="107" name="tx107"/>
+            <p:cNvSpPr/>
+            <p:nvPr/>
+          </p:nvSpPr>
+          <p:spPr>
+            <a:xfrm>
+              <a:off x="5554055" y="1606076"/>
               <a:ext cx="141274" cy="72786"/>
             </a:xfrm>
             <a:prstGeom prst="rect">
@@ -6245,13 +6371,13 @@
         </p:sp>
         <p:sp>
           <p:nvSpPr>
-            <p:cNvPr id="105" name="tx105"/>
-            <p:cNvSpPr/>
-            <p:nvPr/>
-          </p:nvSpPr>
-          <p:spPr>
-            <a:xfrm>
-              <a:off x="5554055" y="842597"/>
+            <p:cNvPr id="108" name="tx108"/>
+            <p:cNvSpPr/>
+            <p:nvPr/>
+          </p:nvSpPr>
+          <p:spPr>
+            <a:xfrm>
+              <a:off x="5554055" y="946519"/>
               <a:ext cx="141274" cy="72786"/>
             </a:xfrm>
             <a:prstGeom prst="rect">
@@ -6288,7 +6414,7 @@
         </p:sp>
         <p:sp>
           <p:nvSpPr>
-            <p:cNvPr id="106" name="pl106"/>
+            <p:cNvPr id="109" name="pl109"/>
             <p:cNvSpPr/>
             <p:nvPr/>
           </p:nvSpPr>
@@ -6328,13 +6454,13 @@
         </p:sp>
         <p:sp>
           <p:nvSpPr>
-            <p:cNvPr id="107" name="pl107"/>
-            <p:cNvSpPr/>
-            <p:nvPr/>
-          </p:nvSpPr>
-          <p:spPr>
-            <a:xfrm>
-              <a:off x="5720634" y="2267385"/>
+            <p:cNvPr id="110" name="pl110"/>
+            <p:cNvSpPr/>
+            <p:nvPr/>
+          </p:nvSpPr>
+          <p:spPr>
+            <a:xfrm>
+              <a:off x="5720634" y="2302026"/>
               <a:ext cx="31631" cy="0"/>
             </a:xfrm>
             <a:custGeom>
@@ -6368,13 +6494,13 @@
         </p:sp>
         <p:sp>
           <p:nvSpPr>
-            <p:cNvPr id="108" name="pl108"/>
-            <p:cNvSpPr/>
-            <p:nvPr/>
-          </p:nvSpPr>
-          <p:spPr>
-            <a:xfrm>
-              <a:off x="5720634" y="1573187"/>
+            <p:cNvPr id="111" name="pl111"/>
+            <p:cNvSpPr/>
+            <p:nvPr/>
+          </p:nvSpPr>
+          <p:spPr>
+            <a:xfrm>
+              <a:off x="5720634" y="1642469"/>
               <a:ext cx="31631" cy="0"/>
             </a:xfrm>
             <a:custGeom>
@@ -6408,13 +6534,13 @@
         </p:sp>
         <p:sp>
           <p:nvSpPr>
-            <p:cNvPr id="109" name="pl109"/>
-            <p:cNvSpPr/>
-            <p:nvPr/>
-          </p:nvSpPr>
-          <p:spPr>
-            <a:xfrm>
-              <a:off x="5720634" y="878990"/>
+            <p:cNvPr id="112" name="pl112"/>
+            <p:cNvSpPr/>
+            <p:nvPr/>
+          </p:nvSpPr>
+          <p:spPr>
+            <a:xfrm>
+              <a:off x="5720634" y="982912"/>
               <a:ext cx="31631" cy="0"/>
             </a:xfrm>
             <a:custGeom>
@@ -6448,7 +6574,7 @@
         </p:sp>
         <p:sp>
           <p:nvSpPr>
-            <p:cNvPr id="110" name="pl110"/>
+            <p:cNvPr id="113" name="pl113"/>
             <p:cNvSpPr/>
             <p:nvPr/>
           </p:nvSpPr>
@@ -6488,7 +6614,7 @@
         </p:sp>
         <p:sp>
           <p:nvSpPr>
-            <p:cNvPr id="111" name="pl111"/>
+            <p:cNvPr id="114" name="pl114"/>
             <p:cNvSpPr/>
             <p:nvPr/>
           </p:nvSpPr>
@@ -6528,7 +6654,7 @@
         </p:sp>
         <p:sp>
           <p:nvSpPr>
-            <p:cNvPr id="112" name="pl112"/>
+            <p:cNvPr id="115" name="pl115"/>
             <p:cNvSpPr/>
             <p:nvPr/>
           </p:nvSpPr>
@@ -6568,7 +6694,7 @@
         </p:sp>
         <p:sp>
           <p:nvSpPr>
-            <p:cNvPr id="113" name="pl113"/>
+            <p:cNvPr id="116" name="pl116"/>
             <p:cNvSpPr/>
             <p:nvPr/>
           </p:nvSpPr>
@@ -6608,7 +6734,7 @@
         </p:sp>
         <p:sp>
           <p:nvSpPr>
-            <p:cNvPr id="114" name="pl114"/>
+            <p:cNvPr id="117" name="pl117"/>
             <p:cNvSpPr/>
             <p:nvPr/>
           </p:nvSpPr>
@@ -6648,7 +6774,7 @@
         </p:sp>
         <p:sp>
           <p:nvSpPr>
-            <p:cNvPr id="115" name="tx115"/>
+            <p:cNvPr id="118" name="tx118"/>
             <p:cNvSpPr/>
             <p:nvPr/>
           </p:nvSpPr>
@@ -6691,7 +6817,7 @@
         </p:sp>
         <p:sp>
           <p:nvSpPr>
-            <p:cNvPr id="116" name="tx116"/>
+            <p:cNvPr id="119" name="tx119"/>
             <p:cNvSpPr/>
             <p:nvPr/>
           </p:nvSpPr>
@@ -6734,7 +6860,7 @@
         </p:sp>
         <p:sp>
           <p:nvSpPr>
-            <p:cNvPr id="117" name="tx117"/>
+            <p:cNvPr id="120" name="tx120"/>
             <p:cNvSpPr/>
             <p:nvPr/>
           </p:nvSpPr>
@@ -6777,7 +6903,7 @@
         </p:sp>
         <p:sp>
           <p:nvSpPr>
-            <p:cNvPr id="118" name="tx118"/>
+            <p:cNvPr id="121" name="tx121"/>
             <p:cNvSpPr/>
             <p:nvPr/>
           </p:nvSpPr>
@@ -6820,7 +6946,7 @@
         </p:sp>
         <p:sp>
           <p:nvSpPr>
-            <p:cNvPr id="119" name="tx119"/>
+            <p:cNvPr id="122" name="tx122"/>
             <p:cNvSpPr/>
             <p:nvPr/>
           </p:nvSpPr>
@@ -6863,7 +6989,7 @@
         </p:sp>
         <p:sp>
           <p:nvSpPr>
-            <p:cNvPr id="120" name="tx120"/>
+            <p:cNvPr id="123" name="tx123"/>
             <p:cNvSpPr/>
             <p:nvPr/>
           </p:nvSpPr>
@@ -6906,7 +7032,7 @@
         </p:sp>
         <p:sp>
           <p:nvSpPr>
-            <p:cNvPr id="121" name="tx121"/>
+            <p:cNvPr id="124" name="tx124"/>
             <p:cNvSpPr/>
             <p:nvPr/>
           </p:nvSpPr>
@@ -6942,14 +7068,14 @@
                   <a:latin typeface="Arial"/>
                   <a:cs typeface="Arial"/>
                 </a:rPr>
-                <a:t>1.34-1.41 across all twelve combinations,</a:t>
+                <a:t>1.37-1.43 across all twelve combinations,</a:t>
               </a:r>
             </a:p>
           </p:txBody>
         </p:sp>
         <p:sp>
           <p:nvSpPr>
-            <p:cNvPr id="122" name="tx122"/>
+            <p:cNvPr id="125" name="tx125"/>
             <p:cNvSpPr/>
             <p:nvPr/>
           </p:nvSpPr>
@@ -6992,7 +7118,7 @@
         </p:sp>
         <p:sp>
           <p:nvSpPr>
-            <p:cNvPr id="123" name="tx123"/>
+            <p:cNvPr id="126" name="tx126"/>
             <p:cNvSpPr/>
             <p:nvPr/>
           </p:nvSpPr>
@@ -7035,7 +7161,7 @@
         </p:sp>
         <p:sp>
           <p:nvSpPr>
-            <p:cNvPr id="124" name="tx124"/>
+            <p:cNvPr id="127" name="tx127"/>
             <p:cNvSpPr/>
             <p:nvPr/>
           </p:nvSpPr>
@@ -7078,7 +7204,7 @@
         </p:sp>
         <p:sp>
           <p:nvSpPr>
-            <p:cNvPr id="125" name="rc125"/>
+            <p:cNvPr id="128" name="rc128"/>
             <p:cNvSpPr/>
             <p:nvPr/>
           </p:nvSpPr>
@@ -7113,7 +7239,7 @@
         </p:sp>
         <p:sp>
           <p:nvSpPr>
-            <p:cNvPr id="126" name="rc126"/>
+            <p:cNvPr id="129" name="rc129"/>
             <p:cNvSpPr/>
             <p:nvPr/>
           </p:nvSpPr>
@@ -7148,7 +7274,7 @@
         </p:sp>
         <p:sp>
           <p:nvSpPr>
-            <p:cNvPr id="127" name="rc127"/>
+            <p:cNvPr id="130" name="rc130"/>
             <p:cNvSpPr/>
             <p:nvPr/>
           </p:nvSpPr>
@@ -7174,13 +7300,13 @@
         </p:sp>
         <p:sp>
           <p:nvSpPr>
-            <p:cNvPr id="128" name="pl128"/>
-            <p:cNvSpPr/>
-            <p:nvPr/>
-          </p:nvSpPr>
-          <p:spPr>
-            <a:xfrm>
-              <a:off x="701215" y="6075797"/>
+            <p:cNvPr id="131" name="pl131"/>
+            <p:cNvSpPr/>
+            <p:nvPr/>
+          </p:nvSpPr>
+          <p:spPr>
+            <a:xfrm>
+              <a:off x="701215" y="6003957"/>
               <a:ext cx="4515211" cy="0"/>
             </a:xfrm>
             <a:custGeom>
@@ -7217,13 +7343,13 @@
         </p:sp>
         <p:sp>
           <p:nvSpPr>
-            <p:cNvPr id="129" name="pl129"/>
-            <p:cNvSpPr/>
-            <p:nvPr/>
-          </p:nvSpPr>
-          <p:spPr>
-            <a:xfrm>
-              <a:off x="701215" y="5529211"/>
+            <p:cNvPr id="132" name="pl132"/>
+            <p:cNvSpPr/>
+            <p:nvPr/>
+          </p:nvSpPr>
+          <p:spPr>
+            <a:xfrm>
+              <a:off x="701215" y="5402287"/>
               <a:ext cx="4515211" cy="0"/>
             </a:xfrm>
             <a:custGeom>
@@ -7260,13 +7386,13 @@
         </p:sp>
         <p:sp>
           <p:nvSpPr>
-            <p:cNvPr id="130" name="pl130"/>
-            <p:cNvSpPr/>
-            <p:nvPr/>
-          </p:nvSpPr>
-          <p:spPr>
-            <a:xfrm>
-              <a:off x="701215" y="4982625"/>
+            <p:cNvPr id="133" name="pl133"/>
+            <p:cNvSpPr/>
+            <p:nvPr/>
+          </p:nvSpPr>
+          <p:spPr>
+            <a:xfrm>
+              <a:off x="701215" y="4800617"/>
               <a:ext cx="4515211" cy="0"/>
             </a:xfrm>
             <a:custGeom>
@@ -7303,13 +7429,13 @@
         </p:sp>
         <p:sp>
           <p:nvSpPr>
-            <p:cNvPr id="131" name="pl131"/>
-            <p:cNvSpPr/>
-            <p:nvPr/>
-          </p:nvSpPr>
-          <p:spPr>
-            <a:xfrm>
-              <a:off x="701215" y="4436039"/>
+            <p:cNvPr id="134" name="pl134"/>
+            <p:cNvSpPr/>
+            <p:nvPr/>
+          </p:nvSpPr>
+          <p:spPr>
+            <a:xfrm>
+              <a:off x="701215" y="4800617"/>
               <a:ext cx="4515211" cy="0"/>
             </a:xfrm>
             <a:custGeom>
@@ -7328,103 +7454,60 @@
                 </a:path>
               </a:pathLst>
             </a:custGeom>
-            <a:ln w="6775" cap="flat">
-              <a:solidFill>
-                <a:srgbClr val="EBEBEB">
-                  <a:alpha val="100000"/>
-                </a:srgbClr>
-              </a:solidFill>
-              <a:prstDash val="solid"/>
-              <a:round/>
-            </a:ln>
-          </p:spPr>
-          <p:txBody>
-            <a:bodyPr/>
-            <a:lstStyle/>
-            <a:p/>
-          </p:txBody>
-        </p:sp>
-        <p:sp>
-          <p:nvSpPr>
-            <p:cNvPr id="132" name="pl132"/>
-            <p:cNvSpPr/>
-            <p:nvPr/>
-          </p:nvSpPr>
-          <p:spPr>
-            <a:xfrm>
-              <a:off x="701215" y="4982625"/>
-              <a:ext cx="4515211" cy="0"/>
+            <a:ln w="9485" cap="flat">
+              <a:solidFill>
+                <a:srgbClr val="8C8C8C">
+                  <a:alpha val="100000"/>
+                </a:srgbClr>
+              </a:solidFill>
+              <a:prstDash val="dash"/>
+              <a:round/>
+            </a:ln>
+          </p:spPr>
+          <p:txBody>
+            <a:bodyPr/>
+            <a:lstStyle/>
+            <a:p/>
+          </p:txBody>
+        </p:sp>
+        <p:sp>
+          <p:nvSpPr>
+            <p:cNvPr id="135" name="pg135"/>
+            <p:cNvSpPr/>
+            <p:nvPr/>
+          </p:nvSpPr>
+          <p:spPr>
+            <a:xfrm>
+              <a:off x="906452" y="4883853"/>
+              <a:ext cx="4104737" cy="1517608"/>
             </a:xfrm>
             <a:custGeom>
               <a:avLst/>
               <a:pathLst>
-                <a:path w="4515211" h="0">
+                <a:path w="4104737" h="1517608">
                   <a:moveTo>
                     <a:pt x="0" y="0"/>
                   </a:moveTo>
                   <a:lnTo>
-                    <a:pt x="4515211" y="0"/>
-                  </a:lnTo>
-                  <a:lnTo>
-                    <a:pt x="4515211" y="0"/>
-                  </a:lnTo>
-                </a:path>
-              </a:pathLst>
-            </a:custGeom>
-            <a:ln w="9485" cap="flat">
-              <a:solidFill>
-                <a:srgbClr val="8C8C8C">
-                  <a:alpha val="100000"/>
-                </a:srgbClr>
-              </a:solidFill>
-              <a:prstDash val="dash"/>
-              <a:round/>
-            </a:ln>
-          </p:spPr>
-          <p:txBody>
-            <a:bodyPr/>
-            <a:lstStyle/>
-            <a:p/>
-          </p:txBody>
-        </p:sp>
-        <p:sp>
-          <p:nvSpPr>
-            <p:cNvPr id="133" name="pg133"/>
-            <p:cNvSpPr/>
-            <p:nvPr/>
-          </p:nvSpPr>
-          <p:spPr>
-            <a:xfrm>
-              <a:off x="906452" y="4996608"/>
-              <a:ext cx="4104737" cy="1404853"/>
-            </a:xfrm>
-            <a:custGeom>
-              <a:avLst/>
-              <a:pathLst>
-                <a:path w="4104737" h="1404853">
-                  <a:moveTo>
-                    <a:pt x="0" y="0"/>
-                  </a:moveTo>
-                  <a:lnTo>
-                    <a:pt x="1368245" y="309844"/>
-                  </a:lnTo>
-                  <a:lnTo>
-                    <a:pt x="2736491" y="269341"/>
-                  </a:lnTo>
-                  <a:lnTo>
-                    <a:pt x="4104737" y="447718"/>
-                  </a:lnTo>
-                  <a:lnTo>
-                    <a:pt x="4104737" y="1404853"/>
-                  </a:lnTo>
-                  <a:lnTo>
-                    <a:pt x="2736491" y="1294254"/>
-                  </a:lnTo>
-                  <a:lnTo>
-                    <a:pt x="1368245" y="1285823"/>
-                  </a:lnTo>
-                  <a:lnTo>
-                    <a:pt x="0" y="1040011"/>
+                    <a:pt x="1368245" y="371423"/>
+                  </a:lnTo>
+                  <a:lnTo>
+                    <a:pt x="2736491" y="299444"/>
+                  </a:lnTo>
+                  <a:lnTo>
+                    <a:pt x="4104737" y="480379"/>
+                  </a:lnTo>
+                  <a:lnTo>
+                    <a:pt x="4104737" y="1517608"/>
+                  </a:lnTo>
+                  <a:lnTo>
+                    <a:pt x="2736491" y="1411357"/>
+                  </a:lnTo>
+                  <a:lnTo>
+                    <a:pt x="1368245" y="1418216"/>
+                  </a:lnTo>
+                  <a:lnTo>
+                    <a:pt x="0" y="1125879"/>
                   </a:lnTo>
                   <a:close/>
                 </a:path>
@@ -7444,30 +7527,30 @@
         </p:sp>
         <p:sp>
           <p:nvSpPr>
-            <p:cNvPr id="134" name="pl134"/>
-            <p:cNvSpPr/>
-            <p:nvPr/>
-          </p:nvSpPr>
-          <p:spPr>
-            <a:xfrm>
-              <a:off x="906452" y="4996608"/>
-              <a:ext cx="4104737" cy="447718"/>
+            <p:cNvPr id="136" name="pl136"/>
+            <p:cNvSpPr/>
+            <p:nvPr/>
+          </p:nvSpPr>
+          <p:spPr>
+            <a:xfrm>
+              <a:off x="906452" y="4883853"/>
+              <a:ext cx="4104737" cy="480379"/>
             </a:xfrm>
             <a:custGeom>
               <a:avLst/>
               <a:pathLst>
-                <a:path w="4104737" h="447718">
+                <a:path w="4104737" h="480379">
                   <a:moveTo>
                     <a:pt x="0" y="0"/>
                   </a:moveTo>
                   <a:lnTo>
-                    <a:pt x="1368245" y="309844"/>
-                  </a:lnTo>
-                  <a:lnTo>
-                    <a:pt x="2736491" y="269341"/>
-                  </a:lnTo>
-                  <a:lnTo>
-                    <a:pt x="4104737" y="447718"/>
+                    <a:pt x="1368245" y="371423"/>
+                  </a:lnTo>
+                  <a:lnTo>
+                    <a:pt x="2736491" y="299444"/>
+                  </a:lnTo>
+                  <a:lnTo>
+                    <a:pt x="4104737" y="480379"/>
                   </a:lnTo>
                 </a:path>
               </a:pathLst>
@@ -7481,27 +7564,27 @@
         </p:sp>
         <p:sp>
           <p:nvSpPr>
-            <p:cNvPr id="135" name="pl135"/>
-            <p:cNvSpPr/>
-            <p:nvPr/>
-          </p:nvSpPr>
-          <p:spPr>
-            <a:xfrm>
-              <a:off x="906452" y="6036619"/>
-              <a:ext cx="4104737" cy="364842"/>
+            <p:cNvPr id="137" name="pl137"/>
+            <p:cNvSpPr/>
+            <p:nvPr/>
+          </p:nvSpPr>
+          <p:spPr>
+            <a:xfrm>
+              <a:off x="906452" y="6009732"/>
+              <a:ext cx="4104737" cy="391729"/>
             </a:xfrm>
             <a:custGeom>
               <a:avLst/>
               <a:pathLst>
-                <a:path w="4104737" h="364842">
+                <a:path w="4104737" h="391729">
                   <a:moveTo>
-                    <a:pt x="4104737" y="364842"/>
+                    <a:pt x="4104737" y="391729"/>
                   </a:moveTo>
                   <a:lnTo>
-                    <a:pt x="2736491" y="254242"/>
-                  </a:lnTo>
-                  <a:lnTo>
-                    <a:pt x="1368245" y="245812"/>
+                    <a:pt x="2736491" y="285478"/>
+                  </a:lnTo>
+                  <a:lnTo>
+                    <a:pt x="1368245" y="292337"/>
                   </a:lnTo>
                   <a:lnTo>
                     <a:pt x="0" y="0"/>
@@ -7518,42 +7601,42 @@
         </p:sp>
         <p:sp>
           <p:nvSpPr>
-            <p:cNvPr id="136" name="pg136"/>
+            <p:cNvPr id="138" name="pg138"/>
             <p:cNvSpPr/>
             <p:nvPr/>
           </p:nvSpPr>
           <p:spPr>
             <a:xfrm>
               <a:off x="906452" y="4360667"/>
-              <a:ext cx="4104737" cy="1711990"/>
+              <a:ext cx="4104737" cy="1813646"/>
             </a:xfrm>
             <a:custGeom>
               <a:avLst/>
               <a:pathLst>
-                <a:path w="4104737" h="1711990">
+                <a:path w="4104737" h="1813646">
                   <a:moveTo>
                     <a:pt x="0" y="0"/>
                   </a:moveTo>
                   <a:lnTo>
-                    <a:pt x="1368245" y="413250"/>
-                  </a:lnTo>
-                  <a:lnTo>
-                    <a:pt x="2736491" y="502089"/>
-                  </a:lnTo>
-                  <a:lnTo>
-                    <a:pt x="4104737" y="642948"/>
-                  </a:lnTo>
-                  <a:lnTo>
-                    <a:pt x="4104737" y="1711990"/>
-                  </a:lnTo>
-                  <a:lnTo>
-                    <a:pt x="2736491" y="1577226"/>
-                  </a:lnTo>
-                  <a:lnTo>
-                    <a:pt x="1368245" y="1513332"/>
-                  </a:lnTo>
-                  <a:lnTo>
-                    <a:pt x="0" y="1197326"/>
+                    <a:pt x="1368245" y="497192"/>
+                  </a:lnTo>
+                  <a:lnTo>
+                    <a:pt x="2736491" y="531456"/>
+                  </a:lnTo>
+                  <a:lnTo>
+                    <a:pt x="4104737" y="683757"/>
+                  </a:lnTo>
+                  <a:lnTo>
+                    <a:pt x="4104737" y="1813646"/>
+                  </a:lnTo>
+                  <a:lnTo>
+                    <a:pt x="2736491" y="1672807"/>
+                  </a:lnTo>
+                  <a:lnTo>
+                    <a:pt x="1368245" y="1656445"/>
+                  </a:lnTo>
+                  <a:lnTo>
+                    <a:pt x="0" y="1275040"/>
                   </a:lnTo>
                   <a:close/>
                 </a:path>
@@ -7573,30 +7656,30 @@
         </p:sp>
         <p:sp>
           <p:nvSpPr>
-            <p:cNvPr id="137" name="pl137"/>
+            <p:cNvPr id="139" name="pl139"/>
             <p:cNvSpPr/>
             <p:nvPr/>
           </p:nvSpPr>
           <p:spPr>
             <a:xfrm>
               <a:off x="906452" y="4360667"/>
-              <a:ext cx="4104737" cy="642948"/>
+              <a:ext cx="4104737" cy="683757"/>
             </a:xfrm>
             <a:custGeom>
               <a:avLst/>
               <a:pathLst>
-                <a:path w="4104737" h="642948">
+                <a:path w="4104737" h="683757">
                   <a:moveTo>
                     <a:pt x="0" y="0"/>
                   </a:moveTo>
                   <a:lnTo>
-                    <a:pt x="1368245" y="413250"/>
-                  </a:lnTo>
-                  <a:lnTo>
-                    <a:pt x="2736491" y="502089"/>
-                  </a:lnTo>
-                  <a:lnTo>
-                    <a:pt x="4104737" y="642948"/>
+                    <a:pt x="1368245" y="497192"/>
+                  </a:lnTo>
+                  <a:lnTo>
+                    <a:pt x="2736491" y="531456"/>
+                  </a:lnTo>
+                  <a:lnTo>
+                    <a:pt x="4104737" y="683757"/>
                   </a:lnTo>
                 </a:path>
               </a:pathLst>
@@ -7610,27 +7693,27 @@
         </p:sp>
         <p:sp>
           <p:nvSpPr>
-            <p:cNvPr id="138" name="pl138"/>
-            <p:cNvSpPr/>
-            <p:nvPr/>
-          </p:nvSpPr>
-          <p:spPr>
-            <a:xfrm>
-              <a:off x="906452" y="5557993"/>
-              <a:ext cx="4104737" cy="514664"/>
+            <p:cNvPr id="140" name="pl140"/>
+            <p:cNvSpPr/>
+            <p:nvPr/>
+          </p:nvSpPr>
+          <p:spPr>
+            <a:xfrm>
+              <a:off x="906452" y="5635707"/>
+              <a:ext cx="4104737" cy="538606"/>
             </a:xfrm>
             <a:custGeom>
               <a:avLst/>
               <a:pathLst>
-                <a:path w="4104737" h="514664">
+                <a:path w="4104737" h="538606">
                   <a:moveTo>
-                    <a:pt x="4104737" y="514664"/>
+                    <a:pt x="4104737" y="538606"/>
                   </a:moveTo>
                   <a:lnTo>
-                    <a:pt x="2736491" y="379900"/>
-                  </a:lnTo>
-                  <a:lnTo>
-                    <a:pt x="1368245" y="316006"/>
+                    <a:pt x="2736491" y="397767"/>
+                  </a:lnTo>
+                  <a:lnTo>
+                    <a:pt x="1368245" y="381404"/>
                   </a:lnTo>
                   <a:lnTo>
                     <a:pt x="0" y="0"/>
@@ -7647,42 +7730,42 @@
         </p:sp>
         <p:sp>
           <p:nvSpPr>
-            <p:cNvPr id="139" name="pg139"/>
-            <p:cNvSpPr/>
-            <p:nvPr/>
-          </p:nvSpPr>
-          <p:spPr>
-            <a:xfrm>
-              <a:off x="906452" y="4701137"/>
-              <a:ext cx="4104737" cy="1470941"/>
+            <p:cNvPr id="141" name="pg141"/>
+            <p:cNvSpPr/>
+            <p:nvPr/>
+          </p:nvSpPr>
+          <p:spPr>
+            <a:xfrm>
+              <a:off x="906452" y="4698303"/>
+              <a:ext cx="4104737" cy="1539400"/>
             </a:xfrm>
             <a:custGeom>
               <a:avLst/>
               <a:pathLst>
-                <a:path w="4104737" h="1470941">
+                <a:path w="4104737" h="1539400">
                   <a:moveTo>
                     <a:pt x="0" y="0"/>
                   </a:moveTo>
                   <a:lnTo>
-                    <a:pt x="1368245" y="332026"/>
-                  </a:lnTo>
-                  <a:lnTo>
-                    <a:pt x="2736491" y="283117"/>
-                  </a:lnTo>
-                  <a:lnTo>
-                    <a:pt x="4104737" y="434203"/>
-                  </a:lnTo>
-                  <a:lnTo>
-                    <a:pt x="4104737" y="1470941"/>
-                  </a:lnTo>
-                  <a:lnTo>
-                    <a:pt x="2736491" y="1349058"/>
-                  </a:lnTo>
-                  <a:lnTo>
-                    <a:pt x="1368245" y="1374268"/>
-                  </a:lnTo>
-                  <a:lnTo>
-                    <a:pt x="0" y="1128210"/>
+                    <a:pt x="1368245" y="395943"/>
+                  </a:lnTo>
+                  <a:lnTo>
+                    <a:pt x="2736491" y="290948"/>
+                  </a:lnTo>
+                  <a:lnTo>
+                    <a:pt x="4104737" y="434504"/>
+                  </a:lnTo>
+                  <a:lnTo>
+                    <a:pt x="4104737" y="1539400"/>
+                  </a:lnTo>
+                  <a:lnTo>
+                    <a:pt x="2736491" y="1426744"/>
+                  </a:lnTo>
+                  <a:lnTo>
+                    <a:pt x="1368245" y="1499934"/>
+                  </a:lnTo>
+                  <a:lnTo>
+                    <a:pt x="0" y="1206351"/>
                   </a:lnTo>
                   <a:close/>
                 </a:path>
@@ -7702,30 +7785,30 @@
         </p:sp>
         <p:sp>
           <p:nvSpPr>
-            <p:cNvPr id="140" name="pl140"/>
-            <p:cNvSpPr/>
-            <p:nvPr/>
-          </p:nvSpPr>
-          <p:spPr>
-            <a:xfrm>
-              <a:off x="906452" y="4701137"/>
-              <a:ext cx="4104737" cy="434203"/>
+            <p:cNvPr id="142" name="pl142"/>
+            <p:cNvSpPr/>
+            <p:nvPr/>
+          </p:nvSpPr>
+          <p:spPr>
+            <a:xfrm>
+              <a:off x="906452" y="4698303"/>
+              <a:ext cx="4104737" cy="434504"/>
             </a:xfrm>
             <a:custGeom>
               <a:avLst/>
               <a:pathLst>
-                <a:path w="4104737" h="434203">
+                <a:path w="4104737" h="434504">
                   <a:moveTo>
                     <a:pt x="0" y="0"/>
                   </a:moveTo>
                   <a:lnTo>
-                    <a:pt x="1368245" y="332026"/>
-                  </a:lnTo>
-                  <a:lnTo>
-                    <a:pt x="2736491" y="283117"/>
-                  </a:lnTo>
-                  <a:lnTo>
-                    <a:pt x="4104737" y="434203"/>
+                    <a:pt x="1368245" y="395943"/>
+                  </a:lnTo>
+                  <a:lnTo>
+                    <a:pt x="2736491" y="290948"/>
+                  </a:lnTo>
+                  <a:lnTo>
+                    <a:pt x="4104737" y="434504"/>
                   </a:lnTo>
                 </a:path>
               </a:pathLst>
@@ -7739,27 +7822,27 @@
         </p:sp>
         <p:sp>
           <p:nvSpPr>
-            <p:cNvPr id="141" name="pl141"/>
-            <p:cNvSpPr/>
-            <p:nvPr/>
-          </p:nvSpPr>
-          <p:spPr>
-            <a:xfrm>
-              <a:off x="906452" y="5829348"/>
-              <a:ext cx="4104737" cy="342731"/>
+            <p:cNvPr id="143" name="pl143"/>
+            <p:cNvSpPr/>
+            <p:nvPr/>
+          </p:nvSpPr>
+          <p:spPr>
+            <a:xfrm>
+              <a:off x="906452" y="5904655"/>
+              <a:ext cx="4104737" cy="333048"/>
             </a:xfrm>
             <a:custGeom>
               <a:avLst/>
               <a:pathLst>
-                <a:path w="4104737" h="342731">
+                <a:path w="4104737" h="333048">
                   <a:moveTo>
-                    <a:pt x="4104737" y="342731"/>
+                    <a:pt x="4104737" y="333048"/>
                   </a:moveTo>
                   <a:lnTo>
-                    <a:pt x="2736491" y="220848"/>
-                  </a:lnTo>
-                  <a:lnTo>
-                    <a:pt x="1368245" y="246058"/>
+                    <a:pt x="2736491" y="220392"/>
+                  </a:lnTo>
+                  <a:lnTo>
+                    <a:pt x="1368245" y="293582"/>
                   </a:lnTo>
                   <a:lnTo>
                     <a:pt x="0" y="0"/>
@@ -7776,30 +7859,30 @@
         </p:sp>
         <p:sp>
           <p:nvSpPr>
-            <p:cNvPr id="142" name="pl142"/>
-            <p:cNvSpPr/>
-            <p:nvPr/>
-          </p:nvSpPr>
-          <p:spPr>
-            <a:xfrm>
-              <a:off x="906452" y="5544104"/>
-              <a:ext cx="4104737" cy="404164"/>
+            <p:cNvPr id="144" name="pl144"/>
+            <p:cNvSpPr/>
+            <p:nvPr/>
+          </p:nvSpPr>
+          <p:spPr>
+            <a:xfrm>
+              <a:off x="906452" y="5476378"/>
+              <a:ext cx="4104737" cy="433797"/>
             </a:xfrm>
             <a:custGeom>
               <a:avLst/>
               <a:pathLst>
-                <a:path w="4104737" h="404164">
+                <a:path w="4104737" h="433797">
                   <a:moveTo>
                     <a:pt x="0" y="0"/>
                   </a:moveTo>
                   <a:lnTo>
-                    <a:pt x="1368245" y="275991"/>
-                  </a:lnTo>
-                  <a:lnTo>
-                    <a:pt x="2736491" y="262502"/>
-                  </a:lnTo>
-                  <a:lnTo>
-                    <a:pt x="4104737" y="404164"/>
+                    <a:pt x="1368245" y="329553"/>
+                  </a:lnTo>
+                  <a:lnTo>
+                    <a:pt x="2736491" y="293401"/>
+                  </a:lnTo>
+                  <a:lnTo>
+                    <a:pt x="4104737" y="433797"/>
                   </a:lnTo>
                 </a:path>
               </a:pathLst>
@@ -7822,30 +7905,30 @@
         </p:sp>
         <p:sp>
           <p:nvSpPr>
-            <p:cNvPr id="143" name="pl143"/>
-            <p:cNvSpPr/>
-            <p:nvPr/>
-          </p:nvSpPr>
-          <p:spPr>
-            <a:xfrm>
-              <a:off x="906452" y="4992074"/>
-              <a:ext cx="4104737" cy="575242"/>
+            <p:cNvPr id="145" name="pl145"/>
+            <p:cNvSpPr/>
+            <p:nvPr/>
+          </p:nvSpPr>
+          <p:spPr>
+            <a:xfrm>
+              <a:off x="906452" y="5033215"/>
+              <a:ext cx="4104737" cy="606886"/>
             </a:xfrm>
             <a:custGeom>
               <a:avLst/>
               <a:pathLst>
-                <a:path w="4104737" h="575242">
+                <a:path w="4104737" h="606886">
                   <a:moveTo>
                     <a:pt x="0" y="0"/>
                   </a:moveTo>
                   <a:lnTo>
-                    <a:pt x="1368245" y="361489"/>
-                  </a:lnTo>
-                  <a:lnTo>
-                    <a:pt x="2736491" y="436955"/>
-                  </a:lnTo>
-                  <a:lnTo>
-                    <a:pt x="4104737" y="575242"/>
+                    <a:pt x="1368245" y="435586"/>
+                  </a:lnTo>
+                  <a:lnTo>
+                    <a:pt x="2736491" y="460082"/>
+                  </a:lnTo>
+                  <a:lnTo>
+                    <a:pt x="4104737" y="606886"/>
                   </a:lnTo>
                 </a:path>
               </a:pathLst>
@@ -7868,30 +7951,30 @@
         </p:sp>
         <p:sp>
           <p:nvSpPr>
-            <p:cNvPr id="144" name="pl144"/>
-            <p:cNvSpPr/>
-            <p:nvPr/>
-          </p:nvSpPr>
-          <p:spPr>
-            <a:xfrm>
-              <a:off x="906452" y="5296030"/>
-              <a:ext cx="4104737" cy="385783"/>
+            <p:cNvPr id="146" name="pl146"/>
+            <p:cNvSpPr/>
+            <p:nvPr/>
+          </p:nvSpPr>
+          <p:spPr>
+            <a:xfrm>
+              <a:off x="906452" y="5334558"/>
+              <a:ext cx="4104737" cy="380519"/>
             </a:xfrm>
             <a:custGeom>
               <a:avLst/>
               <a:pathLst>
-                <a:path w="4104737" h="385783">
+                <a:path w="4104737" h="380519">
                   <a:moveTo>
                     <a:pt x="0" y="0"/>
                   </a:moveTo>
                   <a:lnTo>
-                    <a:pt x="1368245" y="286077"/>
-                  </a:lnTo>
-                  <a:lnTo>
-                    <a:pt x="2736491" y="250081"/>
-                  </a:lnTo>
-                  <a:lnTo>
-                    <a:pt x="4104737" y="385783"/>
+                    <a:pt x="1368245" y="341230"/>
+                  </a:lnTo>
+                  <a:lnTo>
+                    <a:pt x="2736491" y="253337"/>
+                  </a:lnTo>
+                  <a:lnTo>
+                    <a:pt x="4104737" y="380519"/>
                   </a:lnTo>
                 </a:path>
               </a:pathLst>
@@ -7914,13 +7997,13 @@
         </p:sp>
         <p:sp>
           <p:nvSpPr>
-            <p:cNvPr id="145" name="pt145"/>
-            <p:cNvSpPr/>
-            <p:nvPr/>
-          </p:nvSpPr>
-          <p:spPr>
-            <a:xfrm>
-              <a:off x="883390" y="5272969"/>
+            <p:cNvPr id="147" name="pt147"/>
+            <p:cNvSpPr/>
+            <p:nvPr/>
+          </p:nvSpPr>
+          <p:spPr>
+            <a:xfrm>
+              <a:off x="883390" y="5311496"/>
               <a:ext cx="46123" cy="46123"/>
             </a:xfrm>
             <a:prstGeom prst="ellipse">
@@ -7949,13 +8032,13 @@
         </p:sp>
         <p:sp>
           <p:nvSpPr>
-            <p:cNvPr id="146" name="pt146"/>
-            <p:cNvSpPr/>
-            <p:nvPr/>
-          </p:nvSpPr>
-          <p:spPr>
-            <a:xfrm>
-              <a:off x="2251636" y="5559046"/>
+            <p:cNvPr id="148" name="pt148"/>
+            <p:cNvSpPr/>
+            <p:nvPr/>
+          </p:nvSpPr>
+          <p:spPr>
+            <a:xfrm>
+              <a:off x="2251636" y="5652727"/>
               <a:ext cx="46123" cy="46123"/>
             </a:xfrm>
             <a:prstGeom prst="ellipse">
@@ -7984,13 +8067,13 @@
         </p:sp>
         <p:sp>
           <p:nvSpPr>
-            <p:cNvPr id="147" name="pt147"/>
-            <p:cNvSpPr/>
-            <p:nvPr/>
-          </p:nvSpPr>
-          <p:spPr>
-            <a:xfrm>
-              <a:off x="3619882" y="5523050"/>
+            <p:cNvPr id="149" name="pt149"/>
+            <p:cNvSpPr/>
+            <p:nvPr/>
+          </p:nvSpPr>
+          <p:spPr>
+            <a:xfrm>
+              <a:off x="3619882" y="5564834"/>
               <a:ext cx="46123" cy="46123"/>
             </a:xfrm>
             <a:prstGeom prst="ellipse">
@@ -8019,13 +8102,13 @@
         </p:sp>
         <p:sp>
           <p:nvSpPr>
-            <p:cNvPr id="148" name="pt148"/>
-            <p:cNvSpPr/>
-            <p:nvPr/>
-          </p:nvSpPr>
-          <p:spPr>
-            <a:xfrm>
-              <a:off x="4988128" y="5658752"/>
+            <p:cNvPr id="150" name="pt150"/>
+            <p:cNvSpPr/>
+            <p:nvPr/>
+          </p:nvSpPr>
+          <p:spPr>
+            <a:xfrm>
+              <a:off x="4988128" y="5692016"/>
               <a:ext cx="46123" cy="46123"/>
             </a:xfrm>
             <a:prstGeom prst="ellipse">
@@ -8054,13 +8137,13 @@
         </p:sp>
         <p:sp>
           <p:nvSpPr>
-            <p:cNvPr id="149" name="pt149"/>
-            <p:cNvSpPr/>
-            <p:nvPr/>
-          </p:nvSpPr>
-          <p:spPr>
-            <a:xfrm>
-              <a:off x="883390" y="4969012"/>
+            <p:cNvPr id="151" name="pt151"/>
+            <p:cNvSpPr/>
+            <p:nvPr/>
+          </p:nvSpPr>
+          <p:spPr>
+            <a:xfrm>
+              <a:off x="883390" y="5010153"/>
               <a:ext cx="46123" cy="46123"/>
             </a:xfrm>
             <a:prstGeom prst="ellipse">
@@ -8089,13 +8172,13 @@
         </p:sp>
         <p:sp>
           <p:nvSpPr>
-            <p:cNvPr id="150" name="pt150"/>
-            <p:cNvSpPr/>
-            <p:nvPr/>
-          </p:nvSpPr>
-          <p:spPr>
-            <a:xfrm>
-              <a:off x="2251636" y="5330502"/>
+            <p:cNvPr id="152" name="pt152"/>
+            <p:cNvSpPr/>
+            <p:nvPr/>
+          </p:nvSpPr>
+          <p:spPr>
+            <a:xfrm>
+              <a:off x="2251636" y="5445740"/>
               <a:ext cx="46123" cy="46123"/>
             </a:xfrm>
             <a:prstGeom prst="ellipse">
@@ -8124,13 +8207,13 @@
         </p:sp>
         <p:sp>
           <p:nvSpPr>
-            <p:cNvPr id="151" name="pt151"/>
-            <p:cNvSpPr/>
-            <p:nvPr/>
-          </p:nvSpPr>
-          <p:spPr>
-            <a:xfrm>
-              <a:off x="3619882" y="5405967"/>
+            <p:cNvPr id="153" name="pt153"/>
+            <p:cNvSpPr/>
+            <p:nvPr/>
+          </p:nvSpPr>
+          <p:spPr>
+            <a:xfrm>
+              <a:off x="3619882" y="5470235"/>
               <a:ext cx="46123" cy="46123"/>
             </a:xfrm>
             <a:prstGeom prst="ellipse">
@@ -8159,13 +8242,13 @@
         </p:sp>
         <p:sp>
           <p:nvSpPr>
-            <p:cNvPr id="152" name="pt152"/>
-            <p:cNvSpPr/>
-            <p:nvPr/>
-          </p:nvSpPr>
-          <p:spPr>
-            <a:xfrm>
-              <a:off x="4988128" y="5544254"/>
+            <p:cNvPr id="154" name="pt154"/>
+            <p:cNvSpPr/>
+            <p:nvPr/>
+          </p:nvSpPr>
+          <p:spPr>
+            <a:xfrm>
+              <a:off x="4988128" y="5617039"/>
               <a:ext cx="46123" cy="46123"/>
             </a:xfrm>
             <a:prstGeom prst="ellipse">
@@ -8194,13 +8277,13 @@
         </p:sp>
         <p:sp>
           <p:nvSpPr>
-            <p:cNvPr id="153" name="pt153"/>
-            <p:cNvSpPr/>
-            <p:nvPr/>
-          </p:nvSpPr>
-          <p:spPr>
-            <a:xfrm>
-              <a:off x="883390" y="5521042"/>
+            <p:cNvPr id="155" name="pt155"/>
+            <p:cNvSpPr/>
+            <p:nvPr/>
+          </p:nvSpPr>
+          <p:spPr>
+            <a:xfrm>
+              <a:off x="883390" y="5453316"/>
               <a:ext cx="46123" cy="46123"/>
             </a:xfrm>
             <a:prstGeom prst="ellipse">
@@ -8229,13 +8312,13 @@
         </p:sp>
         <p:sp>
           <p:nvSpPr>
-            <p:cNvPr id="154" name="pt154"/>
-            <p:cNvSpPr/>
-            <p:nvPr/>
-          </p:nvSpPr>
-          <p:spPr>
-            <a:xfrm>
-              <a:off x="2251636" y="5797034"/>
+            <p:cNvPr id="156" name="pt156"/>
+            <p:cNvSpPr/>
+            <p:nvPr/>
+          </p:nvSpPr>
+          <p:spPr>
+            <a:xfrm>
+              <a:off x="2251636" y="5782869"/>
               <a:ext cx="46123" cy="46123"/>
             </a:xfrm>
             <a:prstGeom prst="ellipse">
@@ -8264,13 +8347,13 @@
         </p:sp>
         <p:sp>
           <p:nvSpPr>
-            <p:cNvPr id="155" name="pt155"/>
-            <p:cNvSpPr/>
-            <p:nvPr/>
-          </p:nvSpPr>
-          <p:spPr>
-            <a:xfrm>
-              <a:off x="3619882" y="5783545"/>
+            <p:cNvPr id="157" name="pt157"/>
+            <p:cNvSpPr/>
+            <p:nvPr/>
+          </p:nvSpPr>
+          <p:spPr>
+            <a:xfrm>
+              <a:off x="3619882" y="5746718"/>
               <a:ext cx="46123" cy="46123"/>
             </a:xfrm>
             <a:prstGeom prst="ellipse">
@@ -8299,13 +8382,13 @@
         </p:sp>
         <p:sp>
           <p:nvSpPr>
-            <p:cNvPr id="156" name="pt156"/>
-            <p:cNvSpPr/>
-            <p:nvPr/>
-          </p:nvSpPr>
-          <p:spPr>
-            <a:xfrm>
-              <a:off x="4988128" y="5925207"/>
+            <p:cNvPr id="158" name="pt158"/>
+            <p:cNvSpPr/>
+            <p:nvPr/>
+          </p:nvSpPr>
+          <p:spPr>
+            <a:xfrm>
+              <a:off x="4988128" y="5887114"/>
               <a:ext cx="46123" cy="46123"/>
             </a:xfrm>
             <a:prstGeom prst="ellipse">
@@ -8334,7 +8417,7 @@
         </p:sp>
         <p:sp>
           <p:nvSpPr>
-            <p:cNvPr id="157" name="pl157"/>
+            <p:cNvPr id="159" name="pl159"/>
             <p:cNvSpPr/>
             <p:nvPr/>
           </p:nvSpPr>
@@ -8374,13 +8457,13 @@
         </p:sp>
         <p:sp>
           <p:nvSpPr>
-            <p:cNvPr id="158" name="tx158"/>
-            <p:cNvSpPr/>
-            <p:nvPr/>
-          </p:nvSpPr>
-          <p:spPr>
-            <a:xfrm>
-              <a:off x="503004" y="6039403"/>
+            <p:cNvPr id="160" name="tx160"/>
+            <p:cNvSpPr/>
+            <p:nvPr/>
+          </p:nvSpPr>
+          <p:spPr>
+            <a:xfrm>
+              <a:off x="503004" y="5967564"/>
               <a:ext cx="141274" cy="72786"/>
             </a:xfrm>
             <a:prstGeom prst="rect">
@@ -8417,13 +8500,13 @@
         </p:sp>
         <p:sp>
           <p:nvSpPr>
-            <p:cNvPr id="159" name="tx159"/>
-            <p:cNvSpPr/>
-            <p:nvPr/>
-          </p:nvSpPr>
-          <p:spPr>
-            <a:xfrm>
-              <a:off x="503004" y="5492818"/>
+            <p:cNvPr id="161" name="tx161"/>
+            <p:cNvSpPr/>
+            <p:nvPr/>
+          </p:nvSpPr>
+          <p:spPr>
+            <a:xfrm>
+              <a:off x="503004" y="5365894"/>
               <a:ext cx="141274" cy="72786"/>
             </a:xfrm>
             <a:prstGeom prst="rect">
@@ -8460,13 +8543,13 @@
         </p:sp>
         <p:sp>
           <p:nvSpPr>
-            <p:cNvPr id="160" name="tx160"/>
-            <p:cNvSpPr/>
-            <p:nvPr/>
-          </p:nvSpPr>
-          <p:spPr>
-            <a:xfrm>
-              <a:off x="503004" y="4946232"/>
+            <p:cNvPr id="162" name="tx162"/>
+            <p:cNvSpPr/>
+            <p:nvPr/>
+          </p:nvSpPr>
+          <p:spPr>
+            <a:xfrm>
+              <a:off x="503004" y="4764224"/>
               <a:ext cx="141274" cy="72786"/>
             </a:xfrm>
             <a:prstGeom prst="rect">
@@ -8503,56 +8586,13 @@
         </p:sp>
         <p:sp>
           <p:nvSpPr>
-            <p:cNvPr id="161" name="tx161"/>
-            <p:cNvSpPr/>
-            <p:nvPr/>
-          </p:nvSpPr>
-          <p:spPr>
-            <a:xfrm>
-              <a:off x="503004" y="4399646"/>
-              <a:ext cx="141274" cy="72786"/>
-            </a:xfrm>
-            <a:prstGeom prst="rect">
-              <a:avLst/>
-            </a:prstGeom>
-            <a:noFill/>
-          </p:spPr>
-          <p:txBody>
-            <a:bodyPr lIns="0" rIns="0" tIns="0" bIns="0" anchorCtr="1" anchor="ctr" wrap="none"/>
-            <a:lstStyle/>
-            <a:p>
-              <a:pPr algn="l" marL="0" marR="0" indent="0">
-                <a:spcBef>
-                  <a:spcPts val="0"/>
-                </a:spcBef>
-                <a:spcAft>
-                  <a:spcPts val="0"/>
-                </a:spcAft>
-              </a:pPr>
-              <a:r>
-                <a:rPr sz="800" i="0" b="0">
-                  <a:solidFill>
-                    <a:srgbClr val="262626">
-                      <a:alpha val="100000"/>
-                    </a:srgbClr>
-                  </a:solidFill>
-                  <a:latin typeface="Arial"/>
-                  <a:cs typeface="Arial"/>
-                </a:rPr>
-                <a:t>1.1</a:t>
-              </a:r>
-            </a:p>
-          </p:txBody>
-        </p:sp>
-        <p:sp>
-          <p:nvSpPr>
-            <p:cNvPr id="162" name="pl162"/>
-            <p:cNvSpPr/>
-            <p:nvPr/>
-          </p:nvSpPr>
-          <p:spPr>
-            <a:xfrm>
-              <a:off x="669584" y="6075797"/>
+            <p:cNvPr id="163" name="pl163"/>
+            <p:cNvSpPr/>
+            <p:nvPr/>
+          </p:nvSpPr>
+          <p:spPr>
+            <a:xfrm>
+              <a:off x="669584" y="6003957"/>
               <a:ext cx="31631" cy="0"/>
             </a:xfrm>
             <a:custGeom>
@@ -8586,13 +8626,13 @@
         </p:sp>
         <p:sp>
           <p:nvSpPr>
-            <p:cNvPr id="163" name="pl163"/>
-            <p:cNvSpPr/>
-            <p:nvPr/>
-          </p:nvSpPr>
-          <p:spPr>
-            <a:xfrm>
-              <a:off x="669584" y="5529211"/>
+            <p:cNvPr id="164" name="pl164"/>
+            <p:cNvSpPr/>
+            <p:nvPr/>
+          </p:nvSpPr>
+          <p:spPr>
+            <a:xfrm>
+              <a:off x="669584" y="5402287"/>
               <a:ext cx="31631" cy="0"/>
             </a:xfrm>
             <a:custGeom>
@@ -8626,53 +8666,13 @@
         </p:sp>
         <p:sp>
           <p:nvSpPr>
-            <p:cNvPr id="164" name="pl164"/>
-            <p:cNvSpPr/>
-            <p:nvPr/>
-          </p:nvSpPr>
-          <p:spPr>
-            <a:xfrm>
-              <a:off x="669584" y="4982625"/>
-              <a:ext cx="31631" cy="0"/>
-            </a:xfrm>
-            <a:custGeom>
-              <a:avLst/>
-              <a:pathLst>
-                <a:path w="31631" h="0">
-                  <a:moveTo>
-                    <a:pt x="0" y="0"/>
-                  </a:moveTo>
-                  <a:lnTo>
-                    <a:pt x="31631" y="0"/>
-                  </a:lnTo>
-                </a:path>
-              </a:pathLst>
-            </a:custGeom>
-            <a:ln w="8130" cap="flat">
-              <a:solidFill>
-                <a:srgbClr val="333333">
-                  <a:alpha val="100000"/>
-                </a:srgbClr>
-              </a:solidFill>
-              <a:prstDash val="solid"/>
-              <a:round/>
-            </a:ln>
-          </p:spPr>
-          <p:txBody>
-            <a:bodyPr/>
-            <a:lstStyle/>
-            <a:p/>
-          </p:txBody>
-        </p:sp>
-        <p:sp>
-          <p:nvSpPr>
             <p:cNvPr id="165" name="pl165"/>
             <p:cNvSpPr/>
             <p:nvPr/>
           </p:nvSpPr>
           <p:spPr>
             <a:xfrm>
-              <a:off x="669584" y="4436039"/>
+              <a:off x="669584" y="4800617"/>
               <a:ext cx="31631" cy="0"/>
             </a:xfrm>
             <a:custGeom>
@@ -9368,7 +9368,7 @@
           </p:nvSpPr>
           <p:spPr>
             <a:xfrm>
-              <a:off x="5738138" y="5972628"/>
+              <a:off x="5738138" y="5975427"/>
               <a:ext cx="4515211" cy="0"/>
             </a:xfrm>
             <a:custGeom>
@@ -9411,7 +9411,7 @@
           </p:nvSpPr>
           <p:spPr>
             <a:xfrm>
-              <a:off x="5738138" y="5543795"/>
+              <a:off x="5738138" y="5549394"/>
               <a:ext cx="4515211" cy="0"/>
             </a:xfrm>
             <a:custGeom>
@@ -9454,7 +9454,7 @@
           </p:nvSpPr>
           <p:spPr>
             <a:xfrm>
-              <a:off x="5738138" y="5114961"/>
+              <a:off x="5738138" y="5123360"/>
               <a:ext cx="4515211" cy="0"/>
             </a:xfrm>
             <a:custGeom>
@@ -9497,7 +9497,7 @@
           </p:nvSpPr>
           <p:spPr>
             <a:xfrm>
-              <a:off x="5738138" y="4686128"/>
+              <a:off x="5738138" y="4697326"/>
               <a:ext cx="4515211" cy="0"/>
             </a:xfrm>
             <a:custGeom>
@@ -9540,6 +9540,49 @@
           </p:nvSpPr>
           <p:spPr>
             <a:xfrm>
+              <a:off x="5738138" y="4271292"/>
+              <a:ext cx="4515211" cy="0"/>
+            </a:xfrm>
+            <a:custGeom>
+              <a:avLst/>
+              <a:pathLst>
+                <a:path w="4515211" h="0">
+                  <a:moveTo>
+                    <a:pt x="0" y="0"/>
+                  </a:moveTo>
+                  <a:lnTo>
+                    <a:pt x="4515211" y="0"/>
+                  </a:lnTo>
+                  <a:lnTo>
+                    <a:pt x="4515211" y="0"/>
+                  </a:lnTo>
+                </a:path>
+              </a:pathLst>
+            </a:custGeom>
+            <a:ln w="6775" cap="flat">
+              <a:solidFill>
+                <a:srgbClr val="EBEBEB">
+                  <a:alpha val="100000"/>
+                </a:srgbClr>
+              </a:solidFill>
+              <a:prstDash val="solid"/>
+              <a:round/>
+            </a:ln>
+          </p:spPr>
+          <p:txBody>
+            <a:bodyPr/>
+            <a:lstStyle/>
+            <a:p/>
+          </p:txBody>
+        </p:sp>
+        <p:sp>
+          <p:nvSpPr>
+            <p:cNvPr id="187" name="pl187"/>
+            <p:cNvSpPr/>
+            <p:nvPr/>
+          </p:nvSpPr>
+          <p:spPr>
+            <a:xfrm>
               <a:off x="5943375" y="4360667"/>
               <a:ext cx="4104737" cy="2040794"/>
             </a:xfrm>
@@ -9551,10 +9594,10 @@
                     <a:pt x="0" y="0"/>
                   </a:moveTo>
                   <a:lnTo>
-                    <a:pt x="1368245" y="591278"/>
-                  </a:lnTo>
-                  <a:lnTo>
-                    <a:pt x="2736491" y="1851859"/>
+                    <a:pt x="1368245" y="702011"/>
+                  </a:lnTo>
+                  <a:lnTo>
+                    <a:pt x="2736491" y="1862957"/>
                   </a:lnTo>
                   <a:lnTo>
                     <a:pt x="4104737" y="2040794"/>
@@ -9580,30 +9623,30 @@
         </p:sp>
         <p:sp>
           <p:nvSpPr>
-            <p:cNvPr id="187" name="pl187"/>
-            <p:cNvSpPr/>
-            <p:nvPr/>
-          </p:nvSpPr>
-          <p:spPr>
-            <a:xfrm>
-              <a:off x="5943375" y="4659582"/>
-              <a:ext cx="4104737" cy="1741878"/>
+            <p:cNvPr id="188" name="pl188"/>
+            <p:cNvSpPr/>
+            <p:nvPr/>
+          </p:nvSpPr>
+          <p:spPr>
+            <a:xfrm>
+              <a:off x="5943375" y="4471410"/>
+              <a:ext cx="4104737" cy="1930051"/>
             </a:xfrm>
             <a:custGeom>
               <a:avLst/>
               <a:pathLst>
-                <a:path w="4104737" h="1741878">
+                <a:path w="4104737" h="1930051">
                   <a:moveTo>
                     <a:pt x="0" y="0"/>
                   </a:moveTo>
                   <a:lnTo>
-                    <a:pt x="1368245" y="235111"/>
-                  </a:lnTo>
-                  <a:lnTo>
-                    <a:pt x="2736491" y="1263716"/>
-                  </a:lnTo>
-                  <a:lnTo>
-                    <a:pt x="4104737" y="1741878"/>
+                    <a:pt x="1368245" y="446463"/>
+                  </a:lnTo>
+                  <a:lnTo>
+                    <a:pt x="2736491" y="1418935"/>
+                  </a:lnTo>
+                  <a:lnTo>
+                    <a:pt x="4104737" y="1930051"/>
                   </a:lnTo>
                 </a:path>
               </a:pathLst>
@@ -9626,30 +9669,30 @@
         </p:sp>
         <p:sp>
           <p:nvSpPr>
-            <p:cNvPr id="188" name="pl188"/>
-            <p:cNvSpPr/>
-            <p:nvPr/>
-          </p:nvSpPr>
-          <p:spPr>
-            <a:xfrm>
-              <a:off x="5943375" y="4454000"/>
-              <a:ext cx="4104737" cy="1947461"/>
+            <p:cNvPr id="189" name="pl189"/>
+            <p:cNvSpPr/>
+            <p:nvPr/>
+          </p:nvSpPr>
+          <p:spPr>
+            <a:xfrm>
+              <a:off x="5943375" y="4395914"/>
+              <a:ext cx="4104737" cy="2005547"/>
             </a:xfrm>
             <a:custGeom>
               <a:avLst/>
               <a:pathLst>
-                <a:path w="4104737" h="1947461">
+                <a:path w="4104737" h="2005547">
                   <a:moveTo>
                     <a:pt x="0" y="0"/>
                   </a:moveTo>
                   <a:lnTo>
-                    <a:pt x="1368245" y="478751"/>
-                  </a:lnTo>
-                  <a:lnTo>
-                    <a:pt x="2736491" y="1517292"/>
-                  </a:lnTo>
-                  <a:lnTo>
-                    <a:pt x="4104737" y="1947461"/>
+                    <a:pt x="1368245" y="664677"/>
+                  </a:lnTo>
+                  <a:lnTo>
+                    <a:pt x="2736491" y="1571367"/>
+                  </a:lnTo>
+                  <a:lnTo>
+                    <a:pt x="4104737" y="2005547"/>
                   </a:lnTo>
                 </a:path>
               </a:pathLst>
@@ -9672,13 +9715,13 @@
         </p:sp>
         <p:sp>
           <p:nvSpPr>
-            <p:cNvPr id="189" name="pt189"/>
-            <p:cNvSpPr/>
-            <p:nvPr/>
-          </p:nvSpPr>
-          <p:spPr>
-            <a:xfrm>
-              <a:off x="5920314" y="4430938"/>
+            <p:cNvPr id="190" name="pt190"/>
+            <p:cNvSpPr/>
+            <p:nvPr/>
+          </p:nvSpPr>
+          <p:spPr>
+            <a:xfrm>
+              <a:off x="5920314" y="4372852"/>
               <a:ext cx="46123" cy="46123"/>
             </a:xfrm>
             <a:prstGeom prst="ellipse">
@@ -9707,13 +9750,13 @@
         </p:sp>
         <p:sp>
           <p:nvSpPr>
-            <p:cNvPr id="190" name="pt190"/>
-            <p:cNvSpPr/>
-            <p:nvPr/>
-          </p:nvSpPr>
-          <p:spPr>
-            <a:xfrm>
-              <a:off x="7288559" y="4909690"/>
+            <p:cNvPr id="191" name="pt191"/>
+            <p:cNvSpPr/>
+            <p:nvPr/>
+          </p:nvSpPr>
+          <p:spPr>
+            <a:xfrm>
+              <a:off x="7288559" y="5037529"/>
               <a:ext cx="46123" cy="46123"/>
             </a:xfrm>
             <a:prstGeom prst="ellipse">
@@ -9742,13 +9785,13 @@
         </p:sp>
         <p:sp>
           <p:nvSpPr>
-            <p:cNvPr id="191" name="pt191"/>
-            <p:cNvSpPr/>
-            <p:nvPr/>
-          </p:nvSpPr>
-          <p:spPr>
-            <a:xfrm>
-              <a:off x="8656805" y="5948231"/>
+            <p:cNvPr id="192" name="pt192"/>
+            <p:cNvSpPr/>
+            <p:nvPr/>
+          </p:nvSpPr>
+          <p:spPr>
+            <a:xfrm>
+              <a:off x="8656805" y="5944220"/>
               <a:ext cx="46123" cy="46123"/>
             </a:xfrm>
             <a:prstGeom prst="ellipse">
@@ -9777,7 +9820,7 @@
         </p:sp>
         <p:sp>
           <p:nvSpPr>
-            <p:cNvPr id="192" name="pt192"/>
+            <p:cNvPr id="193" name="pt193"/>
             <p:cNvSpPr/>
             <p:nvPr/>
           </p:nvSpPr>
@@ -9812,13 +9855,13 @@
         </p:sp>
         <p:sp>
           <p:nvSpPr>
-            <p:cNvPr id="193" name="pt193"/>
-            <p:cNvSpPr/>
-            <p:nvPr/>
-          </p:nvSpPr>
-          <p:spPr>
-            <a:xfrm>
-              <a:off x="5920314" y="4636521"/>
+            <p:cNvPr id="194" name="pt194"/>
+            <p:cNvSpPr/>
+            <p:nvPr/>
+          </p:nvSpPr>
+          <p:spPr>
+            <a:xfrm>
+              <a:off x="5920314" y="4448348"/>
               <a:ext cx="46123" cy="46123"/>
             </a:xfrm>
             <a:prstGeom prst="ellipse">
@@ -9847,13 +9890,13 @@
         </p:sp>
         <p:sp>
           <p:nvSpPr>
-            <p:cNvPr id="194" name="pt194"/>
-            <p:cNvSpPr/>
-            <p:nvPr/>
-          </p:nvSpPr>
-          <p:spPr>
-            <a:xfrm>
-              <a:off x="7288559" y="4871632"/>
+            <p:cNvPr id="195" name="pt195"/>
+            <p:cNvSpPr/>
+            <p:nvPr/>
+          </p:nvSpPr>
+          <p:spPr>
+            <a:xfrm>
+              <a:off x="7288559" y="4894811"/>
               <a:ext cx="46123" cy="46123"/>
             </a:xfrm>
             <a:prstGeom prst="ellipse">
@@ -9882,13 +9925,13 @@
         </p:sp>
         <p:sp>
           <p:nvSpPr>
-            <p:cNvPr id="195" name="pt195"/>
-            <p:cNvSpPr/>
-            <p:nvPr/>
-          </p:nvSpPr>
-          <p:spPr>
-            <a:xfrm>
-              <a:off x="8656805" y="5900237"/>
+            <p:cNvPr id="196" name="pt196"/>
+            <p:cNvSpPr/>
+            <p:nvPr/>
+          </p:nvSpPr>
+          <p:spPr>
+            <a:xfrm>
+              <a:off x="8656805" y="5867283"/>
               <a:ext cx="46123" cy="46123"/>
             </a:xfrm>
             <a:prstGeom prst="ellipse">
@@ -9917,7 +9960,7 @@
         </p:sp>
         <p:sp>
           <p:nvSpPr>
-            <p:cNvPr id="196" name="pt196"/>
+            <p:cNvPr id="197" name="pt197"/>
             <p:cNvSpPr/>
             <p:nvPr/>
           </p:nvSpPr>
@@ -9952,7 +9995,7 @@
         </p:sp>
         <p:sp>
           <p:nvSpPr>
-            <p:cNvPr id="197" name="pt197"/>
+            <p:cNvPr id="198" name="pt198"/>
             <p:cNvSpPr/>
             <p:nvPr/>
           </p:nvSpPr>
@@ -9987,13 +10030,13 @@
         </p:sp>
         <p:sp>
           <p:nvSpPr>
-            <p:cNvPr id="198" name="pt198"/>
-            <p:cNvSpPr/>
-            <p:nvPr/>
-          </p:nvSpPr>
-          <p:spPr>
-            <a:xfrm>
-              <a:off x="7288559" y="4928883"/>
+            <p:cNvPr id="199" name="pt199"/>
+            <p:cNvSpPr/>
+            <p:nvPr/>
+          </p:nvSpPr>
+          <p:spPr>
+            <a:xfrm>
+              <a:off x="7288559" y="5039617"/>
               <a:ext cx="46123" cy="46123"/>
             </a:xfrm>
             <a:prstGeom prst="ellipse">
@@ -10022,13 +10065,13 @@
         </p:sp>
         <p:sp>
           <p:nvSpPr>
-            <p:cNvPr id="199" name="pt199"/>
-            <p:cNvSpPr/>
-            <p:nvPr/>
-          </p:nvSpPr>
-          <p:spPr>
-            <a:xfrm>
-              <a:off x="8656805" y="6189465"/>
+            <p:cNvPr id="200" name="pt200"/>
+            <p:cNvSpPr/>
+            <p:nvPr/>
+          </p:nvSpPr>
+          <p:spPr>
+            <a:xfrm>
+              <a:off x="8656805" y="6200563"/>
               <a:ext cx="46123" cy="46123"/>
             </a:xfrm>
             <a:prstGeom prst="ellipse">
@@ -10057,7 +10100,7 @@
         </p:sp>
         <p:sp>
           <p:nvSpPr>
-            <p:cNvPr id="200" name="pt200"/>
+            <p:cNvPr id="201" name="pt201"/>
             <p:cNvSpPr/>
             <p:nvPr/>
           </p:nvSpPr>
@@ -10092,7 +10135,7 @@
         </p:sp>
         <p:sp>
           <p:nvSpPr>
-            <p:cNvPr id="201" name="pt201"/>
+            <p:cNvPr id="202" name="pt202"/>
             <p:cNvSpPr/>
             <p:nvPr/>
           </p:nvSpPr>
@@ -10122,7 +10165,7 @@
         </p:sp>
         <p:sp>
           <p:nvSpPr>
-            <p:cNvPr id="202" name="pt202"/>
+            <p:cNvPr id="203" name="pt203"/>
             <p:cNvSpPr/>
             <p:nvPr/>
           </p:nvSpPr>
@@ -10152,7 +10195,7 @@
         </p:sp>
         <p:sp>
           <p:nvSpPr>
-            <p:cNvPr id="203" name="pt203"/>
+            <p:cNvPr id="204" name="pt204"/>
             <p:cNvSpPr/>
             <p:nvPr/>
           </p:nvSpPr>
@@ -10182,7 +10225,7 @@
         </p:sp>
         <p:sp>
           <p:nvSpPr>
-            <p:cNvPr id="204" name="pl204"/>
+            <p:cNvPr id="205" name="pl205"/>
             <p:cNvSpPr/>
             <p:nvPr/>
           </p:nvSpPr>
@@ -10222,7 +10265,7 @@
         </p:sp>
         <p:sp>
           <p:nvSpPr>
-            <p:cNvPr id="205" name="tx205"/>
+            <p:cNvPr id="206" name="tx206"/>
             <p:cNvSpPr/>
             <p:nvPr/>
           </p:nvSpPr>
@@ -10265,13 +10308,13 @@
         </p:sp>
         <p:sp>
           <p:nvSpPr>
-            <p:cNvPr id="206" name="tx206"/>
-            <p:cNvSpPr/>
-            <p:nvPr/>
-          </p:nvSpPr>
-          <p:spPr>
-            <a:xfrm>
-              <a:off x="5624692" y="5936235"/>
+            <p:cNvPr id="207" name="tx207"/>
+            <p:cNvSpPr/>
+            <p:nvPr/>
+          </p:nvSpPr>
+          <p:spPr>
+            <a:xfrm>
+              <a:off x="5624692" y="5939034"/>
               <a:ext cx="56509" cy="72786"/>
             </a:xfrm>
             <a:prstGeom prst="rect">
@@ -10308,13 +10351,13 @@
         </p:sp>
         <p:sp>
           <p:nvSpPr>
-            <p:cNvPr id="207" name="tx207"/>
-            <p:cNvSpPr/>
-            <p:nvPr/>
-          </p:nvSpPr>
-          <p:spPr>
-            <a:xfrm>
-              <a:off x="5568182" y="5507401"/>
+            <p:cNvPr id="208" name="tx208"/>
+            <p:cNvSpPr/>
+            <p:nvPr/>
+          </p:nvSpPr>
+          <p:spPr>
+            <a:xfrm>
+              <a:off x="5568182" y="5513000"/>
               <a:ext cx="113019" cy="72786"/>
             </a:xfrm>
             <a:prstGeom prst="rect">
@@ -10351,13 +10394,13 @@
         </p:sp>
         <p:sp>
           <p:nvSpPr>
-            <p:cNvPr id="208" name="tx208"/>
-            <p:cNvSpPr/>
-            <p:nvPr/>
-          </p:nvSpPr>
-          <p:spPr>
-            <a:xfrm>
-              <a:off x="5568182" y="5078568"/>
+            <p:cNvPr id="209" name="tx209"/>
+            <p:cNvSpPr/>
+            <p:nvPr/>
+          </p:nvSpPr>
+          <p:spPr>
+            <a:xfrm>
+              <a:off x="5568182" y="5086967"/>
               <a:ext cx="113019" cy="72786"/>
             </a:xfrm>
             <a:prstGeom prst="rect">
@@ -10394,13 +10437,13 @@
         </p:sp>
         <p:sp>
           <p:nvSpPr>
-            <p:cNvPr id="209" name="tx209"/>
-            <p:cNvSpPr/>
-            <p:nvPr/>
-          </p:nvSpPr>
-          <p:spPr>
-            <a:xfrm>
-              <a:off x="5568182" y="4649735"/>
+            <p:cNvPr id="210" name="tx210"/>
+            <p:cNvSpPr/>
+            <p:nvPr/>
+          </p:nvSpPr>
+          <p:spPr>
+            <a:xfrm>
+              <a:off x="5568182" y="4660933"/>
               <a:ext cx="113019" cy="72786"/>
             </a:xfrm>
             <a:prstGeom prst="rect">
@@ -10437,7 +10480,50 @@
         </p:sp>
         <p:sp>
           <p:nvSpPr>
-            <p:cNvPr id="210" name="pl210"/>
+            <p:cNvPr id="211" name="tx211"/>
+            <p:cNvSpPr/>
+            <p:nvPr/>
+          </p:nvSpPr>
+          <p:spPr>
+            <a:xfrm>
+              <a:off x="5568182" y="4234899"/>
+              <a:ext cx="113019" cy="72786"/>
+            </a:xfrm>
+            <a:prstGeom prst="rect">
+              <a:avLst/>
+            </a:prstGeom>
+            <a:noFill/>
+          </p:spPr>
+          <p:txBody>
+            <a:bodyPr lIns="0" rIns="0" tIns="0" bIns="0" anchorCtr="1" anchor="ctr" wrap="none"/>
+            <a:lstStyle/>
+            <a:p>
+              <a:pPr algn="l" marL="0" marR="0" indent="0">
+                <a:spcBef>
+                  <a:spcPts val="0"/>
+                </a:spcBef>
+                <a:spcAft>
+                  <a:spcPts val="0"/>
+                </a:spcAft>
+              </a:pPr>
+              <a:r>
+                <a:rPr sz="800" i="0" b="0">
+                  <a:solidFill>
+                    <a:srgbClr val="262626">
+                      <a:alpha val="100000"/>
+                    </a:srgbClr>
+                  </a:solidFill>
+                  <a:latin typeface="Arial"/>
+                  <a:cs typeface="Arial"/>
+                </a:rPr>
+                <a:t>25</a:t>
+              </a:r>
+            </a:p>
+          </p:txBody>
+        </p:sp>
+        <p:sp>
+          <p:nvSpPr>
+            <p:cNvPr id="212" name="pl212"/>
             <p:cNvSpPr/>
             <p:nvPr/>
           </p:nvSpPr>
@@ -10477,13 +10563,13 @@
         </p:sp>
         <p:sp>
           <p:nvSpPr>
-            <p:cNvPr id="211" name="pl211"/>
-            <p:cNvSpPr/>
-            <p:nvPr/>
-          </p:nvSpPr>
-          <p:spPr>
-            <a:xfrm>
-              <a:off x="5706507" y="5972628"/>
+            <p:cNvPr id="213" name="pl213"/>
+            <p:cNvSpPr/>
+            <p:nvPr/>
+          </p:nvSpPr>
+          <p:spPr>
+            <a:xfrm>
+              <a:off x="5706507" y="5975427"/>
               <a:ext cx="31631" cy="0"/>
             </a:xfrm>
             <a:custGeom>
@@ -10517,13 +10603,13 @@
         </p:sp>
         <p:sp>
           <p:nvSpPr>
-            <p:cNvPr id="212" name="pl212"/>
-            <p:cNvSpPr/>
-            <p:nvPr/>
-          </p:nvSpPr>
-          <p:spPr>
-            <a:xfrm>
-              <a:off x="5706507" y="5543795"/>
+            <p:cNvPr id="214" name="pl214"/>
+            <p:cNvSpPr/>
+            <p:nvPr/>
+          </p:nvSpPr>
+          <p:spPr>
+            <a:xfrm>
+              <a:off x="5706507" y="5549394"/>
               <a:ext cx="31631" cy="0"/>
             </a:xfrm>
             <a:custGeom>
@@ -10557,13 +10643,13 @@
         </p:sp>
         <p:sp>
           <p:nvSpPr>
-            <p:cNvPr id="213" name="pl213"/>
-            <p:cNvSpPr/>
-            <p:nvPr/>
-          </p:nvSpPr>
-          <p:spPr>
-            <a:xfrm>
-              <a:off x="5706507" y="5114961"/>
+            <p:cNvPr id="215" name="pl215"/>
+            <p:cNvSpPr/>
+            <p:nvPr/>
+          </p:nvSpPr>
+          <p:spPr>
+            <a:xfrm>
+              <a:off x="5706507" y="5123360"/>
               <a:ext cx="31631" cy="0"/>
             </a:xfrm>
             <a:custGeom>
@@ -10597,13 +10683,13 @@
         </p:sp>
         <p:sp>
           <p:nvSpPr>
-            <p:cNvPr id="214" name="pl214"/>
-            <p:cNvSpPr/>
-            <p:nvPr/>
-          </p:nvSpPr>
-          <p:spPr>
-            <a:xfrm>
-              <a:off x="5706507" y="4686128"/>
+            <p:cNvPr id="216" name="pl216"/>
+            <p:cNvSpPr/>
+            <p:nvPr/>
+          </p:nvSpPr>
+          <p:spPr>
+            <a:xfrm>
+              <a:off x="5706507" y="4697326"/>
               <a:ext cx="31631" cy="0"/>
             </a:xfrm>
             <a:custGeom>
@@ -10637,7 +10723,47 @@
         </p:sp>
         <p:sp>
           <p:nvSpPr>
-            <p:cNvPr id="215" name="pl215"/>
+            <p:cNvPr id="217" name="pl217"/>
+            <p:cNvSpPr/>
+            <p:nvPr/>
+          </p:nvSpPr>
+          <p:spPr>
+            <a:xfrm>
+              <a:off x="5706507" y="4271292"/>
+              <a:ext cx="31631" cy="0"/>
+            </a:xfrm>
+            <a:custGeom>
+              <a:avLst/>
+              <a:pathLst>
+                <a:path w="31631" h="0">
+                  <a:moveTo>
+                    <a:pt x="0" y="0"/>
+                  </a:moveTo>
+                  <a:lnTo>
+                    <a:pt x="31631" y="0"/>
+                  </a:lnTo>
+                </a:path>
+              </a:pathLst>
+            </a:custGeom>
+            <a:ln w="8130" cap="flat">
+              <a:solidFill>
+                <a:srgbClr val="333333">
+                  <a:alpha val="100000"/>
+                </a:srgbClr>
+              </a:solidFill>
+              <a:prstDash val="solid"/>
+              <a:round/>
+            </a:ln>
+          </p:spPr>
+          <p:txBody>
+            <a:bodyPr/>
+            <a:lstStyle/>
+            <a:p/>
+          </p:txBody>
+        </p:sp>
+        <p:sp>
+          <p:nvSpPr>
+            <p:cNvPr id="218" name="pl218"/>
             <p:cNvSpPr/>
             <p:nvPr/>
           </p:nvSpPr>
@@ -10677,7 +10803,7 @@
         </p:sp>
         <p:sp>
           <p:nvSpPr>
-            <p:cNvPr id="216" name="pl216"/>
+            <p:cNvPr id="219" name="pl219"/>
             <p:cNvSpPr/>
             <p:nvPr/>
           </p:nvSpPr>
@@ -10717,7 +10843,7 @@
         </p:sp>
         <p:sp>
           <p:nvSpPr>
-            <p:cNvPr id="217" name="pl217"/>
+            <p:cNvPr id="220" name="pl220"/>
             <p:cNvSpPr/>
             <p:nvPr/>
           </p:nvSpPr>
@@ -10757,7 +10883,7 @@
         </p:sp>
         <p:sp>
           <p:nvSpPr>
-            <p:cNvPr id="218" name="pl218"/>
+            <p:cNvPr id="221" name="pl221"/>
             <p:cNvSpPr/>
             <p:nvPr/>
           </p:nvSpPr>
@@ -10797,7 +10923,7 @@
         </p:sp>
         <p:sp>
           <p:nvSpPr>
-            <p:cNvPr id="219" name="pl219"/>
+            <p:cNvPr id="222" name="pl222"/>
             <p:cNvSpPr/>
             <p:nvPr/>
           </p:nvSpPr>
@@ -10837,7 +10963,7 @@
         </p:sp>
         <p:sp>
           <p:nvSpPr>
-            <p:cNvPr id="220" name="tx220"/>
+            <p:cNvPr id="223" name="tx223"/>
             <p:cNvSpPr/>
             <p:nvPr/>
           </p:nvSpPr>
@@ -10880,7 +11006,7 @@
         </p:sp>
         <p:sp>
           <p:nvSpPr>
-            <p:cNvPr id="221" name="tx221"/>
+            <p:cNvPr id="224" name="tx224"/>
             <p:cNvSpPr/>
             <p:nvPr/>
           </p:nvSpPr>
@@ -10923,7 +11049,7 @@
         </p:sp>
         <p:sp>
           <p:nvSpPr>
-            <p:cNvPr id="222" name="tx222"/>
+            <p:cNvPr id="225" name="tx225"/>
             <p:cNvSpPr/>
             <p:nvPr/>
           </p:nvSpPr>
@@ -10966,7 +11092,7 @@
         </p:sp>
         <p:sp>
           <p:nvSpPr>
-            <p:cNvPr id="223" name="tx223"/>
+            <p:cNvPr id="226" name="tx226"/>
             <p:cNvSpPr/>
             <p:nvPr/>
           </p:nvSpPr>
@@ -11009,7 +11135,7 @@
         </p:sp>
         <p:sp>
           <p:nvSpPr>
-            <p:cNvPr id="224" name="tx224"/>
+            <p:cNvPr id="227" name="tx227"/>
             <p:cNvSpPr/>
             <p:nvPr/>
           </p:nvSpPr>
@@ -11052,7 +11178,7 @@
         </p:sp>
         <p:sp>
           <p:nvSpPr>
-            <p:cNvPr id="225" name="tx225"/>
+            <p:cNvPr id="228" name="tx228"/>
             <p:cNvSpPr/>
             <p:nvPr/>
           </p:nvSpPr>
@@ -11095,7 +11221,7 @@
         </p:sp>
         <p:sp>
           <p:nvSpPr>
-            <p:cNvPr id="226" name="tx226"/>
+            <p:cNvPr id="229" name="tx229"/>
             <p:cNvSpPr/>
             <p:nvPr/>
           </p:nvSpPr>
@@ -11131,14 +11257,14 @@
                   <a:latin typeface="Arial"/>
                   <a:cs typeface="Arial"/>
                 </a:rPr>
-                <a:t>Circles mark the AIC optimum; W = 15 is within 2.2-5.6 units of it in every series. </a:t>
+                <a:t>Circles mark the AIC optimum; W = 15 is within 2.1-6.0 units of it in every series. </a:t>
               </a:r>
             </a:p>
           </p:txBody>
         </p:sp>
         <p:sp>
           <p:nvSpPr>
-            <p:cNvPr id="227" name="tx227"/>
+            <p:cNvPr id="230" name="tx230"/>
             <p:cNvSpPr/>
             <p:nvPr/>
           </p:nvSpPr>
@@ -11181,7 +11307,7 @@
         </p:sp>
         <p:sp>
           <p:nvSpPr>
-            <p:cNvPr id="228" name="tx228"/>
+            <p:cNvPr id="231" name="tx231"/>
             <p:cNvSpPr/>
             <p:nvPr/>
           </p:nvSpPr>
@@ -11224,7 +11350,7 @@
         </p:sp>
         <p:sp>
           <p:nvSpPr>
-            <p:cNvPr id="229" name="tx229"/>
+            <p:cNvPr id="232" name="tx232"/>
             <p:cNvSpPr/>
             <p:nvPr/>
           </p:nvSpPr>
@@ -11267,7 +11393,7 @@
         </p:sp>
         <p:sp>
           <p:nvSpPr>
-            <p:cNvPr id="230" name="tx230"/>
+            <p:cNvPr id="233" name="tx233"/>
             <p:cNvSpPr/>
             <p:nvPr/>
           </p:nvSpPr>
@@ -11310,7 +11436,7 @@
         </p:sp>
         <p:sp>
           <p:nvSpPr>
-            <p:cNvPr id="231" name="tx231"/>
+            <p:cNvPr id="234" name="tx234"/>
             <p:cNvSpPr/>
             <p:nvPr/>
           </p:nvSpPr>
